--- a/docs/E2EE-Architecture.pptx
+++ b/docs/E2EE-Architecture.pptx
@@ -20,6 +20,7 @@
     <p:sldId id="268" r:id="rId19"/>
     <p:sldId id="269" r:id="rId20"/>
     <p:sldId id="270" r:id="rId21"/>
+    <p:sldId id="271" r:id="rId22"/>
   </p:sldIdLst>
   <p:sldSz cx="12191695" cy="6858000" type="screen4x3"/>
   <p:notesSz cx="6858000" cy="9144000"/>
@@ -5200,7 +5201,7 @@
                 </a:solidFill>
                 <a:latin typeface="Segoe UI"/>
               </a:rPr>
-              <a:t>SECURITY</a:t>
+              <a:t>PHASE 3</a:t>
             </a:r>
           </a:p>
         </p:txBody>
@@ -5235,7 +5236,7 @@
                 </a:solidFill>
                 <a:latin typeface="Segoe UI"/>
               </a:rPr>
-              <a:t>What the SFU can — and cannot — see</a:t>
+              <a:t>Multi-party (N:N) — dynamic SDP renegotiation</a:t>
             </a:r>
           </a:p>
         </p:txBody>
@@ -5248,14 +5249,215 @@
         </p:nvSpPr>
         <p:spPr>
           <a:xfrm>
-            <a:off x="640080" y="1737360"/>
-            <a:ext cx="5303520" cy="3291840"/>
+            <a:off x="640080" y="1554480"/>
+            <a:ext cx="2286000" cy="914400"/>
           </a:xfrm>
           <a:prstGeom prst="roundRect">
             <a:avLst/>
           </a:prstGeom>
           <a:solidFill>
-            <a:srgbClr val="1B2A4A"/>
+            <a:srgbClr val="2E5C9E"/>
+          </a:solidFill>
+          <a:ln w="15875">
+            <a:solidFill>
+              <a:srgbClr val="4C9AFF"/>
+            </a:solidFill>
+          </a:ln>
+          <a:effectLst/>
+        </p:spPr>
+        <p:style>
+          <a:lnRef idx="1">
+            <a:schemeClr val="accent1"/>
+          </a:lnRef>
+          <a:fillRef idx="3">
+            <a:schemeClr val="accent1"/>
+          </a:fillRef>
+          <a:effectRef idx="2">
+            <a:schemeClr val="accent1"/>
+          </a:effectRef>
+          <a:fontRef idx="minor">
+            <a:schemeClr val="lt1"/>
+          </a:fontRef>
+        </p:style>
+        <p:txBody>
+          <a:bodyPr rtlCol="0" anchor="ctr" wrap="square" lIns="73152" rIns="73152" tIns="36576" bIns="36576"/>
+          <a:lstStyle/>
+          <a:p>
+            <a:pPr algn="ctr"/>
+            <a:r>
+              <a:rPr sz="1400" b="1">
+                <a:solidFill>
+                  <a:srgbClr val="F5F8FF"/>
+                </a:solidFill>
+                <a:latin typeface="Segoe UI"/>
+              </a:rPr>
+              <a:t>alice joins</a:t>
+            </a:r>
+          </a:p>
+          <a:p>
+            <a:pPr algn="ctr"/>
+            <a:r>
+              <a:rPr sz="1400" b="1">
+                <a:solidFill>
+                  <a:srgbClr val="F5F8FF"/>
+                </a:solidFill>
+                <a:latin typeface="Segoe UI"/>
+              </a:rPr>
+              <a:t>offers own A+V</a:t>
+            </a:r>
+          </a:p>
+        </p:txBody>
+      </p:sp>
+      <p:sp>
+        <p:nvSpPr>
+          <p:cNvPr id="7" name="Rounded Rectangle 6"/>
+          <p:cNvSpPr/>
+          <p:nvPr/>
+        </p:nvSpPr>
+        <p:spPr>
+          <a:xfrm>
+            <a:off x="3200400" y="1554480"/>
+            <a:ext cx="2286000" cy="914400"/>
+          </a:xfrm>
+          <a:prstGeom prst="roundRect">
+            <a:avLst/>
+          </a:prstGeom>
+          <a:solidFill>
+            <a:srgbClr val="2E5C9E"/>
+          </a:solidFill>
+          <a:ln w="15875">
+            <a:solidFill>
+              <a:srgbClr val="4C9AFF"/>
+            </a:solidFill>
+          </a:ln>
+          <a:effectLst/>
+        </p:spPr>
+        <p:style>
+          <a:lnRef idx="1">
+            <a:schemeClr val="accent1"/>
+          </a:lnRef>
+          <a:fillRef idx="3">
+            <a:schemeClr val="accent1"/>
+          </a:fillRef>
+          <a:effectRef idx="2">
+            <a:schemeClr val="accent1"/>
+          </a:effectRef>
+          <a:fontRef idx="minor">
+            <a:schemeClr val="lt1"/>
+          </a:fontRef>
+        </p:style>
+        <p:txBody>
+          <a:bodyPr rtlCol="0" anchor="ctr" wrap="square" lIns="73152" rIns="73152" tIns="36576" bIns="36576"/>
+          <a:lstStyle/>
+          <a:p>
+            <a:pPr algn="ctr"/>
+            <a:r>
+              <a:rPr sz="1400" b="1">
+                <a:solidFill>
+                  <a:srgbClr val="F5F8FF"/>
+                </a:solidFill>
+                <a:latin typeface="Segoe UI"/>
+              </a:rPr>
+              <a:t>bob joins</a:t>
+            </a:r>
+          </a:p>
+          <a:p>
+            <a:pPr algn="ctr"/>
+            <a:r>
+              <a:rPr sz="1400" b="1">
+                <a:solidFill>
+                  <a:srgbClr val="F5F8FF"/>
+                </a:solidFill>
+                <a:latin typeface="Segoe UI"/>
+              </a:rPr>
+              <a:t>1:1 — no reneg</a:t>
+            </a:r>
+          </a:p>
+        </p:txBody>
+      </p:sp>
+      <p:sp>
+        <p:nvSpPr>
+          <p:cNvPr id="8" name="Rounded Rectangle 7"/>
+          <p:cNvSpPr/>
+          <p:nvPr/>
+        </p:nvSpPr>
+        <p:spPr>
+          <a:xfrm>
+            <a:off x="5760720" y="1554480"/>
+            <a:ext cx="2286000" cy="914400"/>
+          </a:xfrm>
+          <a:prstGeom prst="roundRect">
+            <a:avLst/>
+          </a:prstGeom>
+          <a:solidFill>
+            <a:srgbClr val="6B478F"/>
+          </a:solidFill>
+          <a:ln w="15875">
+            <a:solidFill>
+              <a:srgbClr val="4C9AFF"/>
+            </a:solidFill>
+          </a:ln>
+          <a:effectLst/>
+        </p:spPr>
+        <p:style>
+          <a:lnRef idx="1">
+            <a:schemeClr val="accent1"/>
+          </a:lnRef>
+          <a:fillRef idx="3">
+            <a:schemeClr val="accent1"/>
+          </a:fillRef>
+          <a:effectRef idx="2">
+            <a:schemeClr val="accent1"/>
+          </a:effectRef>
+          <a:fontRef idx="minor">
+            <a:schemeClr val="lt1"/>
+          </a:fontRef>
+        </p:style>
+        <p:txBody>
+          <a:bodyPr rtlCol="0" anchor="ctr" wrap="square" lIns="73152" rIns="73152" tIns="36576" bIns="36576"/>
+          <a:lstStyle/>
+          <a:p>
+            <a:pPr algn="ctr"/>
+            <a:r>
+              <a:rPr sz="1400" b="1">
+                <a:solidFill>
+                  <a:srgbClr val="F5F8FF"/>
+                </a:solidFill>
+                <a:latin typeface="Segoe UI"/>
+              </a:rPr>
+              <a:t>carol joins</a:t>
+            </a:r>
+          </a:p>
+          <a:p>
+            <a:pPr algn="ctr"/>
+            <a:r>
+              <a:rPr sz="1400" b="1">
+                <a:solidFill>
+                  <a:srgbClr val="F5F8FF"/>
+                </a:solidFill>
+                <a:latin typeface="Segoe UI"/>
+              </a:rPr>
+              <a:t>SFU recomputes</a:t>
+            </a:r>
+          </a:p>
+        </p:txBody>
+      </p:sp>
+      <p:sp>
+        <p:nvSpPr>
+          <p:cNvPr id="9" name="Rounded Rectangle 8"/>
+          <p:cNvSpPr/>
+          <p:nvPr/>
+        </p:nvSpPr>
+        <p:spPr>
+          <a:xfrm>
+            <a:off x="8321040" y="1554480"/>
+            <a:ext cx="3200400" cy="914400"/>
+          </a:xfrm>
+          <a:prstGeom prst="roundRect">
+            <a:avLst/>
+          </a:prstGeom>
+          <a:solidFill>
+            <a:srgbClr val="6B478F"/>
           </a:solidFill>
           <a:ln w="15875">
             <a:solidFill>
@@ -5282,204 +5484,271 @@
           <a:bodyPr rtlCol="0" anchor="ctr" wrap="square" lIns="73152" rIns="73152" tIns="36576" bIns="36576"/>
           <a:lstStyle/>
           <a:p>
-            <a:pPr algn="l"/>
-            <a:r>
-              <a:rPr sz="1600" b="0">
-                <a:solidFill>
-                  <a:srgbClr val="F5F8FF"/>
-                </a:solidFill>
-                <a:latin typeface="Segoe UI"/>
-              </a:rPr>
-              <a:t>VISIBLE</a:t>
-            </a:r>
-          </a:p>
-          <a:p>
-            <a:pPr algn="l"/>
-            <a:r>
-              <a:rPr sz="1600" b="0">
-                <a:solidFill>
-                  <a:srgbClr val="F5F8FF"/>
-                </a:solidFill>
-                <a:latin typeface="Segoe UI"/>
-              </a:rPr>
-              <a:t/>
-            </a:r>
-          </a:p>
-          <a:p>
-            <a:pPr algn="l"/>
-            <a:r>
-              <a:rPr sz="1600" b="0">
-                <a:solidFill>
-                  <a:srgbClr val="F5F8FF"/>
-                </a:solidFill>
-                <a:latin typeface="Segoe UI"/>
-              </a:rPr>
-              <a:t>RTP headers (SSRC/PT/seq/ts)</a:t>
-            </a:r>
-          </a:p>
-          <a:p>
-            <a:pPr algn="l"/>
-            <a:r>
-              <a:rPr sz="1600" b="0">
-                <a:solidFill>
-                  <a:srgbClr val="F5F8FF"/>
-                </a:solidFill>
-                <a:latin typeface="Segoe UI"/>
-              </a:rPr>
-              <a:t>HBH SRTP for its own legs</a:t>
-            </a:r>
-          </a:p>
-          <a:p>
-            <a:pPr algn="l"/>
-            <a:r>
-              <a:rPr sz="1600" b="0">
-                <a:solidFill>
-                  <a:srgbClr val="F5F8FF"/>
-                </a:solidFill>
-                <a:latin typeface="Segoe UI"/>
-              </a:rPr>
-              <a:t>1-byte VP8 key/delta marker</a:t>
-            </a:r>
-          </a:p>
-          <a:p>
-            <a:pPr algn="l"/>
-            <a:r>
-              <a:rPr sz="1600" b="0">
-                <a:solidFill>
-                  <a:srgbClr val="F5F8FF"/>
-                </a:solidFill>
-                <a:latin typeface="Segoe UI"/>
-              </a:rPr>
-              <a:t>Packet sizes &amp; timing</a:t>
-            </a:r>
-          </a:p>
-        </p:txBody>
-      </p:sp>
-      <p:sp>
-        <p:nvSpPr>
-          <p:cNvPr id="7" name="Rounded Rectangle 6"/>
-          <p:cNvSpPr/>
-          <p:nvPr/>
-        </p:nvSpPr>
-        <p:spPr>
-          <a:xfrm>
-            <a:off x="6217920" y="1737360"/>
-            <a:ext cx="5303520" cy="3291840"/>
-          </a:xfrm>
-          <a:prstGeom prst="roundRect">
-            <a:avLst/>
-          </a:prstGeom>
-          <a:solidFill>
-            <a:srgbClr val="1B2A4A"/>
-          </a:solidFill>
-          <a:ln w="15875">
+            <a:pPr algn="ctr"/>
+            <a:r>
+              <a:rPr sz="1400" b="1">
+                <a:solidFill>
+                  <a:srgbClr val="F5F8FF"/>
+                </a:solidFill>
+                <a:latin typeface="Segoe UI"/>
+              </a:rPr>
+              <a:t>all re-offer +1 slot</a:t>
+            </a:r>
+          </a:p>
+          <a:p>
+            <a:pPr algn="ctr"/>
+            <a:r>
+              <a:rPr sz="1400" b="1">
+                <a:solidFill>
+                  <a:srgbClr val="F5F8FF"/>
+                </a:solidFill>
+                <a:latin typeface="Segoe UI"/>
+              </a:rPr>
+              <a:t>3-way fan-out</a:t>
+            </a:r>
+          </a:p>
+        </p:txBody>
+      </p:sp>
+      <p:cxnSp>
+        <p:nvCxnSpPr>
+          <p:cNvPr id="10" name="Connector 9"/>
+          <p:cNvCxnSpPr/>
+          <p:nvPr/>
+        </p:nvCxnSpPr>
+        <p:spPr>
+          <a:xfrm>
+            <a:off x="2926080" y="2011680"/>
+            <a:ext cx="274320" cy="0"/>
+          </a:xfrm>
+          <a:prstGeom prst="line">
+            <a:avLst/>
+          </a:prstGeom>
+          <a:ln w="19050">
             <a:solidFill>
-              <a:srgbClr val="35D09B"/>
+              <a:srgbClr val="A9B8D6"/>
             </a:solidFill>
+            <a:tailEnd type="triangle" w="med" len="med"/>
           </a:ln>
           <a:effectLst/>
         </p:spPr>
         <p:style>
-          <a:lnRef idx="1">
+          <a:lnRef idx="2">
             <a:schemeClr val="accent1"/>
           </a:lnRef>
-          <a:fillRef idx="3">
+          <a:fillRef idx="0">
             <a:schemeClr val="accent1"/>
           </a:fillRef>
-          <a:effectRef idx="2">
+          <a:effectRef idx="1">
             <a:schemeClr val="accent1"/>
           </a:effectRef>
           <a:fontRef idx="minor">
-            <a:schemeClr val="lt1"/>
+            <a:schemeClr val="tx1"/>
           </a:fontRef>
         </p:style>
-        <p:txBody>
-          <a:bodyPr rtlCol="0" anchor="ctr" wrap="square" lIns="73152" rIns="73152" tIns="36576" bIns="36576"/>
-          <a:lstStyle/>
-          <a:p>
-            <a:pPr algn="l"/>
-            <a:r>
-              <a:rPr sz="1600" b="0">
-                <a:solidFill>
-                  <a:srgbClr val="F5F8FF"/>
-                </a:solidFill>
-                <a:latin typeface="Segoe UI"/>
-              </a:rPr>
-              <a:t>HIDDEN</a:t>
-            </a:r>
-          </a:p>
-          <a:p>
-            <a:pPr algn="l"/>
-            <a:r>
-              <a:rPr sz="1600" b="0">
-                <a:solidFill>
-                  <a:srgbClr val="F5F8FF"/>
-                </a:solidFill>
-                <a:latin typeface="Segoe UI"/>
-              </a:rPr>
-              <a:t/>
-            </a:r>
-          </a:p>
-          <a:p>
-            <a:pPr algn="l"/>
-            <a:r>
-              <a:rPr sz="1600" b="0">
-                <a:solidFill>
-                  <a:srgbClr val="F5F8FF"/>
-                </a:solidFill>
-                <a:latin typeface="Segoe UI"/>
-              </a:rPr>
-              <a:t>E2E media payload (inner GCM)</a:t>
-            </a:r>
-          </a:p>
-          <a:p>
-            <a:pPr algn="l"/>
-            <a:r>
-              <a:rPr sz="1600" b="0">
-                <a:solidFill>
-                  <a:srgbClr val="F5F8FF"/>
-                </a:solidFill>
-                <a:latin typeface="Segoe UI"/>
-              </a:rPr>
-              <a:t>The E2E key (KD + clients only)</a:t>
-            </a:r>
-          </a:p>
-          <a:p>
-            <a:pPr algn="l"/>
-            <a:r>
-              <a:rPr sz="1600" b="0">
-                <a:solidFill>
-                  <a:srgbClr val="F5F8FF"/>
-                </a:solidFill>
-                <a:latin typeface="Segoe UI"/>
-              </a:rPr>
-              <a:t>Decoded media / codec bitstream</a:t>
-            </a:r>
-          </a:p>
-          <a:p>
-            <a:pPr algn="l"/>
-            <a:r>
-              <a:rPr sz="1600" b="0">
-                <a:solidFill>
-                  <a:srgbClr val="F5F8FF"/>
-                </a:solidFill>
-                <a:latin typeface="Segoe UI"/>
-              </a:rPr>
-              <a:t>Inner header extensions</a:t>
-            </a:r>
-          </a:p>
-        </p:txBody>
-      </p:sp>
-      <p:sp>
-        <p:nvSpPr>
-          <p:cNvPr id="8" name="TextBox 7"/>
+      </p:cxnSp>
+      <p:cxnSp>
+        <p:nvCxnSpPr>
+          <p:cNvPr id="11" name="Connector 10"/>
+          <p:cNvCxnSpPr/>
+          <p:nvPr/>
+        </p:nvCxnSpPr>
+        <p:spPr>
+          <a:xfrm>
+            <a:off x="5486400" y="2011680"/>
+            <a:ext cx="274320" cy="0"/>
+          </a:xfrm>
+          <a:prstGeom prst="line">
+            <a:avLst/>
+          </a:prstGeom>
+          <a:ln w="19050">
+            <a:solidFill>
+              <a:srgbClr val="A9B8D6"/>
+            </a:solidFill>
+            <a:tailEnd type="triangle" w="med" len="med"/>
+          </a:ln>
+          <a:effectLst/>
+        </p:spPr>
+        <p:style>
+          <a:lnRef idx="2">
+            <a:schemeClr val="accent1"/>
+          </a:lnRef>
+          <a:fillRef idx="0">
+            <a:schemeClr val="accent1"/>
+          </a:fillRef>
+          <a:effectRef idx="1">
+            <a:schemeClr val="accent1"/>
+          </a:effectRef>
+          <a:fontRef idx="minor">
+            <a:schemeClr val="tx1"/>
+          </a:fontRef>
+        </p:style>
+      </p:cxnSp>
+      <p:cxnSp>
+        <p:nvCxnSpPr>
+          <p:cNvPr id="12" name="Connector 11"/>
+          <p:cNvCxnSpPr/>
+          <p:nvPr/>
+        </p:nvCxnSpPr>
+        <p:spPr>
+          <a:xfrm>
+            <a:off x="8046720" y="2011680"/>
+            <a:ext cx="274320" cy="0"/>
+          </a:xfrm>
+          <a:prstGeom prst="line">
+            <a:avLst/>
+          </a:prstGeom>
+          <a:ln w="19050">
+            <a:solidFill>
+              <a:srgbClr val="A9B8D6"/>
+            </a:solidFill>
+            <a:tailEnd type="triangle" w="med" len="med"/>
+          </a:ln>
+          <a:effectLst/>
+        </p:spPr>
+        <p:style>
+          <a:lnRef idx="2">
+            <a:schemeClr val="accent1"/>
+          </a:lnRef>
+          <a:fillRef idx="0">
+            <a:schemeClr val="accent1"/>
+          </a:fillRef>
+          <a:effectRef idx="1">
+            <a:schemeClr val="accent1"/>
+          </a:effectRef>
+          <a:fontRef idx="minor">
+            <a:schemeClr val="tx1"/>
+          </a:fontRef>
+        </p:style>
+      </p:cxnSp>
+      <p:sp>
+        <p:nvSpPr>
+          <p:cNvPr id="13" name="TextBox 12"/>
           <p:cNvSpPr txBox="1"/>
           <p:nvPr/>
         </p:nvSpPr>
         <p:spPr>
           <a:xfrm>
-            <a:off x="640080" y="5303520"/>
-            <a:ext cx="10881360" cy="640080"/>
+            <a:off x="640080" y="2834640"/>
+            <a:ext cx="10789920" cy="4572000"/>
+          </a:xfrm>
+          <a:prstGeom prst="rect">
+            <a:avLst/>
+          </a:prstGeom>
+          <a:noFill/>
+        </p:spPr>
+        <p:txBody>
+          <a:bodyPr wrap="square">
+            <a:spAutoFit/>
+          </a:bodyPr>
+          <a:lstStyle/>
+          <a:p>
+            <a:pPr>
+              <a:spcAft>
+                <a:spcPts val="1152"/>
+              </a:spcAft>
+            </a:pPr>
+            <a:r>
+              <a:rPr sz="1800">
+                <a:solidFill>
+                  <a:srgbClr val="F5F8FF"/>
+                </a:solidFill>
+                <a:latin typeface="Segoe UI"/>
+              </a:rPr>
+              <a:t>• No fixed transceiver pool, no maxParticipants cap — the client is always the offerer.</a:t>
+            </a:r>
+          </a:p>
+          <a:p>
+            <a:pPr>
+              <a:spcAft>
+                <a:spcPts val="1152"/>
+              </a:spcAft>
+            </a:pPr>
+            <a:r>
+              <a:rPr sz="1800">
+                <a:solidFill>
+                  <a:srgbClr val="F5F8FF"/>
+                </a:solidFill>
+                <a:latin typeface="Segoe UI"/>
+              </a:rPr>
+              <a:t>• Initial offer carries only the client's own sendrecv audio+video, so 1:1 needs zero reneg.</a:t>
+            </a:r>
+          </a:p>
+          <a:p>
+            <a:pPr>
+              <a:spcAft>
+                <a:spcPts val="1152"/>
+              </a:spcAft>
+            </a:pPr>
+            <a:r>
+              <a:rPr sz="1800">
+                <a:solidFill>
+                  <a:srgbClr val="F5F8FF"/>
+                </a:solidFill>
+                <a:latin typeface="Segoe UI"/>
+              </a:rPr>
+              <a:t>• On membership change the SFU computes recv_slots = participants − 1 per kind, per client.</a:t>
+            </a:r>
+          </a:p>
+          <a:p>
+            <a:pPr>
+              <a:spcAft>
+                <a:spcPts val="1152"/>
+              </a:spcAft>
+            </a:pPr>
+            <a:r>
+              <a:rPr sz="1800">
+                <a:solidFill>
+                  <a:srgbClr val="F5F8FF"/>
+                </a:solidFill>
+                <a:latin typeface="Segoe UI"/>
+              </a:rPr>
+              <a:t>• Client polls GET /signal?client_id=N; when slots grow it adds recvonly transceivers and re-offers.</a:t>
+            </a:r>
+          </a:p>
+          <a:p>
+            <a:pPr>
+              <a:spcAft>
+                <a:spcPts val="1152"/>
+              </a:spcAft>
+            </a:pPr>
+            <a:r>
+              <a:rPr sz="1800">
+                <a:solidFill>
+                  <a:srgbClr val="F5F8FF"/>
+                </a:solidFill>
+                <a:latin typeface="Segoe UI"/>
+              </a:rPr>
+              <a:t>• POST /offer is relayed into the SFU run loop (request/reply channel) so accept_offer runs on the live Rtc.</a:t>
+            </a:r>
+          </a:p>
+          <a:p>
+            <a:pPr>
+              <a:spcAft>
+                <a:spcPts val="1152"/>
+              </a:spcAft>
+            </a:pPr>
+            <a:r>
+              <a:rPr sz="1800">
+                <a:solidFill>
+                  <a:srgbClr val="F5F8FF"/>
+                </a:solidFill>
+                <a:latin typeface="Segoe UI"/>
+              </a:rPr>
+              <a:t>• assign_slot pins each origin to a distinct m-line → every remote peer renders in its own window.</a:t>
+            </a:r>
+          </a:p>
+        </p:txBody>
+      </p:sp>
+      <p:sp>
+        <p:nvSpPr>
+          <p:cNvPr id="14" name="TextBox 13"/>
+          <p:cNvSpPr txBox="1"/>
+          <p:nvPr/>
+        </p:nvSpPr>
+        <p:spPr>
+          <a:xfrm>
+            <a:off x="548640" y="6446520"/>
+            <a:ext cx="7315200" cy="320040"/>
           </a:xfrm>
           <a:prstGeom prst="rect">
             <a:avLst/>
@@ -5492,49 +5761,14 @@
           </a:bodyPr>
           <a:lstStyle/>
           <a:p>
-            <a:pPr algn="ctr"/>
-            <a:r>
-              <a:rPr sz="1500" b="0">
+            <a:pPr algn="l"/>
+            <a:r>
+              <a:rPr sz="1000" b="0">
                 <a:solidFill>
                   <a:srgbClr val="A9B8D6"/>
                 </a:solidFill>
                 <a:latin typeface="Segoe UI"/>
               </a:rPr>
-              <a:t>Server compromise leaks routing metadata only — never the media content.</a:t>
-            </a:r>
-          </a:p>
-        </p:txBody>
-      </p:sp>
-      <p:sp>
-        <p:nvSpPr>
-          <p:cNvPr id="9" name="TextBox 8"/>
-          <p:cNvSpPr txBox="1"/>
-          <p:nvPr/>
-        </p:nvSpPr>
-        <p:spPr>
-          <a:xfrm>
-            <a:off x="548640" y="6446520"/>
-            <a:ext cx="7315200" cy="320040"/>
-          </a:xfrm>
-          <a:prstGeom prst="rect">
-            <a:avLst/>
-          </a:prstGeom>
-          <a:noFill/>
-        </p:spPr>
-        <p:txBody>
-          <a:bodyPr wrap="square" anchor="t">
-            <a:spAutoFit/>
-          </a:bodyPr>
-          <a:lstStyle/>
-          <a:p>
-            <a:pPr algn="l"/>
-            <a:r>
-              <a:rPr sz="1000" b="0">
-                <a:solidFill>
-                  <a:srgbClr val="A9B8D6"/>
-                </a:solidFill>
-                <a:latin typeface="Segoe UI"/>
-              </a:rPr>
               <a:t>E2EE WebRTC — Zero-Trust SFU (str0m + PERC)</a:t>
             </a:r>
           </a:p>
@@ -5542,7 +5776,7 @@
       </p:sp>
       <p:sp>
         <p:nvSpPr>
-          <p:cNvPr id="10" name="TextBox 9"/>
+          <p:cNvPr id="15" name="TextBox 14"/>
           <p:cNvSpPr txBox="1"/>
           <p:nvPr/>
         </p:nvSpPr>
@@ -5711,7 +5945,7 @@
                 </a:solidFill>
                 <a:latin typeface="Segoe UI"/>
               </a:rPr>
-              <a:t>OPERATIONS</a:t>
+              <a:t>SECURITY</a:t>
             </a:r>
           </a:p>
         </p:txBody>
@@ -5746,7 +5980,7 @@
                 </a:solidFill>
                 <a:latin typeface="Segoe UI"/>
               </a:rPr>
-              <a:t>Unified configuration system</a:t>
+              <a:t>What the SFU can — and cannot — see</a:t>
             </a:r>
           </a:p>
         </p:txBody>
@@ -5759,8 +5993,8 @@
         </p:nvSpPr>
         <p:spPr>
           <a:xfrm>
-            <a:off x="640080" y="1645920"/>
-            <a:ext cx="3291840" cy="1005840"/>
+            <a:off x="640080" y="1737360"/>
+            <a:ext cx="5303520" cy="3291840"/>
           </a:xfrm>
           <a:prstGeom prst="roundRect">
             <a:avLst/>
@@ -5770,7 +6004,7 @@
           </a:solidFill>
           <a:ln w="15875">
             <a:solidFill>
-              <a:srgbClr val="4C9AFF"/>
+              <a:srgbClr val="F2B14C"/>
             </a:solidFill>
           </a:ln>
           <a:effectLst/>
@@ -5793,27 +6027,75 @@
           <a:bodyPr rtlCol="0" anchor="ctr" wrap="square" lIns="73152" rIns="73152" tIns="36576" bIns="36576"/>
           <a:lstStyle/>
           <a:p>
-            <a:pPr algn="ctr"/>
-            <a:r>
-              <a:rPr sz="1400" b="1">
-                <a:solidFill>
-                  <a:srgbClr val="F5F8FF"/>
-                </a:solidFill>
-                <a:latin typeface="Segoe UI"/>
-              </a:rPr>
-              <a:t>config.json (JSONC)</a:t>
-            </a:r>
-          </a:p>
-          <a:p>
-            <a:pPr algn="ctr"/>
-            <a:r>
-              <a:rPr sz="1400" b="1">
-                <a:solidFill>
-                  <a:srgbClr val="F5F8FF"/>
-                </a:solidFill>
-                <a:latin typeface="Segoe UI"/>
-              </a:rPr>
-              <a:t>sectioned OR flat</a:t>
+            <a:pPr algn="l"/>
+            <a:r>
+              <a:rPr sz="1600" b="0">
+                <a:solidFill>
+                  <a:srgbClr val="F5F8FF"/>
+                </a:solidFill>
+                <a:latin typeface="Segoe UI"/>
+              </a:rPr>
+              <a:t>VISIBLE</a:t>
+            </a:r>
+          </a:p>
+          <a:p>
+            <a:pPr algn="l"/>
+            <a:r>
+              <a:rPr sz="1600" b="0">
+                <a:solidFill>
+                  <a:srgbClr val="F5F8FF"/>
+                </a:solidFill>
+                <a:latin typeface="Segoe UI"/>
+              </a:rPr>
+              <a:t/>
+            </a:r>
+          </a:p>
+          <a:p>
+            <a:pPr algn="l"/>
+            <a:r>
+              <a:rPr sz="1600" b="0">
+                <a:solidFill>
+                  <a:srgbClr val="F5F8FF"/>
+                </a:solidFill>
+                <a:latin typeface="Segoe UI"/>
+              </a:rPr>
+              <a:t>RTP headers (SSRC/PT/seq/ts)</a:t>
+            </a:r>
+          </a:p>
+          <a:p>
+            <a:pPr algn="l"/>
+            <a:r>
+              <a:rPr sz="1600" b="0">
+                <a:solidFill>
+                  <a:srgbClr val="F5F8FF"/>
+                </a:solidFill>
+                <a:latin typeface="Segoe UI"/>
+              </a:rPr>
+              <a:t>HBH SRTP for its own legs</a:t>
+            </a:r>
+          </a:p>
+          <a:p>
+            <a:pPr algn="l"/>
+            <a:r>
+              <a:rPr sz="1600" b="0">
+                <a:solidFill>
+                  <a:srgbClr val="F5F8FF"/>
+                </a:solidFill>
+                <a:latin typeface="Segoe UI"/>
+              </a:rPr>
+              <a:t>1-byte VP8 key/delta marker</a:t>
+            </a:r>
+          </a:p>
+          <a:p>
+            <a:pPr algn="l"/>
+            <a:r>
+              <a:rPr sz="1600" b="0">
+                <a:solidFill>
+                  <a:srgbClr val="F5F8FF"/>
+                </a:solidFill>
+                <a:latin typeface="Segoe UI"/>
+              </a:rPr>
+              <a:t>Packet sizes &amp; timing</a:t>
             </a:r>
           </a:p>
         </p:txBody>
@@ -5826,113 +6108,8 @@
         </p:nvSpPr>
         <p:spPr>
           <a:xfrm>
-            <a:off x="4206240" y="1645920"/>
-            <a:ext cx="2286000" cy="1005840"/>
-          </a:xfrm>
-          <a:prstGeom prst="roundRect">
-            <a:avLst/>
-          </a:prstGeom>
-          <a:solidFill>
-            <a:srgbClr val="1B2A4A"/>
-          </a:solidFill>
-          <a:ln w="15875">
-            <a:solidFill>
-              <a:srgbClr val="4C9AFF"/>
-            </a:solidFill>
-          </a:ln>
-          <a:effectLst/>
-        </p:spPr>
-        <p:style>
-          <a:lnRef idx="1">
-            <a:schemeClr val="accent1"/>
-          </a:lnRef>
-          <a:fillRef idx="3">
-            <a:schemeClr val="accent1"/>
-          </a:fillRef>
-          <a:effectRef idx="2">
-            <a:schemeClr val="accent1"/>
-          </a:effectRef>
-          <a:fontRef idx="minor">
-            <a:schemeClr val="lt1"/>
-          </a:fontRef>
-        </p:style>
-        <p:txBody>
-          <a:bodyPr rtlCol="0" anchor="ctr" wrap="square" lIns="73152" rIns="73152" tIns="36576" bIns="36576"/>
-          <a:lstStyle/>
-          <a:p>
-            <a:pPr algn="ctr"/>
-            <a:r>
-              <a:rPr sz="1300" b="0">
-                <a:solidFill>
-                  <a:srgbClr val="F5F8FF"/>
-                </a:solidFill>
-                <a:latin typeface="Segoe UI"/>
-              </a:rPr>
-              <a:t>sfu</a:t>
-            </a:r>
-          </a:p>
-          <a:p>
-            <a:pPr algn="ctr"/>
-            <a:r>
-              <a:rPr sz="1300" b="0">
-                <a:solidFill>
-                  <a:srgbClr val="F5F8FF"/>
-                </a:solidFill>
-                <a:latin typeface="Segoe UI"/>
-              </a:rPr>
-              <a:t>+ shared
-logging/stats/diag</a:t>
-            </a:r>
-          </a:p>
-        </p:txBody>
-      </p:sp>
-      <p:cxnSp>
-        <p:nvCxnSpPr>
-          <p:cNvPr id="8" name="Connector 7"/>
-          <p:cNvCxnSpPr/>
-          <p:nvPr/>
-        </p:nvCxnSpPr>
-        <p:spPr>
-          <a:xfrm>
-            <a:off x="3931920" y="2148840"/>
-            <a:ext cx="274320" cy="0"/>
-          </a:xfrm>
-          <a:prstGeom prst="line">
-            <a:avLst/>
-          </a:prstGeom>
-          <a:ln w="19050">
-            <a:solidFill>
-              <a:srgbClr val="A9B8D6"/>
-            </a:solidFill>
-            <a:tailEnd type="triangle" w="med" len="med"/>
-          </a:ln>
-          <a:effectLst/>
-        </p:spPr>
-        <p:style>
-          <a:lnRef idx="2">
-            <a:schemeClr val="accent1"/>
-          </a:lnRef>
-          <a:fillRef idx="0">
-            <a:schemeClr val="accent1"/>
-          </a:fillRef>
-          <a:effectRef idx="1">
-            <a:schemeClr val="accent1"/>
-          </a:effectRef>
-          <a:fontRef idx="minor">
-            <a:schemeClr val="tx1"/>
-          </a:fontRef>
-        </p:style>
-      </p:cxnSp>
-      <p:sp>
-        <p:nvSpPr>
-          <p:cNvPr id="9" name="Rounded Rectangle 8"/>
-          <p:cNvSpPr/>
-          <p:nvPr/>
-        </p:nvSpPr>
-        <p:spPr>
-          <a:xfrm>
-            <a:off x="6675120" y="1645920"/>
-            <a:ext cx="2286000" cy="1005840"/>
+            <a:off x="6217920" y="1737360"/>
+            <a:ext cx="5303520" cy="3291840"/>
           </a:xfrm>
           <a:prstGeom prst="roundRect">
             <a:avLst/>
@@ -5965,303 +6142,89 @@
           <a:bodyPr rtlCol="0" anchor="ctr" wrap="square" lIns="73152" rIns="73152" tIns="36576" bIns="36576"/>
           <a:lstStyle/>
           <a:p>
-            <a:pPr algn="ctr"/>
-            <a:r>
-              <a:rPr sz="1300" b="0">
-                <a:solidFill>
-                  <a:srgbClr val="F5F8FF"/>
-                </a:solidFill>
-                <a:latin typeface="Segoe UI"/>
-              </a:rPr>
-              <a:t>keyDistributor</a:t>
-            </a:r>
-          </a:p>
-          <a:p>
-            <a:pPr algn="ctr"/>
-            <a:r>
-              <a:rPr sz="1300" b="0">
-                <a:solidFill>
-                  <a:srgbClr val="F5F8FF"/>
-                </a:solidFill>
-                <a:latin typeface="Segoe UI"/>
-              </a:rPr>
-              <a:t>+ shared
-logging/stats/diag</a:t>
-            </a:r>
-          </a:p>
-        </p:txBody>
-      </p:sp>
-      <p:cxnSp>
-        <p:nvCxnSpPr>
-          <p:cNvPr id="10" name="Connector 9"/>
-          <p:cNvCxnSpPr/>
-          <p:nvPr/>
-        </p:nvCxnSpPr>
-        <p:spPr>
-          <a:xfrm>
-            <a:off x="3931920" y="2148840"/>
-            <a:ext cx="2743200" cy="0"/>
-          </a:xfrm>
-          <a:prstGeom prst="line">
-            <a:avLst/>
-          </a:prstGeom>
-          <a:ln w="19050">
-            <a:solidFill>
-              <a:srgbClr val="A9B8D6"/>
-            </a:solidFill>
-            <a:tailEnd type="triangle" w="med" len="med"/>
-          </a:ln>
-          <a:effectLst/>
-        </p:spPr>
-        <p:style>
-          <a:lnRef idx="2">
-            <a:schemeClr val="accent1"/>
-          </a:lnRef>
-          <a:fillRef idx="0">
-            <a:schemeClr val="accent1"/>
-          </a:fillRef>
-          <a:effectRef idx="1">
-            <a:schemeClr val="accent1"/>
-          </a:effectRef>
-          <a:fontRef idx="minor">
-            <a:schemeClr val="tx1"/>
-          </a:fontRef>
-        </p:style>
-      </p:cxnSp>
-      <p:sp>
-        <p:nvSpPr>
-          <p:cNvPr id="11" name="Rounded Rectangle 10"/>
-          <p:cNvSpPr/>
-          <p:nvPr/>
-        </p:nvSpPr>
-        <p:spPr>
-          <a:xfrm>
-            <a:off x="9144000" y="1645920"/>
-            <a:ext cx="2286000" cy="1005840"/>
-          </a:xfrm>
-          <a:prstGeom prst="roundRect">
-            <a:avLst/>
-          </a:prstGeom>
-          <a:solidFill>
-            <a:srgbClr val="1B2A4A"/>
-          </a:solidFill>
-          <a:ln w="15875">
-            <a:solidFill>
-              <a:srgbClr val="2E5C9E"/>
-            </a:solidFill>
-          </a:ln>
-          <a:effectLst/>
-        </p:spPr>
-        <p:style>
-          <a:lnRef idx="1">
-            <a:schemeClr val="accent1"/>
-          </a:lnRef>
-          <a:fillRef idx="3">
-            <a:schemeClr val="accent1"/>
-          </a:fillRef>
-          <a:effectRef idx="2">
-            <a:schemeClr val="accent1"/>
-          </a:effectRef>
-          <a:fontRef idx="minor">
-            <a:schemeClr val="lt1"/>
-          </a:fontRef>
-        </p:style>
-        <p:txBody>
-          <a:bodyPr rtlCol="0" anchor="ctr" wrap="square" lIns="73152" rIns="73152" tIns="36576" bIns="36576"/>
-          <a:lstStyle/>
-          <a:p>
-            <a:pPr algn="ctr"/>
-            <a:r>
-              <a:rPr sz="1300" b="0">
-                <a:solidFill>
-                  <a:srgbClr val="F5F8FF"/>
-                </a:solidFill>
-                <a:latin typeface="Segoe UI"/>
-              </a:rPr>
-              <a:t>client</a:t>
-            </a:r>
-          </a:p>
-          <a:p>
-            <a:pPr algn="ctr"/>
-            <a:r>
-              <a:rPr sz="1300" b="0">
-                <a:solidFill>
-                  <a:srgbClr val="F5F8FF"/>
-                </a:solidFill>
-                <a:latin typeface="Segoe UI"/>
-              </a:rPr>
-              <a:t>+ shared
-logging/stats/diag</a:t>
-            </a:r>
-          </a:p>
-        </p:txBody>
-      </p:sp>
-      <p:cxnSp>
-        <p:nvCxnSpPr>
-          <p:cNvPr id="12" name="Connector 11"/>
-          <p:cNvCxnSpPr/>
-          <p:nvPr/>
-        </p:nvCxnSpPr>
-        <p:spPr>
-          <a:xfrm>
-            <a:off x="3931920" y="2148840"/>
-            <a:ext cx="5212080" cy="0"/>
-          </a:xfrm>
-          <a:prstGeom prst="line">
-            <a:avLst/>
-          </a:prstGeom>
-          <a:ln w="19050">
-            <a:solidFill>
-              <a:srgbClr val="A9B8D6"/>
-            </a:solidFill>
-            <a:tailEnd type="triangle" w="med" len="med"/>
-          </a:ln>
-          <a:effectLst/>
-        </p:spPr>
-        <p:style>
-          <a:lnRef idx="2">
-            <a:schemeClr val="accent1"/>
-          </a:lnRef>
-          <a:fillRef idx="0">
-            <a:schemeClr val="accent1"/>
-          </a:fillRef>
-          <a:effectRef idx="1">
-            <a:schemeClr val="accent1"/>
-          </a:effectRef>
-          <a:fontRef idx="minor">
-            <a:schemeClr val="tx1"/>
-          </a:fontRef>
-        </p:style>
-      </p:cxnSp>
-      <p:sp>
-        <p:nvSpPr>
-          <p:cNvPr id="13" name="TextBox 12"/>
+            <a:pPr algn="l"/>
+            <a:r>
+              <a:rPr sz="1600" b="0">
+                <a:solidFill>
+                  <a:srgbClr val="F5F8FF"/>
+                </a:solidFill>
+                <a:latin typeface="Segoe UI"/>
+              </a:rPr>
+              <a:t>HIDDEN</a:t>
+            </a:r>
+          </a:p>
+          <a:p>
+            <a:pPr algn="l"/>
+            <a:r>
+              <a:rPr sz="1600" b="0">
+                <a:solidFill>
+                  <a:srgbClr val="F5F8FF"/>
+                </a:solidFill>
+                <a:latin typeface="Segoe UI"/>
+              </a:rPr>
+              <a:t/>
+            </a:r>
+          </a:p>
+          <a:p>
+            <a:pPr algn="l"/>
+            <a:r>
+              <a:rPr sz="1600" b="0">
+                <a:solidFill>
+                  <a:srgbClr val="F5F8FF"/>
+                </a:solidFill>
+                <a:latin typeface="Segoe UI"/>
+              </a:rPr>
+              <a:t>E2E media payload (inner GCM)</a:t>
+            </a:r>
+          </a:p>
+          <a:p>
+            <a:pPr algn="l"/>
+            <a:r>
+              <a:rPr sz="1600" b="0">
+                <a:solidFill>
+                  <a:srgbClr val="F5F8FF"/>
+                </a:solidFill>
+                <a:latin typeface="Segoe UI"/>
+              </a:rPr>
+              <a:t>The E2E key (KD + clients only)</a:t>
+            </a:r>
+          </a:p>
+          <a:p>
+            <a:pPr algn="l"/>
+            <a:r>
+              <a:rPr sz="1600" b="0">
+                <a:solidFill>
+                  <a:srgbClr val="F5F8FF"/>
+                </a:solidFill>
+                <a:latin typeface="Segoe UI"/>
+              </a:rPr>
+              <a:t>Decoded media / codec bitstream</a:t>
+            </a:r>
+          </a:p>
+          <a:p>
+            <a:pPr algn="l"/>
+            <a:r>
+              <a:rPr sz="1600" b="0">
+                <a:solidFill>
+                  <a:srgbClr val="F5F8FF"/>
+                </a:solidFill>
+                <a:latin typeface="Segoe UI"/>
+              </a:rPr>
+              <a:t>Inner header extensions</a:t>
+            </a:r>
+          </a:p>
+        </p:txBody>
+      </p:sp>
+      <p:sp>
+        <p:nvSpPr>
+          <p:cNvPr id="8" name="TextBox 7"/>
           <p:cNvSpPr txBox="1"/>
           <p:nvPr/>
         </p:nvSpPr>
         <p:spPr>
           <a:xfrm>
-            <a:off x="640080" y="3017520"/>
-            <a:ext cx="10789920" cy="4572000"/>
-          </a:xfrm>
-          <a:prstGeom prst="rect">
-            <a:avLst/>
-          </a:prstGeom>
-          <a:noFill/>
-        </p:spPr>
-        <p:txBody>
-          <a:bodyPr wrap="square">
-            <a:spAutoFit/>
-          </a:bodyPr>
-          <a:lstStyle/>
-          <a:p>
-            <a:pPr>
-              <a:spcAft>
-                <a:spcPts val="1152"/>
-              </a:spcAft>
-            </a:pPr>
-            <a:r>
-              <a:rPr sz="1800">
-                <a:solidFill>
-                  <a:srgbClr val="F5F8FF"/>
-                </a:solidFill>
-                <a:latin typeface="Segoe UI"/>
-              </a:rPr>
-              <a:t>• Resolution: --config (repeatable, deep-merge) → E2EE_CONFIG env → ./config.json.</a:t>
-            </a:r>
-          </a:p>
-          <a:p>
-            <a:pPr>
-              <a:spcAft>
-                <a:spcPts val="1152"/>
-              </a:spcAft>
-            </a:pPr>
-            <a:r>
-              <a:rPr sz="1800">
-                <a:solidFill>
-                  <a:srgbClr val="F5F8FF"/>
-                </a:solidFill>
-                <a:latin typeface="Segoe UI"/>
-              </a:rPr>
-              <a:t>• Same loader handles one combined file or per-host flat files; JSONC + trailing commas.</a:t>
-            </a:r>
-          </a:p>
-          <a:p>
-            <a:pPr>
-              <a:spcAft>
-                <a:spcPts val="1152"/>
-              </a:spcAft>
-            </a:pPr>
-            <a:r>
-              <a:rPr sz="1800">
-                <a:solidFill>
-                  <a:srgbClr val="F5F8FF"/>
-                </a:solidFill>
-                <a:latin typeface="Segoe UI"/>
-              </a:rPr>
-              <a:t>• Node apps share config-loader.js; str0m uses a matching loader in examples/util.</a:t>
-            </a:r>
-          </a:p>
-          <a:p>
-            <a:pPr>
-              <a:spcAft>
-                <a:spcPts val="1152"/>
-              </a:spcAft>
-            </a:pPr>
-            <a:r>
-              <a:rPr sz="1800">
-                <a:solidFill>
-                  <a:srgbClr val="F5F8FF"/>
-                </a:solidFill>
-                <a:latin typeface="Segoe UI"/>
-              </a:rPr>
-              <a:t>• Client pushes media params to native via env vars (width/height/fps/bitrate/codec).</a:t>
-            </a:r>
-          </a:p>
-          <a:p>
-            <a:pPr>
-              <a:spcAft>
-                <a:spcPts val="1152"/>
-              </a:spcAft>
-            </a:pPr>
-            <a:r>
-              <a:rPr sz="1800">
-                <a:solidFill>
-                  <a:srgbClr val="F5F8FF"/>
-                </a:solidFill>
-                <a:latin typeface="Segoe UI"/>
-              </a:rPr>
-              <a:t>• Toggles: log-to-file, periodic stats, wire log, per-frame E2E diagnostics.</a:t>
-            </a:r>
-          </a:p>
-          <a:p>
-            <a:pPr>
-              <a:spcAft>
-                <a:spcPts val="1152"/>
-              </a:spcAft>
-            </a:pPr>
-            <a:r>
-              <a:rPr sz="1800">
-                <a:solidFill>
-                  <a:srgbClr val="F5F8FF"/>
-                </a:solidFill>
-                <a:latin typeface="Segoe UI"/>
-              </a:rPr>
-              <a:t>• run-all.ps1 launches SFU + KD + two clients against the shared config.</a:t>
-            </a:r>
-          </a:p>
-        </p:txBody>
-      </p:sp>
-      <p:sp>
-        <p:nvSpPr>
-          <p:cNvPr id="14" name="TextBox 13"/>
-          <p:cNvSpPr txBox="1"/>
-          <p:nvPr/>
-        </p:nvSpPr>
-        <p:spPr>
-          <a:xfrm>
-            <a:off x="548640" y="6446520"/>
-            <a:ext cx="7315200" cy="320040"/>
+            <a:off x="640080" y="5303520"/>
+            <a:ext cx="10881360" cy="640080"/>
           </a:xfrm>
           <a:prstGeom prst="rect">
             <a:avLst/>
@@ -6274,6 +6237,41 @@
           </a:bodyPr>
           <a:lstStyle/>
           <a:p>
+            <a:pPr algn="ctr"/>
+            <a:r>
+              <a:rPr sz="1500" b="0">
+                <a:solidFill>
+                  <a:srgbClr val="A9B8D6"/>
+                </a:solidFill>
+                <a:latin typeface="Segoe UI"/>
+              </a:rPr>
+              <a:t>Server compromise leaks routing metadata only — never the media content.</a:t>
+            </a:r>
+          </a:p>
+        </p:txBody>
+      </p:sp>
+      <p:sp>
+        <p:nvSpPr>
+          <p:cNvPr id="9" name="TextBox 8"/>
+          <p:cNvSpPr txBox="1"/>
+          <p:nvPr/>
+        </p:nvSpPr>
+        <p:spPr>
+          <a:xfrm>
+            <a:off x="548640" y="6446520"/>
+            <a:ext cx="7315200" cy="320040"/>
+          </a:xfrm>
+          <a:prstGeom prst="rect">
+            <a:avLst/>
+          </a:prstGeom>
+          <a:noFill/>
+        </p:spPr>
+        <p:txBody>
+          <a:bodyPr wrap="square" anchor="t">
+            <a:spAutoFit/>
+          </a:bodyPr>
+          <a:lstStyle/>
+          <a:p>
             <a:pPr algn="l"/>
             <a:r>
               <a:rPr sz="1000" b="0">
@@ -6289,7 +6287,7 @@
       </p:sp>
       <p:sp>
         <p:nvSpPr>
-          <p:cNvPr id="15" name="TextBox 14"/>
+          <p:cNvPr id="10" name="TextBox 9"/>
           <p:cNvSpPr txBox="1"/>
           <p:nvPr/>
         </p:nvSpPr>
@@ -6458,7 +6456,7 @@
                 </a:solidFill>
                 <a:latin typeface="Segoe UI"/>
               </a:rPr>
-              <a:t>ROADMAP</a:t>
+              <a:t>OPERATIONS</a:t>
             </a:r>
           </a:p>
         </p:txBody>
@@ -6493,7 +6491,7 @@
                 </a:solidFill>
                 <a:latin typeface="Segoe UI"/>
               </a:rPr>
-              <a:t>Done &amp; what's next</a:t>
+              <a:t>Unified configuration system</a:t>
             </a:r>
           </a:p>
         </p:txBody>
@@ -6506,8 +6504,180 @@
         </p:nvSpPr>
         <p:spPr>
           <a:xfrm>
-            <a:off x="640080" y="1737360"/>
-            <a:ext cx="5303520" cy="3108960"/>
+            <a:off x="640080" y="1645920"/>
+            <a:ext cx="3291840" cy="1005840"/>
+          </a:xfrm>
+          <a:prstGeom prst="roundRect">
+            <a:avLst/>
+          </a:prstGeom>
+          <a:solidFill>
+            <a:srgbClr val="1B2A4A"/>
+          </a:solidFill>
+          <a:ln w="15875">
+            <a:solidFill>
+              <a:srgbClr val="4C9AFF"/>
+            </a:solidFill>
+          </a:ln>
+          <a:effectLst/>
+        </p:spPr>
+        <p:style>
+          <a:lnRef idx="1">
+            <a:schemeClr val="accent1"/>
+          </a:lnRef>
+          <a:fillRef idx="3">
+            <a:schemeClr val="accent1"/>
+          </a:fillRef>
+          <a:effectRef idx="2">
+            <a:schemeClr val="accent1"/>
+          </a:effectRef>
+          <a:fontRef idx="minor">
+            <a:schemeClr val="lt1"/>
+          </a:fontRef>
+        </p:style>
+        <p:txBody>
+          <a:bodyPr rtlCol="0" anchor="ctr" wrap="square" lIns="73152" rIns="73152" tIns="36576" bIns="36576"/>
+          <a:lstStyle/>
+          <a:p>
+            <a:pPr algn="ctr"/>
+            <a:r>
+              <a:rPr sz="1400" b="1">
+                <a:solidFill>
+                  <a:srgbClr val="F5F8FF"/>
+                </a:solidFill>
+                <a:latin typeface="Segoe UI"/>
+              </a:rPr>
+              <a:t>config.json (JSONC)</a:t>
+            </a:r>
+          </a:p>
+          <a:p>
+            <a:pPr algn="ctr"/>
+            <a:r>
+              <a:rPr sz="1400" b="1">
+                <a:solidFill>
+                  <a:srgbClr val="F5F8FF"/>
+                </a:solidFill>
+                <a:latin typeface="Segoe UI"/>
+              </a:rPr>
+              <a:t>sectioned OR flat</a:t>
+            </a:r>
+          </a:p>
+        </p:txBody>
+      </p:sp>
+      <p:sp>
+        <p:nvSpPr>
+          <p:cNvPr id="7" name="Rounded Rectangle 6"/>
+          <p:cNvSpPr/>
+          <p:nvPr/>
+        </p:nvSpPr>
+        <p:spPr>
+          <a:xfrm>
+            <a:off x="4206240" y="1645920"/>
+            <a:ext cx="2286000" cy="1005840"/>
+          </a:xfrm>
+          <a:prstGeom prst="roundRect">
+            <a:avLst/>
+          </a:prstGeom>
+          <a:solidFill>
+            <a:srgbClr val="1B2A4A"/>
+          </a:solidFill>
+          <a:ln w="15875">
+            <a:solidFill>
+              <a:srgbClr val="4C9AFF"/>
+            </a:solidFill>
+          </a:ln>
+          <a:effectLst/>
+        </p:spPr>
+        <p:style>
+          <a:lnRef idx="1">
+            <a:schemeClr val="accent1"/>
+          </a:lnRef>
+          <a:fillRef idx="3">
+            <a:schemeClr val="accent1"/>
+          </a:fillRef>
+          <a:effectRef idx="2">
+            <a:schemeClr val="accent1"/>
+          </a:effectRef>
+          <a:fontRef idx="minor">
+            <a:schemeClr val="lt1"/>
+          </a:fontRef>
+        </p:style>
+        <p:txBody>
+          <a:bodyPr rtlCol="0" anchor="ctr" wrap="square" lIns="73152" rIns="73152" tIns="36576" bIns="36576"/>
+          <a:lstStyle/>
+          <a:p>
+            <a:pPr algn="ctr"/>
+            <a:r>
+              <a:rPr sz="1300" b="0">
+                <a:solidFill>
+                  <a:srgbClr val="F5F8FF"/>
+                </a:solidFill>
+                <a:latin typeface="Segoe UI"/>
+              </a:rPr>
+              <a:t>sfu</a:t>
+            </a:r>
+          </a:p>
+          <a:p>
+            <a:pPr algn="ctr"/>
+            <a:r>
+              <a:rPr sz="1300" b="0">
+                <a:solidFill>
+                  <a:srgbClr val="F5F8FF"/>
+                </a:solidFill>
+                <a:latin typeface="Segoe UI"/>
+              </a:rPr>
+              <a:t>+ shared
+logging/stats/diag</a:t>
+            </a:r>
+          </a:p>
+        </p:txBody>
+      </p:sp>
+      <p:cxnSp>
+        <p:nvCxnSpPr>
+          <p:cNvPr id="8" name="Connector 7"/>
+          <p:cNvCxnSpPr/>
+          <p:nvPr/>
+        </p:nvCxnSpPr>
+        <p:spPr>
+          <a:xfrm>
+            <a:off x="3931920" y="2148840"/>
+            <a:ext cx="274320" cy="0"/>
+          </a:xfrm>
+          <a:prstGeom prst="line">
+            <a:avLst/>
+          </a:prstGeom>
+          <a:ln w="19050">
+            <a:solidFill>
+              <a:srgbClr val="A9B8D6"/>
+            </a:solidFill>
+            <a:tailEnd type="triangle" w="med" len="med"/>
+          </a:ln>
+          <a:effectLst/>
+        </p:spPr>
+        <p:style>
+          <a:lnRef idx="2">
+            <a:schemeClr val="accent1"/>
+          </a:lnRef>
+          <a:fillRef idx="0">
+            <a:schemeClr val="accent1"/>
+          </a:fillRef>
+          <a:effectRef idx="1">
+            <a:schemeClr val="accent1"/>
+          </a:effectRef>
+          <a:fontRef idx="minor">
+            <a:schemeClr val="tx1"/>
+          </a:fontRef>
+        </p:style>
+      </p:cxnSp>
+      <p:sp>
+        <p:nvSpPr>
+          <p:cNvPr id="9" name="Rounded Rectangle 8"/>
+          <p:cNvSpPr/>
+          <p:nvPr/>
+        </p:nvSpPr>
+        <p:spPr>
+          <a:xfrm>
+            <a:off x="6675120" y="1645920"/>
+            <a:ext cx="2286000" cy="1005840"/>
           </a:xfrm>
           <a:prstGeom prst="roundRect">
             <a:avLst/>
@@ -6540,8 +6710,583 @@
           <a:bodyPr rtlCol="0" anchor="ctr" wrap="square" lIns="73152" rIns="73152" tIns="36576" bIns="36576"/>
           <a:lstStyle/>
           <a:p>
+            <a:pPr algn="ctr"/>
+            <a:r>
+              <a:rPr sz="1300" b="0">
+                <a:solidFill>
+                  <a:srgbClr val="F5F8FF"/>
+                </a:solidFill>
+                <a:latin typeface="Segoe UI"/>
+              </a:rPr>
+              <a:t>keyDistributor</a:t>
+            </a:r>
+          </a:p>
+          <a:p>
+            <a:pPr algn="ctr"/>
+            <a:r>
+              <a:rPr sz="1300" b="0">
+                <a:solidFill>
+                  <a:srgbClr val="F5F8FF"/>
+                </a:solidFill>
+                <a:latin typeface="Segoe UI"/>
+              </a:rPr>
+              <a:t>+ shared
+logging/stats/diag</a:t>
+            </a:r>
+          </a:p>
+        </p:txBody>
+      </p:sp>
+      <p:cxnSp>
+        <p:nvCxnSpPr>
+          <p:cNvPr id="10" name="Connector 9"/>
+          <p:cNvCxnSpPr/>
+          <p:nvPr/>
+        </p:nvCxnSpPr>
+        <p:spPr>
+          <a:xfrm>
+            <a:off x="3931920" y="2148840"/>
+            <a:ext cx="2743200" cy="0"/>
+          </a:xfrm>
+          <a:prstGeom prst="line">
+            <a:avLst/>
+          </a:prstGeom>
+          <a:ln w="19050">
+            <a:solidFill>
+              <a:srgbClr val="A9B8D6"/>
+            </a:solidFill>
+            <a:tailEnd type="triangle" w="med" len="med"/>
+          </a:ln>
+          <a:effectLst/>
+        </p:spPr>
+        <p:style>
+          <a:lnRef idx="2">
+            <a:schemeClr val="accent1"/>
+          </a:lnRef>
+          <a:fillRef idx="0">
+            <a:schemeClr val="accent1"/>
+          </a:fillRef>
+          <a:effectRef idx="1">
+            <a:schemeClr val="accent1"/>
+          </a:effectRef>
+          <a:fontRef idx="minor">
+            <a:schemeClr val="tx1"/>
+          </a:fontRef>
+        </p:style>
+      </p:cxnSp>
+      <p:sp>
+        <p:nvSpPr>
+          <p:cNvPr id="11" name="Rounded Rectangle 10"/>
+          <p:cNvSpPr/>
+          <p:nvPr/>
+        </p:nvSpPr>
+        <p:spPr>
+          <a:xfrm>
+            <a:off x="9144000" y="1645920"/>
+            <a:ext cx="2286000" cy="1005840"/>
+          </a:xfrm>
+          <a:prstGeom prst="roundRect">
+            <a:avLst/>
+          </a:prstGeom>
+          <a:solidFill>
+            <a:srgbClr val="1B2A4A"/>
+          </a:solidFill>
+          <a:ln w="15875">
+            <a:solidFill>
+              <a:srgbClr val="2E5C9E"/>
+            </a:solidFill>
+          </a:ln>
+          <a:effectLst/>
+        </p:spPr>
+        <p:style>
+          <a:lnRef idx="1">
+            <a:schemeClr val="accent1"/>
+          </a:lnRef>
+          <a:fillRef idx="3">
+            <a:schemeClr val="accent1"/>
+          </a:fillRef>
+          <a:effectRef idx="2">
+            <a:schemeClr val="accent1"/>
+          </a:effectRef>
+          <a:fontRef idx="minor">
+            <a:schemeClr val="lt1"/>
+          </a:fontRef>
+        </p:style>
+        <p:txBody>
+          <a:bodyPr rtlCol="0" anchor="ctr" wrap="square" lIns="73152" rIns="73152" tIns="36576" bIns="36576"/>
+          <a:lstStyle/>
+          <a:p>
+            <a:pPr algn="ctr"/>
+            <a:r>
+              <a:rPr sz="1300" b="0">
+                <a:solidFill>
+                  <a:srgbClr val="F5F8FF"/>
+                </a:solidFill>
+                <a:latin typeface="Segoe UI"/>
+              </a:rPr>
+              <a:t>client</a:t>
+            </a:r>
+          </a:p>
+          <a:p>
+            <a:pPr algn="ctr"/>
+            <a:r>
+              <a:rPr sz="1300" b="0">
+                <a:solidFill>
+                  <a:srgbClr val="F5F8FF"/>
+                </a:solidFill>
+                <a:latin typeface="Segoe UI"/>
+              </a:rPr>
+              <a:t>+ shared
+logging/stats/diag</a:t>
+            </a:r>
+          </a:p>
+        </p:txBody>
+      </p:sp>
+      <p:cxnSp>
+        <p:nvCxnSpPr>
+          <p:cNvPr id="12" name="Connector 11"/>
+          <p:cNvCxnSpPr/>
+          <p:nvPr/>
+        </p:nvCxnSpPr>
+        <p:spPr>
+          <a:xfrm>
+            <a:off x="3931920" y="2148840"/>
+            <a:ext cx="5212080" cy="0"/>
+          </a:xfrm>
+          <a:prstGeom prst="line">
+            <a:avLst/>
+          </a:prstGeom>
+          <a:ln w="19050">
+            <a:solidFill>
+              <a:srgbClr val="A9B8D6"/>
+            </a:solidFill>
+            <a:tailEnd type="triangle" w="med" len="med"/>
+          </a:ln>
+          <a:effectLst/>
+        </p:spPr>
+        <p:style>
+          <a:lnRef idx="2">
+            <a:schemeClr val="accent1"/>
+          </a:lnRef>
+          <a:fillRef idx="0">
+            <a:schemeClr val="accent1"/>
+          </a:fillRef>
+          <a:effectRef idx="1">
+            <a:schemeClr val="accent1"/>
+          </a:effectRef>
+          <a:fontRef idx="minor">
+            <a:schemeClr val="tx1"/>
+          </a:fontRef>
+        </p:style>
+      </p:cxnSp>
+      <p:sp>
+        <p:nvSpPr>
+          <p:cNvPr id="13" name="TextBox 12"/>
+          <p:cNvSpPr txBox="1"/>
+          <p:nvPr/>
+        </p:nvSpPr>
+        <p:spPr>
+          <a:xfrm>
+            <a:off x="640080" y="3017520"/>
+            <a:ext cx="10789920" cy="4572000"/>
+          </a:xfrm>
+          <a:prstGeom prst="rect">
+            <a:avLst/>
+          </a:prstGeom>
+          <a:noFill/>
+        </p:spPr>
+        <p:txBody>
+          <a:bodyPr wrap="square">
+            <a:spAutoFit/>
+          </a:bodyPr>
+          <a:lstStyle/>
+          <a:p>
+            <a:pPr>
+              <a:spcAft>
+                <a:spcPts val="1152"/>
+              </a:spcAft>
+            </a:pPr>
+            <a:r>
+              <a:rPr sz="1800">
+                <a:solidFill>
+                  <a:srgbClr val="F5F8FF"/>
+                </a:solidFill>
+                <a:latin typeface="Segoe UI"/>
+              </a:rPr>
+              <a:t>• Resolution: --config (repeatable, deep-merge) → E2EE_CONFIG env → ./config.json.</a:t>
+            </a:r>
+          </a:p>
+          <a:p>
+            <a:pPr>
+              <a:spcAft>
+                <a:spcPts val="1152"/>
+              </a:spcAft>
+            </a:pPr>
+            <a:r>
+              <a:rPr sz="1800">
+                <a:solidFill>
+                  <a:srgbClr val="F5F8FF"/>
+                </a:solidFill>
+                <a:latin typeface="Segoe UI"/>
+              </a:rPr>
+              <a:t>• Same loader handles one combined file or per-host flat files; JSONC + trailing commas.</a:t>
+            </a:r>
+          </a:p>
+          <a:p>
+            <a:pPr>
+              <a:spcAft>
+                <a:spcPts val="1152"/>
+              </a:spcAft>
+            </a:pPr>
+            <a:r>
+              <a:rPr sz="1800">
+                <a:solidFill>
+                  <a:srgbClr val="F5F8FF"/>
+                </a:solidFill>
+                <a:latin typeface="Segoe UI"/>
+              </a:rPr>
+              <a:t>• Node apps share config-loader.js; str0m uses a matching loader in examples/util.</a:t>
+            </a:r>
+          </a:p>
+          <a:p>
+            <a:pPr>
+              <a:spcAft>
+                <a:spcPts val="1152"/>
+              </a:spcAft>
+            </a:pPr>
+            <a:r>
+              <a:rPr sz="1800">
+                <a:solidFill>
+                  <a:srgbClr val="F5F8FF"/>
+                </a:solidFill>
+                <a:latin typeface="Segoe UI"/>
+              </a:rPr>
+              <a:t>• Client pushes media params to native via env vars (width/height/fps/bitrate/codec).</a:t>
+            </a:r>
+          </a:p>
+          <a:p>
+            <a:pPr>
+              <a:spcAft>
+                <a:spcPts val="1152"/>
+              </a:spcAft>
+            </a:pPr>
+            <a:r>
+              <a:rPr sz="1800">
+                <a:solidFill>
+                  <a:srgbClr val="F5F8FF"/>
+                </a:solidFill>
+                <a:latin typeface="Segoe UI"/>
+              </a:rPr>
+              <a:t>• Toggles: log-to-file, periodic stats, wire log, per-frame E2E diagnostics.</a:t>
+            </a:r>
+          </a:p>
+          <a:p>
+            <a:pPr>
+              <a:spcAft>
+                <a:spcPts val="1152"/>
+              </a:spcAft>
+            </a:pPr>
+            <a:r>
+              <a:rPr sz="1800">
+                <a:solidFill>
+                  <a:srgbClr val="F5F8FF"/>
+                </a:solidFill>
+                <a:latin typeface="Segoe UI"/>
+              </a:rPr>
+              <a:t>• run-all.ps1 launches SFU + KD + N clients (default alice/bob/carol) against the shared config.</a:t>
+            </a:r>
+          </a:p>
+        </p:txBody>
+      </p:sp>
+      <p:sp>
+        <p:nvSpPr>
+          <p:cNvPr id="14" name="TextBox 13"/>
+          <p:cNvSpPr txBox="1"/>
+          <p:nvPr/>
+        </p:nvSpPr>
+        <p:spPr>
+          <a:xfrm>
+            <a:off x="548640" y="6446520"/>
+            <a:ext cx="7315200" cy="320040"/>
+          </a:xfrm>
+          <a:prstGeom prst="rect">
+            <a:avLst/>
+          </a:prstGeom>
+          <a:noFill/>
+        </p:spPr>
+        <p:txBody>
+          <a:bodyPr wrap="square" anchor="t">
+            <a:spAutoFit/>
+          </a:bodyPr>
+          <a:lstStyle/>
+          <a:p>
             <a:pPr algn="l"/>
             <a:r>
+              <a:rPr sz="1000" b="0">
+                <a:solidFill>
+                  <a:srgbClr val="A9B8D6"/>
+                </a:solidFill>
+                <a:latin typeface="Segoe UI"/>
+              </a:rPr>
+              <a:t>E2EE WebRTC — Zero-Trust SFU (str0m + PERC)</a:t>
+            </a:r>
+          </a:p>
+        </p:txBody>
+      </p:sp>
+      <p:sp>
+        <p:nvSpPr>
+          <p:cNvPr id="15" name="TextBox 14"/>
+          <p:cNvSpPr txBox="1"/>
+          <p:nvPr/>
+        </p:nvSpPr>
+        <p:spPr>
+          <a:xfrm>
+            <a:off x="11155680" y="6446520"/>
+            <a:ext cx="822960" cy="320040"/>
+          </a:xfrm>
+          <a:prstGeom prst="rect">
+            <a:avLst/>
+          </a:prstGeom>
+          <a:noFill/>
+        </p:spPr>
+        <p:txBody>
+          <a:bodyPr wrap="square" anchor="t">
+            <a:spAutoFit/>
+          </a:bodyPr>
+          <a:lstStyle/>
+          <a:p>
+            <a:pPr algn="r"/>
+            <a:r>
+              <a:rPr sz="1000" b="0">
+                <a:solidFill>
+                  <a:srgbClr val="A9B8D6"/>
+                </a:solidFill>
+                <a:latin typeface="Segoe UI"/>
+              </a:rPr>
+              <a:t>14</a:t>
+            </a:r>
+          </a:p>
+        </p:txBody>
+      </p:sp>
+    </p:spTree>
+  </p:cSld>
+  <p:clrMapOvr>
+    <a:masterClrMapping/>
+  </p:clrMapOvr>
+</p:sld>
+</file>
+
+<file path=ppt/slides/slide16.xml><?xml version="1.0" encoding="utf-8"?>
+<p:sld xmlns:a="http://schemas.openxmlformats.org/drawingml/2006/main" xmlns:p="http://schemas.openxmlformats.org/presentationml/2006/main" xmlns:r="http://schemas.openxmlformats.org/officeDocument/2006/relationships">
+  <p:cSld>
+    <p:spTree>
+      <p:nvGrpSpPr>
+        <p:cNvPr id="1" name=""/>
+        <p:cNvGrpSpPr/>
+        <p:nvPr/>
+      </p:nvGrpSpPr>
+      <p:grpSpPr/>
+      <p:sp>
+        <p:nvSpPr>
+          <p:cNvPr id="2" name="Rectangle 1"/>
+          <p:cNvSpPr/>
+          <p:nvPr/>
+        </p:nvSpPr>
+        <p:spPr>
+          <a:xfrm>
+            <a:off x="0" y="0"/>
+            <a:ext cx="12191695" cy="6858000"/>
+          </a:xfrm>
+          <a:prstGeom prst="rect">
+            <a:avLst/>
+          </a:prstGeom>
+          <a:solidFill>
+            <a:srgbClr val="0F172A"/>
+          </a:solidFill>
+          <a:ln>
+            <a:noFill/>
+          </a:ln>
+          <a:effectLst/>
+        </p:spPr>
+        <p:style>
+          <a:lnRef idx="1">
+            <a:schemeClr val="accent1"/>
+          </a:lnRef>
+          <a:fillRef idx="3">
+            <a:schemeClr val="accent1"/>
+          </a:fillRef>
+          <a:effectRef idx="2">
+            <a:schemeClr val="accent1"/>
+          </a:effectRef>
+          <a:fontRef idx="minor">
+            <a:schemeClr val="lt1"/>
+          </a:fontRef>
+        </p:style>
+        <p:txBody>
+          <a:bodyPr rtlCol="0" anchor="ctr"/>
+          <a:lstStyle/>
+          <a:p>
+            <a:pPr algn="ctr"/>
+          </a:p>
+        </p:txBody>
+      </p:sp>
+      <p:sp>
+        <p:nvSpPr>
+          <p:cNvPr id="3" name="Rectangle 2"/>
+          <p:cNvSpPr/>
+          <p:nvPr/>
+        </p:nvSpPr>
+        <p:spPr>
+          <a:xfrm>
+            <a:off x="0" y="0"/>
+            <a:ext cx="12191695" cy="146304"/>
+          </a:xfrm>
+          <a:prstGeom prst="rect">
+            <a:avLst/>
+          </a:prstGeom>
+          <a:solidFill>
+            <a:srgbClr val="4C9AFF"/>
+          </a:solidFill>
+          <a:ln>
+            <a:noFill/>
+          </a:ln>
+          <a:effectLst/>
+        </p:spPr>
+        <p:style>
+          <a:lnRef idx="1">
+            <a:schemeClr val="accent1"/>
+          </a:lnRef>
+          <a:fillRef idx="3">
+            <a:schemeClr val="accent1"/>
+          </a:fillRef>
+          <a:effectRef idx="2">
+            <a:schemeClr val="accent1"/>
+          </a:effectRef>
+          <a:fontRef idx="minor">
+            <a:schemeClr val="lt1"/>
+          </a:fontRef>
+        </p:style>
+        <p:txBody>
+          <a:bodyPr rtlCol="0" anchor="ctr"/>
+          <a:lstStyle/>
+          <a:p>
+            <a:pPr algn="ctr"/>
+          </a:p>
+        </p:txBody>
+      </p:sp>
+      <p:sp>
+        <p:nvSpPr>
+          <p:cNvPr id="4" name="TextBox 3"/>
+          <p:cNvSpPr txBox="1"/>
+          <p:nvPr/>
+        </p:nvSpPr>
+        <p:spPr>
+          <a:xfrm>
+            <a:off x="548640" y="274320"/>
+            <a:ext cx="10058400" cy="365760"/>
+          </a:xfrm>
+          <a:prstGeom prst="rect">
+            <a:avLst/>
+          </a:prstGeom>
+          <a:noFill/>
+        </p:spPr>
+        <p:txBody>
+          <a:bodyPr wrap="square" anchor="t">
+            <a:spAutoFit/>
+          </a:bodyPr>
+          <a:lstStyle/>
+          <a:p>
+            <a:pPr algn="l"/>
+            <a:r>
+              <a:rPr sz="1300" b="1">
+                <a:solidFill>
+                  <a:srgbClr val="35D09B"/>
+                </a:solidFill>
+                <a:latin typeface="Segoe UI"/>
+              </a:rPr>
+              <a:t>ROADMAP</a:t>
+            </a:r>
+          </a:p>
+        </p:txBody>
+      </p:sp>
+      <p:sp>
+        <p:nvSpPr>
+          <p:cNvPr id="5" name="TextBox 4"/>
+          <p:cNvSpPr txBox="1"/>
+          <p:nvPr/>
+        </p:nvSpPr>
+        <p:spPr>
+          <a:xfrm>
+            <a:off x="548640" y="566928"/>
+            <a:ext cx="11064240" cy="822960"/>
+          </a:xfrm>
+          <a:prstGeom prst="rect">
+            <a:avLst/>
+          </a:prstGeom>
+          <a:noFill/>
+        </p:spPr>
+        <p:txBody>
+          <a:bodyPr wrap="square" anchor="t">
+            <a:spAutoFit/>
+          </a:bodyPr>
+          <a:lstStyle/>
+          <a:p>
+            <a:pPr algn="l"/>
+            <a:r>
+              <a:rPr sz="3000" b="1">
+                <a:solidFill>
+                  <a:srgbClr val="F5F8FF"/>
+                </a:solidFill>
+                <a:latin typeface="Segoe UI"/>
+              </a:rPr>
+              <a:t>Done &amp; what's next</a:t>
+            </a:r>
+          </a:p>
+        </p:txBody>
+      </p:sp>
+      <p:sp>
+        <p:nvSpPr>
+          <p:cNvPr id="6" name="Rounded Rectangle 5"/>
+          <p:cNvSpPr/>
+          <p:nvPr/>
+        </p:nvSpPr>
+        <p:spPr>
+          <a:xfrm>
+            <a:off x="640080" y="1737360"/>
+            <a:ext cx="5303520" cy="3108960"/>
+          </a:xfrm>
+          <a:prstGeom prst="roundRect">
+            <a:avLst/>
+          </a:prstGeom>
+          <a:solidFill>
+            <a:srgbClr val="1B2A4A"/>
+          </a:solidFill>
+          <a:ln w="15875">
+            <a:solidFill>
+              <a:srgbClr val="35D09B"/>
+            </a:solidFill>
+          </a:ln>
+          <a:effectLst/>
+        </p:spPr>
+        <p:style>
+          <a:lnRef idx="1">
+            <a:schemeClr val="accent1"/>
+          </a:lnRef>
+          <a:fillRef idx="3">
+            <a:schemeClr val="accent1"/>
+          </a:fillRef>
+          <a:effectRef idx="2">
+            <a:schemeClr val="accent1"/>
+          </a:effectRef>
+          <a:fontRef idx="minor">
+            <a:schemeClr val="lt1"/>
+          </a:fontRef>
+        </p:style>
+        <p:txBody>
+          <a:bodyPr rtlCol="0" anchor="ctr" wrap="square" lIns="73152" rIns="73152" tIns="36576" bIns="36576"/>
+          <a:lstStyle/>
+          <a:p>
+            <a:pPr algn="l"/>
+            <a:r>
               <a:rPr sz="1500" b="0">
                 <a:solidFill>
                   <a:srgbClr val="F5F8FF"/>
@@ -6608,7 +7353,7 @@
                 </a:solidFill>
                 <a:latin typeface="Segoe UI"/>
               </a:rPr>
-              <a:t>VP8 keyframe marker</a:t>
+              <a:t>VP8 keyframe marker · PLI/FIR relay</a:t>
             </a:r>
           </a:p>
           <a:p>
@@ -6620,7 +7365,7 @@
                 </a:solidFill>
                 <a:latin typeface="Segoe UI"/>
               </a:rPr>
-              <a:t>Keyframe (PLI/FIR) relay</a:t>
+              <a:t>Multi-party N:N (dynamic reneg)</a:t>
             </a:r>
           </a:p>
           <a:p>
@@ -6723,7 +7468,7 @@
                 </a:solidFill>
                 <a:latin typeface="Segoe UI"/>
               </a:rPr>
-              <a:t>Multi-party (N:N) routing</a:t>
+              <a:t>EKT (RFC 8870) key transport</a:t>
             </a:r>
           </a:p>
           <a:p>
@@ -6735,7 +7480,7 @@
                 </a:solidFill>
                 <a:latin typeface="Segoe UI"/>
               </a:rPr>
-              <a:t>EKT (RFC 8870) key transport</a:t>
+              <a:t>Certificate pinning to identity</a:t>
             </a:r>
           </a:p>
           <a:p>
@@ -6747,7 +7492,7 @@
                 </a:solidFill>
                 <a:latin typeface="Segoe UI"/>
               </a:rPr>
-              <a:t>Certificate pinning to identity</a:t>
+              <a:t>Encrypted headers (Cryptex)</a:t>
             </a:r>
           </a:p>
           <a:p>
@@ -6759,7 +7504,7 @@
                 </a:solidFill>
                 <a:latin typeface="Segoe UI"/>
               </a:rPr>
-              <a:t>Encrypted headers (Cryptex)</a:t>
+              <a:t>MLS group key agreement</a:t>
             </a:r>
           </a:p>
           <a:p>
@@ -6771,7 +7516,7 @@
                 </a:solidFill>
                 <a:latin typeface="Segoe UI"/>
               </a:rPr>
-              <a:t>MLS group key agreement</a:t>
+              <a:t>Simulcast / layer selection</a:t>
             </a:r>
           </a:p>
         </p:txBody>
@@ -6841,7 +7586,7 @@
                 </a:solidFill>
                 <a:latin typeface="Segoe UI"/>
               </a:rPr>
-              <a:t>14</a:t>
+              <a:t>15</a:t>
             </a:r>
           </a:p>
         </p:txBody>
@@ -8234,8 +8979,8 @@
         </p:nvSpPr>
         <p:spPr>
           <a:xfrm>
-            <a:off x="640080" y="1737360"/>
-            <a:ext cx="10881360" cy="1097280"/>
+            <a:off x="640080" y="1554480"/>
+            <a:ext cx="10881360" cy="914400"/>
           </a:xfrm>
           <a:prstGeom prst="roundRect">
             <a:avLst/>
@@ -8289,8 +9034,8 @@
         </p:nvSpPr>
         <p:spPr>
           <a:xfrm>
-            <a:off x="640080" y="3017520"/>
-            <a:ext cx="10881360" cy="1097280"/>
+            <a:off x="640080" y="2606040"/>
+            <a:ext cx="10881360" cy="914400"/>
           </a:xfrm>
           <a:prstGeom prst="roundRect">
             <a:avLst/>
@@ -8344,8 +9089,63 @@
         </p:nvSpPr>
         <p:spPr>
           <a:xfrm>
-            <a:off x="640080" y="4480560"/>
-            <a:ext cx="10881360" cy="1188720"/>
+            <a:off x="640080" y="3657600"/>
+            <a:ext cx="10881360" cy="914400"/>
+          </a:xfrm>
+          <a:prstGeom prst="roundRect">
+            <a:avLst/>
+          </a:prstGeom>
+          <a:solidFill>
+            <a:srgbClr val="1B2A4A"/>
+          </a:solidFill>
+          <a:ln w="15875">
+            <a:solidFill>
+              <a:srgbClr val="F2B14C"/>
+            </a:solidFill>
+          </a:ln>
+          <a:effectLst/>
+        </p:spPr>
+        <p:style>
+          <a:lnRef idx="1">
+            <a:schemeClr val="accent1"/>
+          </a:lnRef>
+          <a:fillRef idx="3">
+            <a:schemeClr val="accent1"/>
+          </a:fillRef>
+          <a:effectRef idx="2">
+            <a:schemeClr val="accent1"/>
+          </a:effectRef>
+          <a:fontRef idx="minor">
+            <a:schemeClr val="lt1"/>
+          </a:fontRef>
+        </p:style>
+        <p:txBody>
+          <a:bodyPr rtlCol="0" anchor="ctr" wrap="square" lIns="73152" rIns="73152" tIns="36576" bIns="36576"/>
+          <a:lstStyle/>
+          <a:p>
+            <a:pPr algn="l"/>
+            <a:r>
+              <a:rPr sz="1800" b="0">
+                <a:solidFill>
+                  <a:srgbClr val="F5F8FF"/>
+                </a:solidFill>
+                <a:latin typeface="Segoe UI"/>
+              </a:rPr>
+              <a:t>Phase 3 — Multi-party N:N with dynamic SDP renegotiation                 ✅ Verified</a:t>
+            </a:r>
+          </a:p>
+        </p:txBody>
+      </p:sp>
+      <p:sp>
+        <p:nvSpPr>
+          <p:cNvPr id="9" name="Rounded Rectangle 8"/>
+          <p:cNvSpPr/>
+          <p:nvPr/>
+        </p:nvSpPr>
+        <p:spPr>
+          <a:xfrm>
+            <a:off x="640080" y="4754880"/>
+            <a:ext cx="10881360" cy="1097280"/>
           </a:xfrm>
           <a:prstGeom prst="roundRect">
             <a:avLst/>
@@ -8398,14 +9198,14 @@
                 </a:solidFill>
                 <a:latin typeface="Segoe UI"/>
               </a:rPr>
-              <a:t>Two-way encrypted audio + video · keyframe relay · per-conference key rotation · unified config</a:t>
-            </a:r>
-          </a:p>
-        </p:txBody>
-      </p:sp>
-      <p:sp>
-        <p:nvSpPr>
-          <p:cNvPr id="9" name="TextBox 8"/>
+              <a:t>3-party encrypted audio + video · per-peer windows · keyframe relay · per-conference key rotation</a:t>
+            </a:r>
+          </a:p>
+        </p:txBody>
+      </p:sp>
+      <p:sp>
+        <p:nvSpPr>
+          <p:cNvPr id="10" name="TextBox 9"/>
           <p:cNvSpPr txBox="1"/>
           <p:nvPr/>
         </p:nvSpPr>
@@ -8440,7 +9240,7 @@
       </p:sp>
       <p:sp>
         <p:nvSpPr>
-          <p:cNvPr id="10" name="TextBox 9"/>
+          <p:cNvPr id="11" name="TextBox 10"/>
           <p:cNvSpPr txBox="1"/>
           <p:nvPr/>
         </p:nvSpPr>

--- a/docs/E2EE-Architecture.pptx
+++ b/docs/E2EE-Architecture.pptx
@@ -20,7 +20,6 @@
     <p:sldId id="268" r:id="rId19"/>
     <p:sldId id="269" r:id="rId20"/>
     <p:sldId id="270" r:id="rId21"/>
-    <p:sldId id="271" r:id="rId22"/>
   </p:sldIdLst>
   <p:sldSz cx="12191695" cy="6858000" type="screen4x3"/>
   <p:notesSz cx="6858000" cy="9144000"/>
@@ -3467,7 +3466,7 @@
                 </a:solidFill>
                 <a:latin typeface="Segoe UI"/>
               </a:rPr>
-              <a:t>ON THE WIRE</a:t>
+              <a:t>HARD-WON SUBTLETY</a:t>
             </a:r>
           </a:p>
         </p:txBody>
@@ -3502,42 +3501,98 @@
                 </a:solidFill>
                 <a:latin typeface="Segoe UI"/>
               </a:rPr>
-              <a:t>Inner E2E frame format</a:t>
-            </a:r>
-          </a:p>
-        </p:txBody>
-      </p:sp>
-      <p:sp>
-        <p:nvSpPr>
-          <p:cNvPr id="6" name="TextBox 5"/>
-          <p:cNvSpPr txBox="1"/>
-          <p:nvPr/>
-        </p:nvSpPr>
-        <p:spPr>
-          <a:xfrm>
-            <a:off x="640080" y="1554480"/>
-            <a:ext cx="10881360" cy="457200"/>
-          </a:xfrm>
-          <a:prstGeom prst="rect">
-            <a:avLst/>
-          </a:prstGeom>
-          <a:noFill/>
-        </p:spPr>
-        <p:txBody>
-          <a:bodyPr wrap="square" anchor="t">
-            <a:spAutoFit/>
-          </a:bodyPr>
+              <a:t>The VP8 keyframe marker</a:t>
+            </a:r>
+          </a:p>
+        </p:txBody>
+      </p:sp>
+      <p:sp>
+        <p:nvSpPr>
+          <p:cNvPr id="6" name="Rounded Rectangle 5"/>
+          <p:cNvSpPr/>
+          <p:nvPr/>
+        </p:nvSpPr>
+        <p:spPr>
+          <a:xfrm>
+            <a:off x="640080" y="1645920"/>
+            <a:ext cx="10881360" cy="1188720"/>
+          </a:xfrm>
+          <a:prstGeom prst="roundRect">
+            <a:avLst/>
+          </a:prstGeom>
+          <a:solidFill>
+            <a:srgbClr val="1B2A4A"/>
+          </a:solidFill>
+          <a:ln w="15875">
+            <a:solidFill>
+              <a:srgbClr val="E86A6A"/>
+            </a:solidFill>
+          </a:ln>
+          <a:effectLst/>
+        </p:spPr>
+        <p:style>
+          <a:lnRef idx="1">
+            <a:schemeClr val="accent1"/>
+          </a:lnRef>
+          <a:fillRef idx="3">
+            <a:schemeClr val="accent1"/>
+          </a:fillRef>
+          <a:effectRef idx="2">
+            <a:schemeClr val="accent1"/>
+          </a:effectRef>
+          <a:fontRef idx="minor">
+            <a:schemeClr val="lt1"/>
+          </a:fontRef>
+        </p:style>
+        <p:txBody>
+          <a:bodyPr rtlCol="0" anchor="ctr" wrap="square" lIns="73152" rIns="73152" tIns="36576" bIns="36576"/>
           <a:lstStyle/>
           <a:p>
             <a:pPr algn="l"/>
             <a:r>
-              <a:rPr sz="1500" b="0">
-                <a:solidFill>
-                  <a:srgbClr val="A9B8D6"/>
-                </a:solidFill>
-                <a:latin typeface="Segoe UI"/>
-              </a:rPr>
-              <a:t>AES-128-GCM at the encoded-frame boundary (libwebrtc FrameTransformer), empty AAD:</a:t>
+              <a:rPr sz="1400" b="0">
+                <a:solidFill>
+                  <a:srgbClr val="F5F8FF"/>
+                </a:solidFill>
+                <a:latin typeface="Segoe UI"/>
+              </a:rPr>
+              <a:t>Problem</a:t>
+            </a:r>
+          </a:p>
+          <a:p>
+            <a:pPr algn="l"/>
+            <a:r>
+              <a:rPr sz="1400" b="0">
+                <a:solidFill>
+                  <a:srgbClr val="F5F8FF"/>
+                </a:solidFill>
+                <a:latin typeface="Segoe UI"/>
+              </a:rPr>
+              <a:t>Full-frame E2EE hides the codec bitstream. The depacketizer reads the VP8</a:t>
+            </a:r>
+          </a:p>
+          <a:p>
+            <a:pPr algn="l"/>
+            <a:r>
+              <a:rPr sz="1400" b="0">
+                <a:solidFill>
+                  <a:srgbClr val="F5F8FF"/>
+                </a:solidFill>
+                <a:latin typeface="Segoe UI"/>
+              </a:rPr>
+              <a:t>keyframe bit from byte 0 — now it's key_id. Every frame looks like a delta →</a:t>
+            </a:r>
+          </a:p>
+          <a:p>
+            <a:pPr algn="l"/>
+            <a:r>
+              <a:rPr sz="1400" b="0">
+                <a:solidFill>
+                  <a:srgbClr val="F5F8FF"/>
+                </a:solidFill>
+                <a:latin typeface="Segoe UI"/>
+              </a:rPr>
+              <a:t>decoder never starts → endless PLIs → black video.</a:t>
             </a:r>
           </a:p>
         </p:txBody>
@@ -3550,8 +3605,131 @@
         </p:nvSpPr>
         <p:spPr>
           <a:xfrm>
-            <a:off x="822960" y="2286000"/>
-            <a:ext cx="1463040" cy="1005840"/>
+            <a:off x="640080" y="3108960"/>
+            <a:ext cx="10881360" cy="914400"/>
+          </a:xfrm>
+          <a:prstGeom prst="roundRect">
+            <a:avLst/>
+          </a:prstGeom>
+          <a:solidFill>
+            <a:srgbClr val="1B2A4A"/>
+          </a:solidFill>
+          <a:ln w="15875">
+            <a:solidFill>
+              <a:srgbClr val="35D09B"/>
+            </a:solidFill>
+          </a:ln>
+          <a:effectLst/>
+        </p:spPr>
+        <p:style>
+          <a:lnRef idx="1">
+            <a:schemeClr val="accent1"/>
+          </a:lnRef>
+          <a:fillRef idx="3">
+            <a:schemeClr val="accent1"/>
+          </a:fillRef>
+          <a:effectRef idx="2">
+            <a:schemeClr val="accent1"/>
+          </a:effectRef>
+          <a:fontRef idx="minor">
+            <a:schemeClr val="lt1"/>
+          </a:fontRef>
+        </p:style>
+        <p:txBody>
+          <a:bodyPr rtlCol="0" anchor="ctr" wrap="square" lIns="73152" rIns="73152" tIns="36576" bIns="36576"/>
+          <a:lstStyle/>
+          <a:p>
+            <a:pPr algn="ctr"/>
+            <a:r>
+              <a:rPr sz="1500" b="1">
+                <a:solidFill>
+                  <a:srgbClr val="F5F8FF"/>
+                </a:solidFill>
+                <a:latin typeface="Segoe UI"/>
+              </a:rPr>
+              <a:t>Fix — prepend a 1-byte cleartext marker to VIDEO frames</a:t>
+            </a:r>
+          </a:p>
+          <a:p>
+            <a:pPr algn="ctr"/>
+            <a:r>
+              <a:rPr sz="1500" b="1">
+                <a:solidFill>
+                  <a:srgbClr val="F5F8FF"/>
+                </a:solidFill>
+                <a:latin typeface="Segoe UI"/>
+              </a:rPr>
+              <a:t>0x00 = keyframe   ·   0x01 = delta   (from encoder IsKeyFrame())</a:t>
+            </a:r>
+          </a:p>
+        </p:txBody>
+      </p:sp>
+      <p:sp>
+        <p:nvSpPr>
+          <p:cNvPr id="8" name="Rounded Rectangle 7"/>
+          <p:cNvSpPr/>
+          <p:nvPr/>
+        </p:nvSpPr>
+        <p:spPr>
+          <a:xfrm>
+            <a:off x="822960" y="4297680"/>
+            <a:ext cx="1280160" cy="822960"/>
+          </a:xfrm>
+          <a:prstGeom prst="roundRect">
+            <a:avLst/>
+          </a:prstGeom>
+          <a:solidFill>
+            <a:srgbClr val="F2B14C"/>
+          </a:solidFill>
+          <a:ln w="15875">
+            <a:solidFill>
+              <a:srgbClr val="F2B14C"/>
+            </a:solidFill>
+          </a:ln>
+          <a:effectLst/>
+        </p:spPr>
+        <p:style>
+          <a:lnRef idx="1">
+            <a:schemeClr val="accent1"/>
+          </a:lnRef>
+          <a:fillRef idx="3">
+            <a:schemeClr val="accent1"/>
+          </a:fillRef>
+          <a:effectRef idx="2">
+            <a:schemeClr val="accent1"/>
+          </a:effectRef>
+          <a:fontRef idx="minor">
+            <a:schemeClr val="lt1"/>
+          </a:fontRef>
+        </p:style>
+        <p:txBody>
+          <a:bodyPr rtlCol="0" anchor="ctr" wrap="square" lIns="73152" rIns="73152" tIns="36576" bIns="36576"/>
+          <a:lstStyle/>
+          <a:p>
+            <a:pPr algn="ctr"/>
+            <a:r>
+              <a:rPr sz="1300" b="1">
+                <a:solidFill>
+                  <a:srgbClr val="0F172A"/>
+                </a:solidFill>
+                <a:latin typeface="Segoe UI"/>
+              </a:rPr>
+              <a:t>marker
+1B</a:t>
+            </a:r>
+          </a:p>
+        </p:txBody>
+      </p:sp>
+      <p:sp>
+        <p:nvSpPr>
+          <p:cNvPr id="9" name="Rounded Rectangle 8"/>
+          <p:cNvSpPr/>
+          <p:nvPr/>
+        </p:nvSpPr>
+        <p:spPr>
+          <a:xfrm>
+            <a:off x="2194560" y="4297680"/>
+            <a:ext cx="8778240" cy="822960"/>
           </a:xfrm>
           <a:prstGeom prst="roundRect">
             <a:avLst/>
@@ -3586,283 +3764,27 @@
           <a:p>
             <a:pPr algn="ctr"/>
             <a:r>
-              <a:rPr sz="1500" b="1">
-                <a:solidFill>
-                  <a:srgbClr val="F5F8FF"/>
-                </a:solidFill>
-                <a:latin typeface="Segoe UI"/>
-              </a:rPr>
-              <a:t>key_id
-1B</a:t>
-            </a:r>
-          </a:p>
-        </p:txBody>
-      </p:sp>
-      <p:sp>
-        <p:nvSpPr>
-          <p:cNvPr id="8" name="Rounded Rectangle 7"/>
-          <p:cNvSpPr/>
-          <p:nvPr/>
-        </p:nvSpPr>
-        <p:spPr>
-          <a:xfrm>
-            <a:off x="2395728" y="2286000"/>
-            <a:ext cx="2194560" cy="1005840"/>
-          </a:xfrm>
-          <a:prstGeom prst="roundRect">
-            <a:avLst/>
-          </a:prstGeom>
-          <a:solidFill>
-            <a:srgbClr val="1B2A4A"/>
-          </a:solidFill>
-          <a:ln w="15875">
-            <a:solidFill>
-              <a:srgbClr val="35D09B"/>
-            </a:solidFill>
-          </a:ln>
-          <a:effectLst/>
-        </p:spPr>
-        <p:style>
-          <a:lnRef idx="1">
-            <a:schemeClr val="accent1"/>
-          </a:lnRef>
-          <a:fillRef idx="3">
-            <a:schemeClr val="accent1"/>
-          </a:fillRef>
-          <a:effectRef idx="2">
-            <a:schemeClr val="accent1"/>
-          </a:effectRef>
-          <a:fontRef idx="minor">
-            <a:schemeClr val="lt1"/>
-          </a:fontRef>
-        </p:style>
-        <p:txBody>
-          <a:bodyPr rtlCol="0" anchor="ctr" wrap="square" lIns="73152" rIns="73152" tIns="36576" bIns="36576"/>
-          <a:lstStyle/>
-          <a:p>
-            <a:pPr algn="ctr"/>
-            <a:r>
-              <a:rPr sz="1500" b="1">
-                <a:solidFill>
-                  <a:srgbClr val="F5F8FF"/>
-                </a:solidFill>
-                <a:latin typeface="Segoe UI"/>
-              </a:rPr>
-              <a:t>IV
-12B</a:t>
-            </a:r>
-          </a:p>
-        </p:txBody>
-      </p:sp>
-      <p:sp>
-        <p:nvSpPr>
-          <p:cNvPr id="9" name="Rounded Rectangle 8"/>
-          <p:cNvSpPr/>
-          <p:nvPr/>
-        </p:nvSpPr>
-        <p:spPr>
-          <a:xfrm>
-            <a:off x="4700016" y="2286000"/>
-            <a:ext cx="4572000" cy="1005840"/>
-          </a:xfrm>
-          <a:prstGeom prst="roundRect">
-            <a:avLst/>
-          </a:prstGeom>
-          <a:solidFill>
-            <a:srgbClr val="1B2A4A"/>
-          </a:solidFill>
-          <a:ln w="15875">
-            <a:solidFill>
-              <a:srgbClr val="6B478F"/>
-            </a:solidFill>
-          </a:ln>
-          <a:effectLst/>
-        </p:spPr>
-        <p:style>
-          <a:lnRef idx="1">
-            <a:schemeClr val="accent1"/>
-          </a:lnRef>
-          <a:fillRef idx="3">
-            <a:schemeClr val="accent1"/>
-          </a:fillRef>
-          <a:effectRef idx="2">
-            <a:schemeClr val="accent1"/>
-          </a:effectRef>
-          <a:fontRef idx="minor">
-            <a:schemeClr val="lt1"/>
-          </a:fontRef>
-        </p:style>
-        <p:txBody>
-          <a:bodyPr rtlCol="0" anchor="ctr" wrap="square" lIns="73152" rIns="73152" tIns="36576" bIns="36576"/>
-          <a:lstStyle/>
-          <a:p>
-            <a:pPr algn="ctr"/>
-            <a:r>
-              <a:rPr sz="1500" b="1">
-                <a:solidFill>
-                  <a:srgbClr val="F5F8FF"/>
-                </a:solidFill>
-                <a:latin typeface="Segoe UI"/>
-              </a:rPr>
-              <a:t>ciphertext
-N bytes</a:t>
-            </a:r>
-          </a:p>
-        </p:txBody>
-      </p:sp>
-      <p:sp>
-        <p:nvSpPr>
-          <p:cNvPr id="10" name="Rounded Rectangle 9"/>
-          <p:cNvSpPr/>
-          <p:nvPr/>
-        </p:nvSpPr>
-        <p:spPr>
-          <a:xfrm>
-            <a:off x="9381744" y="2286000"/>
-            <a:ext cx="1828800" cy="1005840"/>
-          </a:xfrm>
-          <a:prstGeom prst="roundRect">
-            <a:avLst/>
-          </a:prstGeom>
-          <a:solidFill>
-            <a:srgbClr val="1B2A4A"/>
-          </a:solidFill>
-          <a:ln w="15875">
-            <a:solidFill>
-              <a:srgbClr val="F2B14C"/>
-            </a:solidFill>
-          </a:ln>
-          <a:effectLst/>
-        </p:spPr>
-        <p:style>
-          <a:lnRef idx="1">
-            <a:schemeClr val="accent1"/>
-          </a:lnRef>
-          <a:fillRef idx="3">
-            <a:schemeClr val="accent1"/>
-          </a:fillRef>
-          <a:effectRef idx="2">
-            <a:schemeClr val="accent1"/>
-          </a:effectRef>
-          <a:fontRef idx="minor">
-            <a:schemeClr val="lt1"/>
-          </a:fontRef>
-        </p:style>
-        <p:txBody>
-          <a:bodyPr rtlCol="0" anchor="ctr" wrap="square" lIns="73152" rIns="73152" tIns="36576" bIns="36576"/>
-          <a:lstStyle/>
-          <a:p>
-            <a:pPr algn="ctr"/>
-            <a:r>
-              <a:rPr sz="1500" b="1">
-                <a:solidFill>
-                  <a:srgbClr val="F5F8FF"/>
-                </a:solidFill>
-                <a:latin typeface="Segoe UI"/>
-              </a:rPr>
-              <a:t>GCM tag
-16B</a:t>
-            </a:r>
-          </a:p>
-        </p:txBody>
-      </p:sp>
-      <p:sp>
-        <p:nvSpPr>
-          <p:cNvPr id="11" name="TextBox 10"/>
+              <a:rPr sz="1400" b="0">
+                <a:solidFill>
+                  <a:srgbClr val="F5F8FF"/>
+                </a:solidFill>
+                <a:latin typeface="Segoe UI"/>
+              </a:rPr>
+              <a:t>key_id · IV · ciphertext · GCM tag  (inner E2E payload)</a:t>
+            </a:r>
+          </a:p>
+        </p:txBody>
+      </p:sp>
+      <p:sp>
+        <p:nvSpPr>
+          <p:cNvPr id="10" name="TextBox 9"/>
           <p:cNvSpPr txBox="1"/>
           <p:nvPr/>
         </p:nvSpPr>
         <p:spPr>
           <a:xfrm>
-            <a:off x="640080" y="3657600"/>
-            <a:ext cx="10789920" cy="4572000"/>
-          </a:xfrm>
-          <a:prstGeom prst="rect">
-            <a:avLst/>
-          </a:prstGeom>
-          <a:noFill/>
-        </p:spPr>
-        <p:txBody>
-          <a:bodyPr wrap="square">
-            <a:spAutoFit/>
-          </a:bodyPr>
-          <a:lstStyle/>
-          <a:p>
-            <a:pPr>
-              <a:spcAft>
-                <a:spcPts val="1152"/>
-              </a:spcAft>
-            </a:pPr>
-            <a:r>
-              <a:rPr sz="1800">
-                <a:solidFill>
-                  <a:srgbClr val="F5F8FF"/>
-                </a:solidFill>
-                <a:latin typeface="Segoe UI"/>
-              </a:rPr>
-              <a:t>• key_id — KEK SPI / epoch selector from the Key Distributor.</a:t>
-            </a:r>
-          </a:p>
-          <a:p>
-            <a:pPr>
-              <a:spcAft>
-                <a:spcPts val="1152"/>
-              </a:spcAft>
-            </a:pPr>
-            <a:r>
-              <a:rPr sz="1800">
-                <a:solidFill>
-                  <a:srgbClr val="F5F8FF"/>
-                </a:solidFill>
-                <a:latin typeface="Segoe UI"/>
-              </a:rPr>
-              <a:t>• IV — SSRC (4B, big-endian) ‖ frame counter (8B).</a:t>
-            </a:r>
-          </a:p>
-          <a:p>
-            <a:pPr>
-              <a:spcAft>
-                <a:spcPts val="1152"/>
-              </a:spcAft>
-            </a:pPr>
-            <a:r>
-              <a:rPr sz="1800">
-                <a:solidFill>
-                  <a:srgbClr val="F5F8FF"/>
-                </a:solidFill>
-                <a:latin typeface="Segoe UI"/>
-              </a:rPr>
-              <a:t>• Fixed overhead = 1 + 12 + 16 = 29 bytes per frame.</a:t>
-            </a:r>
-          </a:p>
-          <a:p>
-            <a:pPr>
-              <a:spcAft>
-                <a:spcPts val="1152"/>
-              </a:spcAft>
-            </a:pPr>
-            <a:r>
-              <a:rPr sz="1800">
-                <a:solidFill>
-                  <a:srgbClr val="F5F8FF"/>
-                </a:solidFill>
-                <a:latin typeface="Segoe UI"/>
-              </a:rPr>
-              <a:t>• SFU forwards this inner payload byte-for-byte (no per-packet rewriting).</a:t>
-            </a:r>
-          </a:p>
-        </p:txBody>
-      </p:sp>
-      <p:sp>
-        <p:nvSpPr>
-          <p:cNvPr id="12" name="TextBox 11"/>
-          <p:cNvSpPr txBox="1"/>
-          <p:nvPr/>
-        </p:nvSpPr>
-        <p:spPr>
-          <a:xfrm>
-            <a:off x="548640" y="6446520"/>
-            <a:ext cx="7315200" cy="320040"/>
+            <a:off x="640080" y="5303520"/>
+            <a:ext cx="10881360" cy="640080"/>
           </a:xfrm>
           <a:prstGeom prst="rect">
             <a:avLst/>
@@ -3877,6 +3799,41 @@
           <a:p>
             <a:pPr algn="l"/>
             <a:r>
+              <a:rPr sz="1400" b="0">
+                <a:solidFill>
+                  <a:srgbClr val="A9B8D6"/>
+                </a:solidFill>
+                <a:latin typeface="Segoe UI"/>
+              </a:rPr>
+              <a:t>Receiver strips the marker before the key-id check &amp; decrypt; audio frames carry no marker.</a:t>
+            </a:r>
+          </a:p>
+        </p:txBody>
+      </p:sp>
+      <p:sp>
+        <p:nvSpPr>
+          <p:cNvPr id="11" name="TextBox 10"/>
+          <p:cNvSpPr txBox="1"/>
+          <p:nvPr/>
+        </p:nvSpPr>
+        <p:spPr>
+          <a:xfrm>
+            <a:off x="548640" y="6446520"/>
+            <a:ext cx="7315200" cy="320040"/>
+          </a:xfrm>
+          <a:prstGeom prst="rect">
+            <a:avLst/>
+          </a:prstGeom>
+          <a:noFill/>
+        </p:spPr>
+        <p:txBody>
+          <a:bodyPr wrap="square" anchor="t">
+            <a:spAutoFit/>
+          </a:bodyPr>
+          <a:lstStyle/>
+          <a:p>
+            <a:pPr algn="l"/>
+            <a:r>
               <a:rPr sz="1000" b="0">
                 <a:solidFill>
                   <a:srgbClr val="A9B8D6"/>
@@ -3890,7 +3847,7 @@
       </p:sp>
       <p:sp>
         <p:nvSpPr>
-          <p:cNvPr id="13" name="TextBox 12"/>
+          <p:cNvPr id="12" name="TextBox 11"/>
           <p:cNvSpPr txBox="1"/>
           <p:nvPr/>
         </p:nvSpPr>
@@ -4059,7 +4016,7 @@
                 </a:solidFill>
                 <a:latin typeface="Segoe UI"/>
               </a:rPr>
-              <a:t>HARD-WON SUBTLETY</a:t>
+              <a:t>RTCP ACROSS LEGS</a:t>
             </a:r>
           </a:p>
         </p:txBody>
@@ -4094,7 +4051,7 @@
                 </a:solidFill>
                 <a:latin typeface="Segoe UI"/>
               </a:rPr>
-              <a:t>The VP8 keyframe marker</a:t>
+              <a:t>Keyframe (PLI/FIR) relay</a:t>
             </a:r>
           </a:p>
         </p:txBody>
@@ -4107,228 +4064,14 @@
         </p:nvSpPr>
         <p:spPr>
           <a:xfrm>
-            <a:off x="640080" y="1645920"/>
-            <a:ext cx="10881360" cy="1188720"/>
+            <a:off x="640080" y="2743200"/>
+            <a:ext cx="2468880" cy="1280160"/>
           </a:xfrm>
           <a:prstGeom prst="roundRect">
             <a:avLst/>
           </a:prstGeom>
           <a:solidFill>
-            <a:srgbClr val="1B2A4A"/>
-          </a:solidFill>
-          <a:ln w="15875">
-            <a:solidFill>
-              <a:srgbClr val="E86A6A"/>
-            </a:solidFill>
-          </a:ln>
-          <a:effectLst/>
-        </p:spPr>
-        <p:style>
-          <a:lnRef idx="1">
-            <a:schemeClr val="accent1"/>
-          </a:lnRef>
-          <a:fillRef idx="3">
-            <a:schemeClr val="accent1"/>
-          </a:fillRef>
-          <a:effectRef idx="2">
-            <a:schemeClr val="accent1"/>
-          </a:effectRef>
-          <a:fontRef idx="minor">
-            <a:schemeClr val="lt1"/>
-          </a:fontRef>
-        </p:style>
-        <p:txBody>
-          <a:bodyPr rtlCol="0" anchor="ctr" wrap="square" lIns="73152" rIns="73152" tIns="36576" bIns="36576"/>
-          <a:lstStyle/>
-          <a:p>
-            <a:pPr algn="l"/>
-            <a:r>
-              <a:rPr sz="1400" b="0">
-                <a:solidFill>
-                  <a:srgbClr val="F5F8FF"/>
-                </a:solidFill>
-                <a:latin typeface="Segoe UI"/>
-              </a:rPr>
-              <a:t>Problem</a:t>
-            </a:r>
-          </a:p>
-          <a:p>
-            <a:pPr algn="l"/>
-            <a:r>
-              <a:rPr sz="1400" b="0">
-                <a:solidFill>
-                  <a:srgbClr val="F5F8FF"/>
-                </a:solidFill>
-                <a:latin typeface="Segoe UI"/>
-              </a:rPr>
-              <a:t>Full-frame E2EE hides the codec bitstream. The depacketizer reads the VP8</a:t>
-            </a:r>
-          </a:p>
-          <a:p>
-            <a:pPr algn="l"/>
-            <a:r>
-              <a:rPr sz="1400" b="0">
-                <a:solidFill>
-                  <a:srgbClr val="F5F8FF"/>
-                </a:solidFill>
-                <a:latin typeface="Segoe UI"/>
-              </a:rPr>
-              <a:t>keyframe bit from byte 0 — now it's key_id. Every frame looks like a delta →</a:t>
-            </a:r>
-          </a:p>
-          <a:p>
-            <a:pPr algn="l"/>
-            <a:r>
-              <a:rPr sz="1400" b="0">
-                <a:solidFill>
-                  <a:srgbClr val="F5F8FF"/>
-                </a:solidFill>
-                <a:latin typeface="Segoe UI"/>
-              </a:rPr>
-              <a:t>decoder never starts → endless PLIs → black video.</a:t>
-            </a:r>
-          </a:p>
-        </p:txBody>
-      </p:sp>
-      <p:sp>
-        <p:nvSpPr>
-          <p:cNvPr id="7" name="Rounded Rectangle 6"/>
-          <p:cNvSpPr/>
-          <p:nvPr/>
-        </p:nvSpPr>
-        <p:spPr>
-          <a:xfrm>
-            <a:off x="640080" y="3108960"/>
-            <a:ext cx="10881360" cy="914400"/>
-          </a:xfrm>
-          <a:prstGeom prst="roundRect">
-            <a:avLst/>
-          </a:prstGeom>
-          <a:solidFill>
-            <a:srgbClr val="1B2A4A"/>
-          </a:solidFill>
-          <a:ln w="15875">
-            <a:solidFill>
-              <a:srgbClr val="35D09B"/>
-            </a:solidFill>
-          </a:ln>
-          <a:effectLst/>
-        </p:spPr>
-        <p:style>
-          <a:lnRef idx="1">
-            <a:schemeClr val="accent1"/>
-          </a:lnRef>
-          <a:fillRef idx="3">
-            <a:schemeClr val="accent1"/>
-          </a:fillRef>
-          <a:effectRef idx="2">
-            <a:schemeClr val="accent1"/>
-          </a:effectRef>
-          <a:fontRef idx="minor">
-            <a:schemeClr val="lt1"/>
-          </a:fontRef>
-        </p:style>
-        <p:txBody>
-          <a:bodyPr rtlCol="0" anchor="ctr" wrap="square" lIns="73152" rIns="73152" tIns="36576" bIns="36576"/>
-          <a:lstStyle/>
-          <a:p>
-            <a:pPr algn="ctr"/>
-            <a:r>
-              <a:rPr sz="1500" b="1">
-                <a:solidFill>
-                  <a:srgbClr val="F5F8FF"/>
-                </a:solidFill>
-                <a:latin typeface="Segoe UI"/>
-              </a:rPr>
-              <a:t>Fix — prepend a 1-byte cleartext marker to VIDEO frames</a:t>
-            </a:r>
-          </a:p>
-          <a:p>
-            <a:pPr algn="ctr"/>
-            <a:r>
-              <a:rPr sz="1500" b="1">
-                <a:solidFill>
-                  <a:srgbClr val="F5F8FF"/>
-                </a:solidFill>
-                <a:latin typeface="Segoe UI"/>
-              </a:rPr>
-              <a:t>0x00 = keyframe   ·   0x01 = delta   (from encoder IsKeyFrame())</a:t>
-            </a:r>
-          </a:p>
-        </p:txBody>
-      </p:sp>
-      <p:sp>
-        <p:nvSpPr>
-          <p:cNvPr id="8" name="Rounded Rectangle 7"/>
-          <p:cNvSpPr/>
-          <p:nvPr/>
-        </p:nvSpPr>
-        <p:spPr>
-          <a:xfrm>
-            <a:off x="822960" y="4297680"/>
-            <a:ext cx="1280160" cy="822960"/>
-          </a:xfrm>
-          <a:prstGeom prst="roundRect">
-            <a:avLst/>
-          </a:prstGeom>
-          <a:solidFill>
-            <a:srgbClr val="F2B14C"/>
-          </a:solidFill>
-          <a:ln w="15875">
-            <a:solidFill>
-              <a:srgbClr val="F2B14C"/>
-            </a:solidFill>
-          </a:ln>
-          <a:effectLst/>
-        </p:spPr>
-        <p:style>
-          <a:lnRef idx="1">
-            <a:schemeClr val="accent1"/>
-          </a:lnRef>
-          <a:fillRef idx="3">
-            <a:schemeClr val="accent1"/>
-          </a:fillRef>
-          <a:effectRef idx="2">
-            <a:schemeClr val="accent1"/>
-          </a:effectRef>
-          <a:fontRef idx="minor">
-            <a:schemeClr val="lt1"/>
-          </a:fontRef>
-        </p:style>
-        <p:txBody>
-          <a:bodyPr rtlCol="0" anchor="ctr" wrap="square" lIns="73152" rIns="73152" tIns="36576" bIns="36576"/>
-          <a:lstStyle/>
-          <a:p>
-            <a:pPr algn="ctr"/>
-            <a:r>
-              <a:rPr sz="1300" b="1">
-                <a:solidFill>
-                  <a:srgbClr val="0F172A"/>
-                </a:solidFill>
-                <a:latin typeface="Segoe UI"/>
-              </a:rPr>
-              <a:t>marker
-1B</a:t>
-            </a:r>
-          </a:p>
-        </p:txBody>
-      </p:sp>
-      <p:sp>
-        <p:nvSpPr>
-          <p:cNvPr id="9" name="Rounded Rectangle 8"/>
-          <p:cNvSpPr/>
-          <p:nvPr/>
-        </p:nvSpPr>
-        <p:spPr>
-          <a:xfrm>
-            <a:off x="2194560" y="4297680"/>
-            <a:ext cx="8778240" cy="822960"/>
-          </a:xfrm>
-          <a:prstGeom prst="roundRect">
-            <a:avLst/>
-          </a:prstGeom>
-          <a:solidFill>
-            <a:srgbClr val="1B2A4A"/>
+            <a:srgbClr val="2E5C9E"/>
           </a:solidFill>
           <a:ln w="15875">
             <a:solidFill>
@@ -4357,27 +4100,318 @@
           <a:p>
             <a:pPr algn="ctr"/>
             <a:r>
-              <a:rPr sz="1400" b="0">
-                <a:solidFill>
-                  <a:srgbClr val="F5F8FF"/>
-                </a:solidFill>
-                <a:latin typeface="Segoe UI"/>
-              </a:rPr>
-              <a:t>key_id · IV · ciphertext · GCM tag  (inner E2E payload)</a:t>
-            </a:r>
-          </a:p>
-        </p:txBody>
-      </p:sp>
-      <p:sp>
-        <p:nvSpPr>
-          <p:cNvPr id="10" name="TextBox 9"/>
+              <a:rPr sz="1500" b="1">
+                <a:solidFill>
+                  <a:srgbClr val="F5F8FF"/>
+                </a:solidFill>
+                <a:latin typeface="Segoe UI"/>
+              </a:rPr>
+              <a:t>Receiver B</a:t>
+            </a:r>
+          </a:p>
+          <a:p>
+            <a:pPr algn="ctr"/>
+            <a:r>
+              <a:rPr sz="1500" b="1">
+                <a:solidFill>
+                  <a:srgbClr val="F5F8FF"/>
+                </a:solidFill>
+                <a:latin typeface="Segoe UI"/>
+              </a:rPr>
+              <a:t>sends PLI</a:t>
+            </a:r>
+          </a:p>
+        </p:txBody>
+      </p:sp>
+      <p:sp>
+        <p:nvSpPr>
+          <p:cNvPr id="7" name="Rounded Rectangle 6"/>
+          <p:cNvSpPr/>
+          <p:nvPr/>
+        </p:nvSpPr>
+        <p:spPr>
+          <a:xfrm>
+            <a:off x="4846320" y="2743200"/>
+            <a:ext cx="2468880" cy="1280160"/>
+          </a:xfrm>
+          <a:prstGeom prst="roundRect">
+            <a:avLst/>
+          </a:prstGeom>
+          <a:solidFill>
+            <a:srgbClr val="6B478F"/>
+          </a:solidFill>
+          <a:ln w="15875">
+            <a:solidFill>
+              <a:srgbClr val="4C9AFF"/>
+            </a:solidFill>
+          </a:ln>
+          <a:effectLst/>
+        </p:spPr>
+        <p:style>
+          <a:lnRef idx="1">
+            <a:schemeClr val="accent1"/>
+          </a:lnRef>
+          <a:fillRef idx="3">
+            <a:schemeClr val="accent1"/>
+          </a:fillRef>
+          <a:effectRef idx="2">
+            <a:schemeClr val="accent1"/>
+          </a:effectRef>
+          <a:fontRef idx="minor">
+            <a:schemeClr val="lt1"/>
+          </a:fontRef>
+        </p:style>
+        <p:txBody>
+          <a:bodyPr rtlCol="0" anchor="ctr" wrap="square" lIns="73152" rIns="73152" tIns="36576" bIns="36576"/>
+          <a:lstStyle/>
+          <a:p>
+            <a:pPr algn="ctr"/>
+            <a:r>
+              <a:rPr sz="1500" b="1">
+                <a:solidFill>
+                  <a:srgbClr val="F5F8FF"/>
+                </a:solidFill>
+                <a:latin typeface="Segoe UI"/>
+              </a:rPr>
+              <a:t>SFU</a:t>
+            </a:r>
+          </a:p>
+          <a:p>
+            <a:pPr algn="ctr"/>
+            <a:r>
+              <a:rPr sz="1500" b="1">
+                <a:solidFill>
+                  <a:srgbClr val="F5F8FF"/>
+                </a:solidFill>
+                <a:latin typeface="Segoe UI"/>
+              </a:rPr>
+              <a:t>map B → sender A</a:t>
+            </a:r>
+          </a:p>
+        </p:txBody>
+      </p:sp>
+      <p:sp>
+        <p:nvSpPr>
+          <p:cNvPr id="8" name="Rounded Rectangle 7"/>
+          <p:cNvSpPr/>
+          <p:nvPr/>
+        </p:nvSpPr>
+        <p:spPr>
+          <a:xfrm>
+            <a:off x="9052560" y="2743200"/>
+            <a:ext cx="2468880" cy="1280160"/>
+          </a:xfrm>
+          <a:prstGeom prst="roundRect">
+            <a:avLst/>
+          </a:prstGeom>
+          <a:solidFill>
+            <a:srgbClr val="2E5C9E"/>
+          </a:solidFill>
+          <a:ln w="15875">
+            <a:solidFill>
+              <a:srgbClr val="4C9AFF"/>
+            </a:solidFill>
+          </a:ln>
+          <a:effectLst/>
+        </p:spPr>
+        <p:style>
+          <a:lnRef idx="1">
+            <a:schemeClr val="accent1"/>
+          </a:lnRef>
+          <a:fillRef idx="3">
+            <a:schemeClr val="accent1"/>
+          </a:fillRef>
+          <a:effectRef idx="2">
+            <a:schemeClr val="accent1"/>
+          </a:effectRef>
+          <a:fontRef idx="minor">
+            <a:schemeClr val="lt1"/>
+          </a:fontRef>
+        </p:style>
+        <p:txBody>
+          <a:bodyPr rtlCol="0" anchor="ctr" wrap="square" lIns="73152" rIns="73152" tIns="36576" bIns="36576"/>
+          <a:lstStyle/>
+          <a:p>
+            <a:pPr algn="ctr"/>
+            <a:r>
+              <a:rPr sz="1500" b="1">
+                <a:solidFill>
+                  <a:srgbClr val="F5F8FF"/>
+                </a:solidFill>
+                <a:latin typeface="Segoe UI"/>
+              </a:rPr>
+              <a:t>Sender A</a:t>
+            </a:r>
+          </a:p>
+          <a:p>
+            <a:pPr algn="ctr"/>
+            <a:r>
+              <a:rPr sz="1500" b="1">
+                <a:solidFill>
+                  <a:srgbClr val="F5F8FF"/>
+                </a:solidFill>
+                <a:latin typeface="Segoe UI"/>
+              </a:rPr>
+              <a:t>request_keyframe()</a:t>
+            </a:r>
+          </a:p>
+        </p:txBody>
+      </p:sp>
+      <p:cxnSp>
+        <p:nvCxnSpPr>
+          <p:cNvPr id="9" name="Connector 8"/>
+          <p:cNvCxnSpPr/>
+          <p:nvPr/>
+        </p:nvCxnSpPr>
+        <p:spPr>
+          <a:xfrm>
+            <a:off x="3108960" y="3383280"/>
+            <a:ext cx="1737360" cy="0"/>
+          </a:xfrm>
+          <a:prstGeom prst="line">
+            <a:avLst/>
+          </a:prstGeom>
+          <a:ln w="31750">
+            <a:solidFill>
+              <a:srgbClr val="F2B14C"/>
+            </a:solidFill>
+            <a:tailEnd type="triangle" w="med" len="med"/>
+          </a:ln>
+          <a:effectLst/>
+        </p:spPr>
+        <p:style>
+          <a:lnRef idx="2">
+            <a:schemeClr val="accent1"/>
+          </a:lnRef>
+          <a:fillRef idx="0">
+            <a:schemeClr val="accent1"/>
+          </a:fillRef>
+          <a:effectRef idx="1">
+            <a:schemeClr val="accent1"/>
+          </a:effectRef>
+          <a:fontRef idx="minor">
+            <a:schemeClr val="tx1"/>
+          </a:fontRef>
+        </p:style>
+      </p:cxnSp>
+      <p:cxnSp>
+        <p:nvCxnSpPr>
+          <p:cNvPr id="10" name="Connector 9"/>
+          <p:cNvCxnSpPr/>
+          <p:nvPr/>
+        </p:nvCxnSpPr>
+        <p:spPr>
+          <a:xfrm>
+            <a:off x="7315200" y="3383280"/>
+            <a:ext cx="1737360" cy="0"/>
+          </a:xfrm>
+          <a:prstGeom prst="line">
+            <a:avLst/>
+          </a:prstGeom>
+          <a:ln w="31750">
+            <a:solidFill>
+              <a:srgbClr val="F2B14C"/>
+            </a:solidFill>
+            <a:tailEnd type="triangle" w="med" len="med"/>
+          </a:ln>
+          <a:effectLst/>
+        </p:spPr>
+        <p:style>
+          <a:lnRef idx="2">
+            <a:schemeClr val="accent1"/>
+          </a:lnRef>
+          <a:fillRef idx="0">
+            <a:schemeClr val="accent1"/>
+          </a:fillRef>
+          <a:effectRef idx="1">
+            <a:schemeClr val="accent1"/>
+          </a:effectRef>
+          <a:fontRef idx="minor">
+            <a:schemeClr val="tx1"/>
+          </a:fontRef>
+        </p:style>
+      </p:cxnSp>
+      <p:sp>
+        <p:nvSpPr>
+          <p:cNvPr id="11" name="TextBox 10"/>
           <p:cNvSpPr txBox="1"/>
           <p:nvPr/>
         </p:nvSpPr>
         <p:spPr>
           <a:xfrm>
-            <a:off x="640080" y="5303520"/>
-            <a:ext cx="10881360" cy="640080"/>
+            <a:off x="640080" y="4389120"/>
+            <a:ext cx="10789920" cy="4572000"/>
+          </a:xfrm>
+          <a:prstGeom prst="rect">
+            <a:avLst/>
+          </a:prstGeom>
+          <a:noFill/>
+        </p:spPr>
+        <p:txBody>
+          <a:bodyPr wrap="square">
+            <a:spAutoFit/>
+          </a:bodyPr>
+          <a:lstStyle/>
+          <a:p>
+            <a:pPr>
+              <a:spcAft>
+                <a:spcPts val="1152"/>
+              </a:spcAft>
+            </a:pPr>
+            <a:r>
+              <a:rPr sz="1800">
+                <a:solidFill>
+                  <a:srgbClr val="F5F8FF"/>
+                </a:solidFill>
+                <a:latin typeface="Segoe UI"/>
+              </a:rPr>
+              <a:t>• Because HBH SRTP terminates per leg, RTCP feedback terminates per leg too.</a:t>
+            </a:r>
+          </a:p>
+          <a:p>
+            <a:pPr>
+              <a:spcAft>
+                <a:spcPts val="1152"/>
+              </a:spcAft>
+            </a:pPr>
+            <a:r>
+              <a:rPr sz="1800">
+                <a:solidFill>
+                  <a:srgbClr val="F5F8FF"/>
+                </a:solidFill>
+                <a:latin typeface="Segoe UI"/>
+              </a:rPr>
+              <a:t>• On Event::KeyframeRequest the SFU maps the requester to the sending peer in the room.</a:t>
+            </a:r>
+          </a:p>
+          <a:p>
+            <a:pPr>
+              <a:spcAft>
+                <a:spcPts val="1152"/>
+              </a:spcAft>
+            </a:pPr>
+            <a:r>
+              <a:rPr sz="1800">
+                <a:solidFill>
+                  <a:srgbClr val="F5F8FF"/>
+                </a:solidFill>
+                <a:latin typeface="Segoe UI"/>
+              </a:rPr>
+              <a:t>• It calls request_keyframe(kind) on that sender's video rx stream — so a fresh keyframe flows.</a:t>
+            </a:r>
+          </a:p>
+        </p:txBody>
+      </p:sp>
+      <p:sp>
+        <p:nvSpPr>
+          <p:cNvPr id="12" name="TextBox 11"/>
+          <p:cNvSpPr txBox="1"/>
+          <p:nvPr/>
+        </p:nvSpPr>
+        <p:spPr>
+          <a:xfrm>
+            <a:off x="548640" y="6446520"/>
+            <a:ext cx="7315200" cy="320040"/>
           </a:xfrm>
           <a:prstGeom prst="rect">
             <a:avLst/>
@@ -4392,47 +4426,12 @@
           <a:p>
             <a:pPr algn="l"/>
             <a:r>
-              <a:rPr sz="1400" b="0">
+              <a:rPr sz="1000" b="0">
                 <a:solidFill>
                   <a:srgbClr val="A9B8D6"/>
                 </a:solidFill>
                 <a:latin typeface="Segoe UI"/>
               </a:rPr>
-              <a:t>Receiver strips the marker before the key-id check &amp; decrypt; audio frames carry no marker.</a:t>
-            </a:r>
-          </a:p>
-        </p:txBody>
-      </p:sp>
-      <p:sp>
-        <p:nvSpPr>
-          <p:cNvPr id="11" name="TextBox 10"/>
-          <p:cNvSpPr txBox="1"/>
-          <p:nvPr/>
-        </p:nvSpPr>
-        <p:spPr>
-          <a:xfrm>
-            <a:off x="548640" y="6446520"/>
-            <a:ext cx="7315200" cy="320040"/>
-          </a:xfrm>
-          <a:prstGeom prst="rect">
-            <a:avLst/>
-          </a:prstGeom>
-          <a:noFill/>
-        </p:spPr>
-        <p:txBody>
-          <a:bodyPr wrap="square" anchor="t">
-            <a:spAutoFit/>
-          </a:bodyPr>
-          <a:lstStyle/>
-          <a:p>
-            <a:pPr algn="l"/>
-            <a:r>
-              <a:rPr sz="1000" b="0">
-                <a:solidFill>
-                  <a:srgbClr val="A9B8D6"/>
-                </a:solidFill>
-                <a:latin typeface="Segoe UI"/>
-              </a:rPr>
               <a:t>E2EE WebRTC — Zero-Trust SFU (str0m + PERC)</a:t>
             </a:r>
           </a:p>
@@ -4440,7 +4439,7 @@
       </p:sp>
       <p:sp>
         <p:nvSpPr>
-          <p:cNvPr id="12" name="TextBox 11"/>
+          <p:cNvPr id="13" name="TextBox 12"/>
           <p:cNvSpPr txBox="1"/>
           <p:nvPr/>
         </p:nvSpPr>
@@ -4609,7 +4608,7 @@
                 </a:solidFill>
                 <a:latin typeface="Segoe UI"/>
               </a:rPr>
-              <a:t>RTCP ACROSS LEGS</a:t>
+              <a:t>CONFERENCING</a:t>
             </a:r>
           </a:p>
         </p:txBody>
@@ -4644,7 +4643,7 @@
                 </a:solidFill>
                 <a:latin typeface="Segoe UI"/>
               </a:rPr>
-              <a:t>Keyframe (PLI/FIR) relay</a:t>
+              <a:t>Multi-party (N:N) — dynamic SDP renegotiation</a:t>
             </a:r>
           </a:p>
         </p:txBody>
@@ -4657,8 +4656,8 @@
         </p:nvSpPr>
         <p:spPr>
           <a:xfrm>
-            <a:off x="640080" y="2743200"/>
-            <a:ext cx="2468880" cy="1280160"/>
+            <a:off x="640080" y="1554480"/>
+            <a:ext cx="2286000" cy="914400"/>
           </a:xfrm>
           <a:prstGeom prst="roundRect">
             <a:avLst/>
@@ -4693,25 +4692,25 @@
           <a:p>
             <a:pPr algn="ctr"/>
             <a:r>
-              <a:rPr sz="1500" b="1">
-                <a:solidFill>
-                  <a:srgbClr val="F5F8FF"/>
-                </a:solidFill>
-                <a:latin typeface="Segoe UI"/>
-              </a:rPr>
-              <a:t>Receiver B</a:t>
+              <a:rPr sz="1400" b="1">
+                <a:solidFill>
+                  <a:srgbClr val="F5F8FF"/>
+                </a:solidFill>
+                <a:latin typeface="Segoe UI"/>
+              </a:rPr>
+              <a:t>alice joins</a:t>
             </a:r>
           </a:p>
           <a:p>
             <a:pPr algn="ctr"/>
             <a:r>
-              <a:rPr sz="1500" b="1">
-                <a:solidFill>
-                  <a:srgbClr val="F5F8FF"/>
-                </a:solidFill>
-                <a:latin typeface="Segoe UI"/>
-              </a:rPr>
-              <a:t>sends PLI</a:t>
+              <a:rPr sz="1400" b="1">
+                <a:solidFill>
+                  <a:srgbClr val="F5F8FF"/>
+                </a:solidFill>
+                <a:latin typeface="Segoe UI"/>
+              </a:rPr>
+              <a:t>offers own A+V</a:t>
             </a:r>
           </a:p>
         </p:txBody>
@@ -4724,8 +4723,75 @@
         </p:nvSpPr>
         <p:spPr>
           <a:xfrm>
-            <a:off x="4846320" y="2743200"/>
-            <a:ext cx="2468880" cy="1280160"/>
+            <a:off x="3200400" y="1554480"/>
+            <a:ext cx="2286000" cy="914400"/>
+          </a:xfrm>
+          <a:prstGeom prst="roundRect">
+            <a:avLst/>
+          </a:prstGeom>
+          <a:solidFill>
+            <a:srgbClr val="2E5C9E"/>
+          </a:solidFill>
+          <a:ln w="15875">
+            <a:solidFill>
+              <a:srgbClr val="4C9AFF"/>
+            </a:solidFill>
+          </a:ln>
+          <a:effectLst/>
+        </p:spPr>
+        <p:style>
+          <a:lnRef idx="1">
+            <a:schemeClr val="accent1"/>
+          </a:lnRef>
+          <a:fillRef idx="3">
+            <a:schemeClr val="accent1"/>
+          </a:fillRef>
+          <a:effectRef idx="2">
+            <a:schemeClr val="accent1"/>
+          </a:effectRef>
+          <a:fontRef idx="minor">
+            <a:schemeClr val="lt1"/>
+          </a:fontRef>
+        </p:style>
+        <p:txBody>
+          <a:bodyPr rtlCol="0" anchor="ctr" wrap="square" lIns="73152" rIns="73152" tIns="36576" bIns="36576"/>
+          <a:lstStyle/>
+          <a:p>
+            <a:pPr algn="ctr"/>
+            <a:r>
+              <a:rPr sz="1400" b="1">
+                <a:solidFill>
+                  <a:srgbClr val="F5F8FF"/>
+                </a:solidFill>
+                <a:latin typeface="Segoe UI"/>
+              </a:rPr>
+              <a:t>bob joins</a:t>
+            </a:r>
+          </a:p>
+          <a:p>
+            <a:pPr algn="ctr"/>
+            <a:r>
+              <a:rPr sz="1400" b="1">
+                <a:solidFill>
+                  <a:srgbClr val="F5F8FF"/>
+                </a:solidFill>
+                <a:latin typeface="Segoe UI"/>
+              </a:rPr>
+              <a:t>1:1 — no reneg</a:t>
+            </a:r>
+          </a:p>
+        </p:txBody>
+      </p:sp>
+      <p:sp>
+        <p:nvSpPr>
+          <p:cNvPr id="8" name="Rounded Rectangle 7"/>
+          <p:cNvSpPr/>
+          <p:nvPr/>
+        </p:nvSpPr>
+        <p:spPr>
+          <a:xfrm>
+            <a:off x="5760720" y="1554480"/>
+            <a:ext cx="2286000" cy="914400"/>
           </a:xfrm>
           <a:prstGeom prst="roundRect">
             <a:avLst/>
@@ -4760,49 +4826,49 @@
           <a:p>
             <a:pPr algn="ctr"/>
             <a:r>
-              <a:rPr sz="1500" b="1">
-                <a:solidFill>
-                  <a:srgbClr val="F5F8FF"/>
-                </a:solidFill>
-                <a:latin typeface="Segoe UI"/>
-              </a:rPr>
-              <a:t>SFU</a:t>
+              <a:rPr sz="1400" b="1">
+                <a:solidFill>
+                  <a:srgbClr val="F5F8FF"/>
+                </a:solidFill>
+                <a:latin typeface="Segoe UI"/>
+              </a:rPr>
+              <a:t>carol joins</a:t>
             </a:r>
           </a:p>
           <a:p>
             <a:pPr algn="ctr"/>
             <a:r>
-              <a:rPr sz="1500" b="1">
-                <a:solidFill>
-                  <a:srgbClr val="F5F8FF"/>
-                </a:solidFill>
-                <a:latin typeface="Segoe UI"/>
-              </a:rPr>
-              <a:t>map B → sender A</a:t>
-            </a:r>
-          </a:p>
-        </p:txBody>
-      </p:sp>
-      <p:sp>
-        <p:nvSpPr>
-          <p:cNvPr id="8" name="Rounded Rectangle 7"/>
+              <a:rPr sz="1400" b="1">
+                <a:solidFill>
+                  <a:srgbClr val="F5F8FF"/>
+                </a:solidFill>
+                <a:latin typeface="Segoe UI"/>
+              </a:rPr>
+              <a:t>SFU recomputes</a:t>
+            </a:r>
+          </a:p>
+        </p:txBody>
+      </p:sp>
+      <p:sp>
+        <p:nvSpPr>
+          <p:cNvPr id="9" name="Rounded Rectangle 8"/>
           <p:cNvSpPr/>
           <p:nvPr/>
         </p:nvSpPr>
         <p:spPr>
           <a:xfrm>
-            <a:off x="9052560" y="2743200"/>
-            <a:ext cx="2468880" cy="1280160"/>
+            <a:off x="8321040" y="1554480"/>
+            <a:ext cx="3200400" cy="914400"/>
           </a:xfrm>
           <a:prstGeom prst="roundRect">
             <a:avLst/>
           </a:prstGeom>
           <a:solidFill>
-            <a:srgbClr val="2E5C9E"/>
+            <a:srgbClr val="6B478F"/>
           </a:solidFill>
           <a:ln w="15875">
             <a:solidFill>
-              <a:srgbClr val="4C9AFF"/>
+              <a:srgbClr val="F2B14C"/>
             </a:solidFill>
           </a:ln>
           <a:effectLst/>
@@ -4827,46 +4893,46 @@
           <a:p>
             <a:pPr algn="ctr"/>
             <a:r>
-              <a:rPr sz="1500" b="1">
-                <a:solidFill>
-                  <a:srgbClr val="F5F8FF"/>
-                </a:solidFill>
-                <a:latin typeface="Segoe UI"/>
-              </a:rPr>
-              <a:t>Sender A</a:t>
+              <a:rPr sz="1400" b="1">
+                <a:solidFill>
+                  <a:srgbClr val="F5F8FF"/>
+                </a:solidFill>
+                <a:latin typeface="Segoe UI"/>
+              </a:rPr>
+              <a:t>all re-offer +1 slot</a:t>
             </a:r>
           </a:p>
           <a:p>
             <a:pPr algn="ctr"/>
             <a:r>
-              <a:rPr sz="1500" b="1">
-                <a:solidFill>
-                  <a:srgbClr val="F5F8FF"/>
-                </a:solidFill>
-                <a:latin typeface="Segoe UI"/>
-              </a:rPr>
-              <a:t>request_keyframe()</a:t>
+              <a:rPr sz="1400" b="1">
+                <a:solidFill>
+                  <a:srgbClr val="F5F8FF"/>
+                </a:solidFill>
+                <a:latin typeface="Segoe UI"/>
+              </a:rPr>
+              <a:t>3-way fan-out</a:t>
             </a:r>
           </a:p>
         </p:txBody>
       </p:sp>
       <p:cxnSp>
         <p:nvCxnSpPr>
-          <p:cNvPr id="9" name="Connector 8"/>
+          <p:cNvPr id="10" name="Connector 9"/>
           <p:cNvCxnSpPr/>
           <p:nvPr/>
         </p:nvCxnSpPr>
         <p:spPr>
           <a:xfrm>
-            <a:off x="3108960" y="3383280"/>
-            <a:ext cx="1737360" cy="0"/>
+            <a:off x="2926080" y="2011680"/>
+            <a:ext cx="274320" cy="0"/>
           </a:xfrm>
           <a:prstGeom prst="line">
             <a:avLst/>
           </a:prstGeom>
-          <a:ln w="31750">
+          <a:ln w="19050">
             <a:solidFill>
-              <a:srgbClr val="F2B14C"/>
+              <a:srgbClr val="A9B8D6"/>
             </a:solidFill>
             <a:tailEnd type="triangle" w="med" len="med"/>
           </a:ln>
@@ -4889,21 +4955,21 @@
       </p:cxnSp>
       <p:cxnSp>
         <p:nvCxnSpPr>
-          <p:cNvPr id="10" name="Connector 9"/>
+          <p:cNvPr id="11" name="Connector 10"/>
           <p:cNvCxnSpPr/>
           <p:nvPr/>
         </p:nvCxnSpPr>
         <p:spPr>
           <a:xfrm>
-            <a:off x="7315200" y="3383280"/>
-            <a:ext cx="1737360" cy="0"/>
+            <a:off x="5486400" y="2011680"/>
+            <a:ext cx="274320" cy="0"/>
           </a:xfrm>
           <a:prstGeom prst="line">
             <a:avLst/>
           </a:prstGeom>
-          <a:ln w="31750">
+          <a:ln w="19050">
             <a:solidFill>
-              <a:srgbClr val="F2B14C"/>
+              <a:srgbClr val="A9B8D6"/>
             </a:solidFill>
             <a:tailEnd type="triangle" w="med" len="med"/>
           </a:ln>
@@ -4924,15 +4990,52 @@
           </a:fontRef>
         </p:style>
       </p:cxnSp>
-      <p:sp>
-        <p:nvSpPr>
-          <p:cNvPr id="11" name="TextBox 10"/>
+      <p:cxnSp>
+        <p:nvCxnSpPr>
+          <p:cNvPr id="12" name="Connector 11"/>
+          <p:cNvCxnSpPr/>
+          <p:nvPr/>
+        </p:nvCxnSpPr>
+        <p:spPr>
+          <a:xfrm>
+            <a:off x="8046720" y="2011680"/>
+            <a:ext cx="274320" cy="0"/>
+          </a:xfrm>
+          <a:prstGeom prst="line">
+            <a:avLst/>
+          </a:prstGeom>
+          <a:ln w="19050">
+            <a:solidFill>
+              <a:srgbClr val="A9B8D6"/>
+            </a:solidFill>
+            <a:tailEnd type="triangle" w="med" len="med"/>
+          </a:ln>
+          <a:effectLst/>
+        </p:spPr>
+        <p:style>
+          <a:lnRef idx="2">
+            <a:schemeClr val="accent1"/>
+          </a:lnRef>
+          <a:fillRef idx="0">
+            <a:schemeClr val="accent1"/>
+          </a:fillRef>
+          <a:effectRef idx="1">
+            <a:schemeClr val="accent1"/>
+          </a:effectRef>
+          <a:fontRef idx="minor">
+            <a:schemeClr val="tx1"/>
+          </a:fontRef>
+        </p:style>
+      </p:cxnSp>
+      <p:sp>
+        <p:nvSpPr>
+          <p:cNvPr id="13" name="TextBox 12"/>
           <p:cNvSpPr txBox="1"/>
           <p:nvPr/>
         </p:nvSpPr>
         <p:spPr>
           <a:xfrm>
-            <a:off x="640080" y="4389120"/>
+            <a:off x="640080" y="2834640"/>
             <a:ext cx="10789920" cy="4572000"/>
           </a:xfrm>
           <a:prstGeom prst="rect">
@@ -4958,7 +5061,7 @@
                 </a:solidFill>
                 <a:latin typeface="Segoe UI"/>
               </a:rPr>
-              <a:t>• Because HBH SRTP terminates per leg, RTCP feedback terminates per leg too.</a:t>
+              <a:t>• No fixed transceiver pool, no maxParticipants cap — the client is always the offerer.</a:t>
             </a:r>
           </a:p>
           <a:p>
@@ -4974,7 +5077,7 @@
                 </a:solidFill>
                 <a:latin typeface="Segoe UI"/>
               </a:rPr>
-              <a:t>• On Event::KeyframeRequest the SFU maps the requester to the sending peer in the room.</a:t>
+              <a:t>• Initial offer carries only the client's own sendrecv audio+video, so 1:1 needs zero reneg.</a:t>
             </a:r>
           </a:p>
           <a:p>
@@ -4990,14 +5093,62 @@
                 </a:solidFill>
                 <a:latin typeface="Segoe UI"/>
               </a:rPr>
-              <a:t>• It calls request_keyframe(kind) on that sender's video rx stream — so a fresh keyframe flows.</a:t>
-            </a:r>
-          </a:p>
-        </p:txBody>
-      </p:sp>
-      <p:sp>
-        <p:nvSpPr>
-          <p:cNvPr id="12" name="TextBox 11"/>
+              <a:t>• On membership change the SFU computes recv_slots = participants − 1 per kind, per client.</a:t>
+            </a:r>
+          </a:p>
+          <a:p>
+            <a:pPr>
+              <a:spcAft>
+                <a:spcPts val="1152"/>
+              </a:spcAft>
+            </a:pPr>
+            <a:r>
+              <a:rPr sz="1800">
+                <a:solidFill>
+                  <a:srgbClr val="F5F8FF"/>
+                </a:solidFill>
+                <a:latin typeface="Segoe UI"/>
+              </a:rPr>
+              <a:t>• Client polls GET /signal?client_id=N; when slots grow it adds recvonly transceivers and re-offers.</a:t>
+            </a:r>
+          </a:p>
+          <a:p>
+            <a:pPr>
+              <a:spcAft>
+                <a:spcPts val="1152"/>
+              </a:spcAft>
+            </a:pPr>
+            <a:r>
+              <a:rPr sz="1800">
+                <a:solidFill>
+                  <a:srgbClr val="F5F8FF"/>
+                </a:solidFill>
+                <a:latin typeface="Segoe UI"/>
+              </a:rPr>
+              <a:t>• POST /offer is relayed into the SFU run loop (request/reply channel) so accept_offer runs on the live Rtc.</a:t>
+            </a:r>
+          </a:p>
+          <a:p>
+            <a:pPr>
+              <a:spcAft>
+                <a:spcPts val="1152"/>
+              </a:spcAft>
+            </a:pPr>
+            <a:r>
+              <a:rPr sz="1800">
+                <a:solidFill>
+                  <a:srgbClr val="F5F8FF"/>
+                </a:solidFill>
+                <a:latin typeface="Segoe UI"/>
+              </a:rPr>
+              <a:t>• assign_slot pins each origin to a distinct m-line → every remote peer renders in its own window.</a:t>
+            </a:r>
+          </a:p>
+        </p:txBody>
+      </p:sp>
+      <p:sp>
+        <p:nvSpPr>
+          <p:cNvPr id="14" name="TextBox 13"/>
           <p:cNvSpPr txBox="1"/>
           <p:nvPr/>
         </p:nvSpPr>
@@ -5032,7 +5183,7 @@
       </p:sp>
       <p:sp>
         <p:nvSpPr>
-          <p:cNvPr id="13" name="TextBox 12"/>
+          <p:cNvPr id="15" name="TextBox 14"/>
           <p:cNvSpPr txBox="1"/>
           <p:nvPr/>
         </p:nvSpPr>
@@ -5201,7 +5352,7 @@
                 </a:solidFill>
                 <a:latin typeface="Segoe UI"/>
               </a:rPr>
-              <a:t>PHASE 3</a:t>
+              <a:t>SECURITY</a:t>
             </a:r>
           </a:p>
         </p:txBody>
@@ -5236,7 +5387,7 @@
                 </a:solidFill>
                 <a:latin typeface="Segoe UI"/>
               </a:rPr>
-              <a:t>Multi-party (N:N) — dynamic SDP renegotiation</a:t>
+              <a:t>What the SFU can — and cannot — see</a:t>
             </a:r>
           </a:p>
         </p:txBody>
@@ -5249,215 +5400,14 @@
         </p:nvSpPr>
         <p:spPr>
           <a:xfrm>
-            <a:off x="640080" y="1554480"/>
-            <a:ext cx="2286000" cy="914400"/>
+            <a:off x="640080" y="1737360"/>
+            <a:ext cx="5303520" cy="3291840"/>
           </a:xfrm>
           <a:prstGeom prst="roundRect">
             <a:avLst/>
           </a:prstGeom>
           <a:solidFill>
-            <a:srgbClr val="2E5C9E"/>
-          </a:solidFill>
-          <a:ln w="15875">
-            <a:solidFill>
-              <a:srgbClr val="4C9AFF"/>
-            </a:solidFill>
-          </a:ln>
-          <a:effectLst/>
-        </p:spPr>
-        <p:style>
-          <a:lnRef idx="1">
-            <a:schemeClr val="accent1"/>
-          </a:lnRef>
-          <a:fillRef idx="3">
-            <a:schemeClr val="accent1"/>
-          </a:fillRef>
-          <a:effectRef idx="2">
-            <a:schemeClr val="accent1"/>
-          </a:effectRef>
-          <a:fontRef idx="minor">
-            <a:schemeClr val="lt1"/>
-          </a:fontRef>
-        </p:style>
-        <p:txBody>
-          <a:bodyPr rtlCol="0" anchor="ctr" wrap="square" lIns="73152" rIns="73152" tIns="36576" bIns="36576"/>
-          <a:lstStyle/>
-          <a:p>
-            <a:pPr algn="ctr"/>
-            <a:r>
-              <a:rPr sz="1400" b="1">
-                <a:solidFill>
-                  <a:srgbClr val="F5F8FF"/>
-                </a:solidFill>
-                <a:latin typeface="Segoe UI"/>
-              </a:rPr>
-              <a:t>alice joins</a:t>
-            </a:r>
-          </a:p>
-          <a:p>
-            <a:pPr algn="ctr"/>
-            <a:r>
-              <a:rPr sz="1400" b="1">
-                <a:solidFill>
-                  <a:srgbClr val="F5F8FF"/>
-                </a:solidFill>
-                <a:latin typeface="Segoe UI"/>
-              </a:rPr>
-              <a:t>offers own A+V</a:t>
-            </a:r>
-          </a:p>
-        </p:txBody>
-      </p:sp>
-      <p:sp>
-        <p:nvSpPr>
-          <p:cNvPr id="7" name="Rounded Rectangle 6"/>
-          <p:cNvSpPr/>
-          <p:nvPr/>
-        </p:nvSpPr>
-        <p:spPr>
-          <a:xfrm>
-            <a:off x="3200400" y="1554480"/>
-            <a:ext cx="2286000" cy="914400"/>
-          </a:xfrm>
-          <a:prstGeom prst="roundRect">
-            <a:avLst/>
-          </a:prstGeom>
-          <a:solidFill>
-            <a:srgbClr val="2E5C9E"/>
-          </a:solidFill>
-          <a:ln w="15875">
-            <a:solidFill>
-              <a:srgbClr val="4C9AFF"/>
-            </a:solidFill>
-          </a:ln>
-          <a:effectLst/>
-        </p:spPr>
-        <p:style>
-          <a:lnRef idx="1">
-            <a:schemeClr val="accent1"/>
-          </a:lnRef>
-          <a:fillRef idx="3">
-            <a:schemeClr val="accent1"/>
-          </a:fillRef>
-          <a:effectRef idx="2">
-            <a:schemeClr val="accent1"/>
-          </a:effectRef>
-          <a:fontRef idx="minor">
-            <a:schemeClr val="lt1"/>
-          </a:fontRef>
-        </p:style>
-        <p:txBody>
-          <a:bodyPr rtlCol="0" anchor="ctr" wrap="square" lIns="73152" rIns="73152" tIns="36576" bIns="36576"/>
-          <a:lstStyle/>
-          <a:p>
-            <a:pPr algn="ctr"/>
-            <a:r>
-              <a:rPr sz="1400" b="1">
-                <a:solidFill>
-                  <a:srgbClr val="F5F8FF"/>
-                </a:solidFill>
-                <a:latin typeface="Segoe UI"/>
-              </a:rPr>
-              <a:t>bob joins</a:t>
-            </a:r>
-          </a:p>
-          <a:p>
-            <a:pPr algn="ctr"/>
-            <a:r>
-              <a:rPr sz="1400" b="1">
-                <a:solidFill>
-                  <a:srgbClr val="F5F8FF"/>
-                </a:solidFill>
-                <a:latin typeface="Segoe UI"/>
-              </a:rPr>
-              <a:t>1:1 — no reneg</a:t>
-            </a:r>
-          </a:p>
-        </p:txBody>
-      </p:sp>
-      <p:sp>
-        <p:nvSpPr>
-          <p:cNvPr id="8" name="Rounded Rectangle 7"/>
-          <p:cNvSpPr/>
-          <p:nvPr/>
-        </p:nvSpPr>
-        <p:spPr>
-          <a:xfrm>
-            <a:off x="5760720" y="1554480"/>
-            <a:ext cx="2286000" cy="914400"/>
-          </a:xfrm>
-          <a:prstGeom prst="roundRect">
-            <a:avLst/>
-          </a:prstGeom>
-          <a:solidFill>
-            <a:srgbClr val="6B478F"/>
-          </a:solidFill>
-          <a:ln w="15875">
-            <a:solidFill>
-              <a:srgbClr val="4C9AFF"/>
-            </a:solidFill>
-          </a:ln>
-          <a:effectLst/>
-        </p:spPr>
-        <p:style>
-          <a:lnRef idx="1">
-            <a:schemeClr val="accent1"/>
-          </a:lnRef>
-          <a:fillRef idx="3">
-            <a:schemeClr val="accent1"/>
-          </a:fillRef>
-          <a:effectRef idx="2">
-            <a:schemeClr val="accent1"/>
-          </a:effectRef>
-          <a:fontRef idx="minor">
-            <a:schemeClr val="lt1"/>
-          </a:fontRef>
-        </p:style>
-        <p:txBody>
-          <a:bodyPr rtlCol="0" anchor="ctr" wrap="square" lIns="73152" rIns="73152" tIns="36576" bIns="36576"/>
-          <a:lstStyle/>
-          <a:p>
-            <a:pPr algn="ctr"/>
-            <a:r>
-              <a:rPr sz="1400" b="1">
-                <a:solidFill>
-                  <a:srgbClr val="F5F8FF"/>
-                </a:solidFill>
-                <a:latin typeface="Segoe UI"/>
-              </a:rPr>
-              <a:t>carol joins</a:t>
-            </a:r>
-          </a:p>
-          <a:p>
-            <a:pPr algn="ctr"/>
-            <a:r>
-              <a:rPr sz="1400" b="1">
-                <a:solidFill>
-                  <a:srgbClr val="F5F8FF"/>
-                </a:solidFill>
-                <a:latin typeface="Segoe UI"/>
-              </a:rPr>
-              <a:t>SFU recomputes</a:t>
-            </a:r>
-          </a:p>
-        </p:txBody>
-      </p:sp>
-      <p:sp>
-        <p:nvSpPr>
-          <p:cNvPr id="9" name="Rounded Rectangle 8"/>
-          <p:cNvSpPr/>
-          <p:nvPr/>
-        </p:nvSpPr>
-        <p:spPr>
-          <a:xfrm>
-            <a:off x="8321040" y="1554480"/>
-            <a:ext cx="3200400" cy="914400"/>
-          </a:xfrm>
-          <a:prstGeom prst="roundRect">
-            <a:avLst/>
-          </a:prstGeom>
-          <a:solidFill>
-            <a:srgbClr val="6B478F"/>
+            <a:srgbClr val="1B2A4A"/>
           </a:solidFill>
           <a:ln w="15875">
             <a:solidFill>
@@ -5484,271 +5434,204 @@
           <a:bodyPr rtlCol="0" anchor="ctr" wrap="square" lIns="73152" rIns="73152" tIns="36576" bIns="36576"/>
           <a:lstStyle/>
           <a:p>
-            <a:pPr algn="ctr"/>
-            <a:r>
-              <a:rPr sz="1400" b="1">
-                <a:solidFill>
-                  <a:srgbClr val="F5F8FF"/>
-                </a:solidFill>
-                <a:latin typeface="Segoe UI"/>
-              </a:rPr>
-              <a:t>all re-offer +1 slot</a:t>
-            </a:r>
-          </a:p>
-          <a:p>
-            <a:pPr algn="ctr"/>
-            <a:r>
-              <a:rPr sz="1400" b="1">
-                <a:solidFill>
-                  <a:srgbClr val="F5F8FF"/>
-                </a:solidFill>
-                <a:latin typeface="Segoe UI"/>
-              </a:rPr>
-              <a:t>3-way fan-out</a:t>
-            </a:r>
-          </a:p>
-        </p:txBody>
-      </p:sp>
-      <p:cxnSp>
-        <p:nvCxnSpPr>
-          <p:cNvPr id="10" name="Connector 9"/>
-          <p:cNvCxnSpPr/>
-          <p:nvPr/>
-        </p:nvCxnSpPr>
-        <p:spPr>
-          <a:xfrm>
-            <a:off x="2926080" y="2011680"/>
-            <a:ext cx="274320" cy="0"/>
-          </a:xfrm>
-          <a:prstGeom prst="line">
-            <a:avLst/>
-          </a:prstGeom>
-          <a:ln w="19050">
+            <a:pPr algn="l"/>
+            <a:r>
+              <a:rPr sz="1600" b="0">
+                <a:solidFill>
+                  <a:srgbClr val="F5F8FF"/>
+                </a:solidFill>
+                <a:latin typeface="Segoe UI"/>
+              </a:rPr>
+              <a:t>VISIBLE</a:t>
+            </a:r>
+          </a:p>
+          <a:p>
+            <a:pPr algn="l"/>
+            <a:r>
+              <a:rPr sz="1600" b="0">
+                <a:solidFill>
+                  <a:srgbClr val="F5F8FF"/>
+                </a:solidFill>
+                <a:latin typeface="Segoe UI"/>
+              </a:rPr>
+              <a:t/>
+            </a:r>
+          </a:p>
+          <a:p>
+            <a:pPr algn="l"/>
+            <a:r>
+              <a:rPr sz="1600" b="0">
+                <a:solidFill>
+                  <a:srgbClr val="F5F8FF"/>
+                </a:solidFill>
+                <a:latin typeface="Segoe UI"/>
+              </a:rPr>
+              <a:t>RTP headers (SSRC/PT/seq/ts)</a:t>
+            </a:r>
+          </a:p>
+          <a:p>
+            <a:pPr algn="l"/>
+            <a:r>
+              <a:rPr sz="1600" b="0">
+                <a:solidFill>
+                  <a:srgbClr val="F5F8FF"/>
+                </a:solidFill>
+                <a:latin typeface="Segoe UI"/>
+              </a:rPr>
+              <a:t>HBH SRTP for its own legs</a:t>
+            </a:r>
+          </a:p>
+          <a:p>
+            <a:pPr algn="l"/>
+            <a:r>
+              <a:rPr sz="1600" b="0">
+                <a:solidFill>
+                  <a:srgbClr val="F5F8FF"/>
+                </a:solidFill>
+                <a:latin typeface="Segoe UI"/>
+              </a:rPr>
+              <a:t>1-byte VP8 key/delta marker</a:t>
+            </a:r>
+          </a:p>
+          <a:p>
+            <a:pPr algn="l"/>
+            <a:r>
+              <a:rPr sz="1600" b="0">
+                <a:solidFill>
+                  <a:srgbClr val="F5F8FF"/>
+                </a:solidFill>
+                <a:latin typeface="Segoe UI"/>
+              </a:rPr>
+              <a:t>Packet sizes &amp; timing</a:t>
+            </a:r>
+          </a:p>
+        </p:txBody>
+      </p:sp>
+      <p:sp>
+        <p:nvSpPr>
+          <p:cNvPr id="7" name="Rounded Rectangle 6"/>
+          <p:cNvSpPr/>
+          <p:nvPr/>
+        </p:nvSpPr>
+        <p:spPr>
+          <a:xfrm>
+            <a:off x="6217920" y="1737360"/>
+            <a:ext cx="5303520" cy="3291840"/>
+          </a:xfrm>
+          <a:prstGeom prst="roundRect">
+            <a:avLst/>
+          </a:prstGeom>
+          <a:solidFill>
+            <a:srgbClr val="1B2A4A"/>
+          </a:solidFill>
+          <a:ln w="15875">
             <a:solidFill>
-              <a:srgbClr val="A9B8D6"/>
+              <a:srgbClr val="35D09B"/>
             </a:solidFill>
-            <a:tailEnd type="triangle" w="med" len="med"/>
           </a:ln>
           <a:effectLst/>
         </p:spPr>
         <p:style>
-          <a:lnRef idx="2">
+          <a:lnRef idx="1">
             <a:schemeClr val="accent1"/>
           </a:lnRef>
-          <a:fillRef idx="0">
+          <a:fillRef idx="3">
             <a:schemeClr val="accent1"/>
           </a:fillRef>
-          <a:effectRef idx="1">
+          <a:effectRef idx="2">
             <a:schemeClr val="accent1"/>
           </a:effectRef>
           <a:fontRef idx="minor">
-            <a:schemeClr val="tx1"/>
+            <a:schemeClr val="lt1"/>
           </a:fontRef>
         </p:style>
-      </p:cxnSp>
-      <p:cxnSp>
-        <p:nvCxnSpPr>
-          <p:cNvPr id="11" name="Connector 10"/>
-          <p:cNvCxnSpPr/>
-          <p:nvPr/>
-        </p:nvCxnSpPr>
-        <p:spPr>
-          <a:xfrm>
-            <a:off x="5486400" y="2011680"/>
-            <a:ext cx="274320" cy="0"/>
-          </a:xfrm>
-          <a:prstGeom prst="line">
-            <a:avLst/>
-          </a:prstGeom>
-          <a:ln w="19050">
-            <a:solidFill>
-              <a:srgbClr val="A9B8D6"/>
-            </a:solidFill>
-            <a:tailEnd type="triangle" w="med" len="med"/>
-          </a:ln>
-          <a:effectLst/>
-        </p:spPr>
-        <p:style>
-          <a:lnRef idx="2">
-            <a:schemeClr val="accent1"/>
-          </a:lnRef>
-          <a:fillRef idx="0">
-            <a:schemeClr val="accent1"/>
-          </a:fillRef>
-          <a:effectRef idx="1">
-            <a:schemeClr val="accent1"/>
-          </a:effectRef>
-          <a:fontRef idx="minor">
-            <a:schemeClr val="tx1"/>
-          </a:fontRef>
-        </p:style>
-      </p:cxnSp>
-      <p:cxnSp>
-        <p:nvCxnSpPr>
-          <p:cNvPr id="12" name="Connector 11"/>
-          <p:cNvCxnSpPr/>
-          <p:nvPr/>
-        </p:nvCxnSpPr>
-        <p:spPr>
-          <a:xfrm>
-            <a:off x="8046720" y="2011680"/>
-            <a:ext cx="274320" cy="0"/>
-          </a:xfrm>
-          <a:prstGeom prst="line">
-            <a:avLst/>
-          </a:prstGeom>
-          <a:ln w="19050">
-            <a:solidFill>
-              <a:srgbClr val="A9B8D6"/>
-            </a:solidFill>
-            <a:tailEnd type="triangle" w="med" len="med"/>
-          </a:ln>
-          <a:effectLst/>
-        </p:spPr>
-        <p:style>
-          <a:lnRef idx="2">
-            <a:schemeClr val="accent1"/>
-          </a:lnRef>
-          <a:fillRef idx="0">
-            <a:schemeClr val="accent1"/>
-          </a:fillRef>
-          <a:effectRef idx="1">
-            <a:schemeClr val="accent1"/>
-          </a:effectRef>
-          <a:fontRef idx="minor">
-            <a:schemeClr val="tx1"/>
-          </a:fontRef>
-        </p:style>
-      </p:cxnSp>
-      <p:sp>
-        <p:nvSpPr>
-          <p:cNvPr id="13" name="TextBox 12"/>
+        <p:txBody>
+          <a:bodyPr rtlCol="0" anchor="ctr" wrap="square" lIns="73152" rIns="73152" tIns="36576" bIns="36576"/>
+          <a:lstStyle/>
+          <a:p>
+            <a:pPr algn="l"/>
+            <a:r>
+              <a:rPr sz="1600" b="0">
+                <a:solidFill>
+                  <a:srgbClr val="F5F8FF"/>
+                </a:solidFill>
+                <a:latin typeface="Segoe UI"/>
+              </a:rPr>
+              <a:t>HIDDEN</a:t>
+            </a:r>
+          </a:p>
+          <a:p>
+            <a:pPr algn="l"/>
+            <a:r>
+              <a:rPr sz="1600" b="0">
+                <a:solidFill>
+                  <a:srgbClr val="F5F8FF"/>
+                </a:solidFill>
+                <a:latin typeface="Segoe UI"/>
+              </a:rPr>
+              <a:t/>
+            </a:r>
+          </a:p>
+          <a:p>
+            <a:pPr algn="l"/>
+            <a:r>
+              <a:rPr sz="1600" b="0">
+                <a:solidFill>
+                  <a:srgbClr val="F5F8FF"/>
+                </a:solidFill>
+                <a:latin typeface="Segoe UI"/>
+              </a:rPr>
+              <a:t>E2E media payload (inner GCM)</a:t>
+            </a:r>
+          </a:p>
+          <a:p>
+            <a:pPr algn="l"/>
+            <a:r>
+              <a:rPr sz="1600" b="0">
+                <a:solidFill>
+                  <a:srgbClr val="F5F8FF"/>
+                </a:solidFill>
+                <a:latin typeface="Segoe UI"/>
+              </a:rPr>
+              <a:t>The E2E key (KD + clients only)</a:t>
+            </a:r>
+          </a:p>
+          <a:p>
+            <a:pPr algn="l"/>
+            <a:r>
+              <a:rPr sz="1600" b="0">
+                <a:solidFill>
+                  <a:srgbClr val="F5F8FF"/>
+                </a:solidFill>
+                <a:latin typeface="Segoe UI"/>
+              </a:rPr>
+              <a:t>Decoded media / codec bitstream</a:t>
+            </a:r>
+          </a:p>
+          <a:p>
+            <a:pPr algn="l"/>
+            <a:r>
+              <a:rPr sz="1600" b="0">
+                <a:solidFill>
+                  <a:srgbClr val="F5F8FF"/>
+                </a:solidFill>
+                <a:latin typeface="Segoe UI"/>
+              </a:rPr>
+              <a:t>Inner header extensions</a:t>
+            </a:r>
+          </a:p>
+        </p:txBody>
+      </p:sp>
+      <p:sp>
+        <p:nvSpPr>
+          <p:cNvPr id="8" name="TextBox 7"/>
           <p:cNvSpPr txBox="1"/>
           <p:nvPr/>
         </p:nvSpPr>
         <p:spPr>
           <a:xfrm>
-            <a:off x="640080" y="2834640"/>
-            <a:ext cx="10789920" cy="4572000"/>
-          </a:xfrm>
-          <a:prstGeom prst="rect">
-            <a:avLst/>
-          </a:prstGeom>
-          <a:noFill/>
-        </p:spPr>
-        <p:txBody>
-          <a:bodyPr wrap="square">
-            <a:spAutoFit/>
-          </a:bodyPr>
-          <a:lstStyle/>
-          <a:p>
-            <a:pPr>
-              <a:spcAft>
-                <a:spcPts val="1152"/>
-              </a:spcAft>
-            </a:pPr>
-            <a:r>
-              <a:rPr sz="1800">
-                <a:solidFill>
-                  <a:srgbClr val="F5F8FF"/>
-                </a:solidFill>
-                <a:latin typeface="Segoe UI"/>
-              </a:rPr>
-              <a:t>• No fixed transceiver pool, no maxParticipants cap — the client is always the offerer.</a:t>
-            </a:r>
-          </a:p>
-          <a:p>
-            <a:pPr>
-              <a:spcAft>
-                <a:spcPts val="1152"/>
-              </a:spcAft>
-            </a:pPr>
-            <a:r>
-              <a:rPr sz="1800">
-                <a:solidFill>
-                  <a:srgbClr val="F5F8FF"/>
-                </a:solidFill>
-                <a:latin typeface="Segoe UI"/>
-              </a:rPr>
-              <a:t>• Initial offer carries only the client's own sendrecv audio+video, so 1:1 needs zero reneg.</a:t>
-            </a:r>
-          </a:p>
-          <a:p>
-            <a:pPr>
-              <a:spcAft>
-                <a:spcPts val="1152"/>
-              </a:spcAft>
-            </a:pPr>
-            <a:r>
-              <a:rPr sz="1800">
-                <a:solidFill>
-                  <a:srgbClr val="F5F8FF"/>
-                </a:solidFill>
-                <a:latin typeface="Segoe UI"/>
-              </a:rPr>
-              <a:t>• On membership change the SFU computes recv_slots = participants − 1 per kind, per client.</a:t>
-            </a:r>
-          </a:p>
-          <a:p>
-            <a:pPr>
-              <a:spcAft>
-                <a:spcPts val="1152"/>
-              </a:spcAft>
-            </a:pPr>
-            <a:r>
-              <a:rPr sz="1800">
-                <a:solidFill>
-                  <a:srgbClr val="F5F8FF"/>
-                </a:solidFill>
-                <a:latin typeface="Segoe UI"/>
-              </a:rPr>
-              <a:t>• Client polls GET /signal?client_id=N; when slots grow it adds recvonly transceivers and re-offers.</a:t>
-            </a:r>
-          </a:p>
-          <a:p>
-            <a:pPr>
-              <a:spcAft>
-                <a:spcPts val="1152"/>
-              </a:spcAft>
-            </a:pPr>
-            <a:r>
-              <a:rPr sz="1800">
-                <a:solidFill>
-                  <a:srgbClr val="F5F8FF"/>
-                </a:solidFill>
-                <a:latin typeface="Segoe UI"/>
-              </a:rPr>
-              <a:t>• POST /offer is relayed into the SFU run loop (request/reply channel) so accept_offer runs on the live Rtc.</a:t>
-            </a:r>
-          </a:p>
-          <a:p>
-            <a:pPr>
-              <a:spcAft>
-                <a:spcPts val="1152"/>
-              </a:spcAft>
-            </a:pPr>
-            <a:r>
-              <a:rPr sz="1800">
-                <a:solidFill>
-                  <a:srgbClr val="F5F8FF"/>
-                </a:solidFill>
-                <a:latin typeface="Segoe UI"/>
-              </a:rPr>
-              <a:t>• assign_slot pins each origin to a distinct m-line → every remote peer renders in its own window.</a:t>
-            </a:r>
-          </a:p>
-        </p:txBody>
-      </p:sp>
-      <p:sp>
-        <p:nvSpPr>
-          <p:cNvPr id="14" name="TextBox 13"/>
-          <p:cNvSpPr txBox="1"/>
-          <p:nvPr/>
-        </p:nvSpPr>
-        <p:spPr>
-          <a:xfrm>
-            <a:off x="548640" y="6446520"/>
-            <a:ext cx="7315200" cy="320040"/>
+            <a:off x="640080" y="5303520"/>
+            <a:ext cx="10881360" cy="640080"/>
           </a:xfrm>
           <a:prstGeom prst="rect">
             <a:avLst/>
@@ -5761,6 +5644,41 @@
           </a:bodyPr>
           <a:lstStyle/>
           <a:p>
+            <a:pPr algn="ctr"/>
+            <a:r>
+              <a:rPr sz="1500" b="0">
+                <a:solidFill>
+                  <a:srgbClr val="A9B8D6"/>
+                </a:solidFill>
+                <a:latin typeface="Segoe UI"/>
+              </a:rPr>
+              <a:t>Server compromise leaks routing metadata only — never the media content.</a:t>
+            </a:r>
+          </a:p>
+        </p:txBody>
+      </p:sp>
+      <p:sp>
+        <p:nvSpPr>
+          <p:cNvPr id="9" name="TextBox 8"/>
+          <p:cNvSpPr txBox="1"/>
+          <p:nvPr/>
+        </p:nvSpPr>
+        <p:spPr>
+          <a:xfrm>
+            <a:off x="548640" y="6446520"/>
+            <a:ext cx="7315200" cy="320040"/>
+          </a:xfrm>
+          <a:prstGeom prst="rect">
+            <a:avLst/>
+          </a:prstGeom>
+          <a:noFill/>
+        </p:spPr>
+        <p:txBody>
+          <a:bodyPr wrap="square" anchor="t">
+            <a:spAutoFit/>
+          </a:bodyPr>
+          <a:lstStyle/>
+          <a:p>
             <a:pPr algn="l"/>
             <a:r>
               <a:rPr sz="1000" b="0">
@@ -5776,7 +5694,7 @@
       </p:sp>
       <p:sp>
         <p:nvSpPr>
-          <p:cNvPr id="15" name="TextBox 14"/>
+          <p:cNvPr id="10" name="TextBox 9"/>
           <p:cNvSpPr txBox="1"/>
           <p:nvPr/>
         </p:nvSpPr>
@@ -5945,7 +5863,7 @@
                 </a:solidFill>
                 <a:latin typeface="Segoe UI"/>
               </a:rPr>
-              <a:t>SECURITY</a:t>
+              <a:t>OPERATIONS</a:t>
             </a:r>
           </a:p>
         </p:txBody>
@@ -5980,7 +5898,7 @@
                 </a:solidFill>
                 <a:latin typeface="Segoe UI"/>
               </a:rPr>
-              <a:t>What the SFU can — and cannot — see</a:t>
+              <a:t>Unified configuration system</a:t>
             </a:r>
           </a:p>
         </p:txBody>
@@ -5993,8 +5911,8 @@
         </p:nvSpPr>
         <p:spPr>
           <a:xfrm>
-            <a:off x="640080" y="1737360"/>
-            <a:ext cx="5303520" cy="3291840"/>
+            <a:off x="640080" y="1645920"/>
+            <a:ext cx="3291840" cy="1005840"/>
           </a:xfrm>
           <a:prstGeom prst="roundRect">
             <a:avLst/>
@@ -6004,7 +5922,7 @@
           </a:solidFill>
           <a:ln w="15875">
             <a:solidFill>
-              <a:srgbClr val="F2B14C"/>
+              <a:srgbClr val="4C9AFF"/>
             </a:solidFill>
           </a:ln>
           <a:effectLst/>
@@ -6027,75 +5945,27 @@
           <a:bodyPr rtlCol="0" anchor="ctr" wrap="square" lIns="73152" rIns="73152" tIns="36576" bIns="36576"/>
           <a:lstStyle/>
           <a:p>
-            <a:pPr algn="l"/>
-            <a:r>
-              <a:rPr sz="1600" b="0">
-                <a:solidFill>
-                  <a:srgbClr val="F5F8FF"/>
-                </a:solidFill>
-                <a:latin typeface="Segoe UI"/>
-              </a:rPr>
-              <a:t>VISIBLE</a:t>
-            </a:r>
-          </a:p>
-          <a:p>
-            <a:pPr algn="l"/>
-            <a:r>
-              <a:rPr sz="1600" b="0">
-                <a:solidFill>
-                  <a:srgbClr val="F5F8FF"/>
-                </a:solidFill>
-                <a:latin typeface="Segoe UI"/>
-              </a:rPr>
-              <a:t/>
-            </a:r>
-          </a:p>
-          <a:p>
-            <a:pPr algn="l"/>
-            <a:r>
-              <a:rPr sz="1600" b="0">
-                <a:solidFill>
-                  <a:srgbClr val="F5F8FF"/>
-                </a:solidFill>
-                <a:latin typeface="Segoe UI"/>
-              </a:rPr>
-              <a:t>RTP headers (SSRC/PT/seq/ts)</a:t>
-            </a:r>
-          </a:p>
-          <a:p>
-            <a:pPr algn="l"/>
-            <a:r>
-              <a:rPr sz="1600" b="0">
-                <a:solidFill>
-                  <a:srgbClr val="F5F8FF"/>
-                </a:solidFill>
-                <a:latin typeface="Segoe UI"/>
-              </a:rPr>
-              <a:t>HBH SRTP for its own legs</a:t>
-            </a:r>
-          </a:p>
-          <a:p>
-            <a:pPr algn="l"/>
-            <a:r>
-              <a:rPr sz="1600" b="0">
-                <a:solidFill>
-                  <a:srgbClr val="F5F8FF"/>
-                </a:solidFill>
-                <a:latin typeface="Segoe UI"/>
-              </a:rPr>
-              <a:t>1-byte VP8 key/delta marker</a:t>
-            </a:r>
-          </a:p>
-          <a:p>
-            <a:pPr algn="l"/>
-            <a:r>
-              <a:rPr sz="1600" b="0">
-                <a:solidFill>
-                  <a:srgbClr val="F5F8FF"/>
-                </a:solidFill>
-                <a:latin typeface="Segoe UI"/>
-              </a:rPr>
-              <a:t>Packet sizes &amp; timing</a:t>
+            <a:pPr algn="ctr"/>
+            <a:r>
+              <a:rPr sz="1400" b="1">
+                <a:solidFill>
+                  <a:srgbClr val="F5F8FF"/>
+                </a:solidFill>
+                <a:latin typeface="Segoe UI"/>
+              </a:rPr>
+              <a:t>config.json (JSONC)</a:t>
+            </a:r>
+          </a:p>
+          <a:p>
+            <a:pPr algn="ctr"/>
+            <a:r>
+              <a:rPr sz="1400" b="1">
+                <a:solidFill>
+                  <a:srgbClr val="F5F8FF"/>
+                </a:solidFill>
+                <a:latin typeface="Segoe UI"/>
+              </a:rPr>
+              <a:t>sectioned OR flat</a:t>
             </a:r>
           </a:p>
         </p:txBody>
@@ -6108,8 +5978,113 @@
         </p:nvSpPr>
         <p:spPr>
           <a:xfrm>
-            <a:off x="6217920" y="1737360"/>
-            <a:ext cx="5303520" cy="3291840"/>
+            <a:off x="4206240" y="1645920"/>
+            <a:ext cx="2286000" cy="1005840"/>
+          </a:xfrm>
+          <a:prstGeom prst="roundRect">
+            <a:avLst/>
+          </a:prstGeom>
+          <a:solidFill>
+            <a:srgbClr val="1B2A4A"/>
+          </a:solidFill>
+          <a:ln w="15875">
+            <a:solidFill>
+              <a:srgbClr val="4C9AFF"/>
+            </a:solidFill>
+          </a:ln>
+          <a:effectLst/>
+        </p:spPr>
+        <p:style>
+          <a:lnRef idx="1">
+            <a:schemeClr val="accent1"/>
+          </a:lnRef>
+          <a:fillRef idx="3">
+            <a:schemeClr val="accent1"/>
+          </a:fillRef>
+          <a:effectRef idx="2">
+            <a:schemeClr val="accent1"/>
+          </a:effectRef>
+          <a:fontRef idx="minor">
+            <a:schemeClr val="lt1"/>
+          </a:fontRef>
+        </p:style>
+        <p:txBody>
+          <a:bodyPr rtlCol="0" anchor="ctr" wrap="square" lIns="73152" rIns="73152" tIns="36576" bIns="36576"/>
+          <a:lstStyle/>
+          <a:p>
+            <a:pPr algn="ctr"/>
+            <a:r>
+              <a:rPr sz="1300" b="0">
+                <a:solidFill>
+                  <a:srgbClr val="F5F8FF"/>
+                </a:solidFill>
+                <a:latin typeface="Segoe UI"/>
+              </a:rPr>
+              <a:t>sfu</a:t>
+            </a:r>
+          </a:p>
+          <a:p>
+            <a:pPr algn="ctr"/>
+            <a:r>
+              <a:rPr sz="1300" b="0">
+                <a:solidFill>
+                  <a:srgbClr val="F5F8FF"/>
+                </a:solidFill>
+                <a:latin typeface="Segoe UI"/>
+              </a:rPr>
+              <a:t>+ shared
+logging/stats/diag</a:t>
+            </a:r>
+          </a:p>
+        </p:txBody>
+      </p:sp>
+      <p:cxnSp>
+        <p:nvCxnSpPr>
+          <p:cNvPr id="8" name="Connector 7"/>
+          <p:cNvCxnSpPr/>
+          <p:nvPr/>
+        </p:nvCxnSpPr>
+        <p:spPr>
+          <a:xfrm>
+            <a:off x="3931920" y="2148840"/>
+            <a:ext cx="274320" cy="0"/>
+          </a:xfrm>
+          <a:prstGeom prst="line">
+            <a:avLst/>
+          </a:prstGeom>
+          <a:ln w="19050">
+            <a:solidFill>
+              <a:srgbClr val="A9B8D6"/>
+            </a:solidFill>
+            <a:tailEnd type="triangle" w="med" len="med"/>
+          </a:ln>
+          <a:effectLst/>
+        </p:spPr>
+        <p:style>
+          <a:lnRef idx="2">
+            <a:schemeClr val="accent1"/>
+          </a:lnRef>
+          <a:fillRef idx="0">
+            <a:schemeClr val="accent1"/>
+          </a:fillRef>
+          <a:effectRef idx="1">
+            <a:schemeClr val="accent1"/>
+          </a:effectRef>
+          <a:fontRef idx="minor">
+            <a:schemeClr val="tx1"/>
+          </a:fontRef>
+        </p:style>
+      </p:cxnSp>
+      <p:sp>
+        <p:nvSpPr>
+          <p:cNvPr id="9" name="Rounded Rectangle 8"/>
+          <p:cNvSpPr/>
+          <p:nvPr/>
+        </p:nvSpPr>
+        <p:spPr>
+          <a:xfrm>
+            <a:off x="6675120" y="1645920"/>
+            <a:ext cx="2286000" cy="1005840"/>
           </a:xfrm>
           <a:prstGeom prst="roundRect">
             <a:avLst/>
@@ -6142,89 +6117,303 @@
           <a:bodyPr rtlCol="0" anchor="ctr" wrap="square" lIns="73152" rIns="73152" tIns="36576" bIns="36576"/>
           <a:lstStyle/>
           <a:p>
-            <a:pPr algn="l"/>
-            <a:r>
-              <a:rPr sz="1600" b="0">
-                <a:solidFill>
-                  <a:srgbClr val="F5F8FF"/>
-                </a:solidFill>
-                <a:latin typeface="Segoe UI"/>
-              </a:rPr>
-              <a:t>HIDDEN</a:t>
-            </a:r>
-          </a:p>
-          <a:p>
-            <a:pPr algn="l"/>
-            <a:r>
-              <a:rPr sz="1600" b="0">
-                <a:solidFill>
-                  <a:srgbClr val="F5F8FF"/>
-                </a:solidFill>
-                <a:latin typeface="Segoe UI"/>
-              </a:rPr>
-              <a:t/>
-            </a:r>
-          </a:p>
-          <a:p>
-            <a:pPr algn="l"/>
-            <a:r>
-              <a:rPr sz="1600" b="0">
-                <a:solidFill>
-                  <a:srgbClr val="F5F8FF"/>
-                </a:solidFill>
-                <a:latin typeface="Segoe UI"/>
-              </a:rPr>
-              <a:t>E2E media payload (inner GCM)</a:t>
-            </a:r>
-          </a:p>
-          <a:p>
-            <a:pPr algn="l"/>
-            <a:r>
-              <a:rPr sz="1600" b="0">
-                <a:solidFill>
-                  <a:srgbClr val="F5F8FF"/>
-                </a:solidFill>
-                <a:latin typeface="Segoe UI"/>
-              </a:rPr>
-              <a:t>The E2E key (KD + clients only)</a:t>
-            </a:r>
-          </a:p>
-          <a:p>
-            <a:pPr algn="l"/>
-            <a:r>
-              <a:rPr sz="1600" b="0">
-                <a:solidFill>
-                  <a:srgbClr val="F5F8FF"/>
-                </a:solidFill>
-                <a:latin typeface="Segoe UI"/>
-              </a:rPr>
-              <a:t>Decoded media / codec bitstream</a:t>
-            </a:r>
-          </a:p>
-          <a:p>
-            <a:pPr algn="l"/>
-            <a:r>
-              <a:rPr sz="1600" b="0">
-                <a:solidFill>
-                  <a:srgbClr val="F5F8FF"/>
-                </a:solidFill>
-                <a:latin typeface="Segoe UI"/>
-              </a:rPr>
-              <a:t>Inner header extensions</a:t>
-            </a:r>
-          </a:p>
-        </p:txBody>
-      </p:sp>
-      <p:sp>
-        <p:nvSpPr>
-          <p:cNvPr id="8" name="TextBox 7"/>
+            <a:pPr algn="ctr"/>
+            <a:r>
+              <a:rPr sz="1300" b="0">
+                <a:solidFill>
+                  <a:srgbClr val="F5F8FF"/>
+                </a:solidFill>
+                <a:latin typeface="Segoe UI"/>
+              </a:rPr>
+              <a:t>keyDistributor</a:t>
+            </a:r>
+          </a:p>
+          <a:p>
+            <a:pPr algn="ctr"/>
+            <a:r>
+              <a:rPr sz="1300" b="0">
+                <a:solidFill>
+                  <a:srgbClr val="F5F8FF"/>
+                </a:solidFill>
+                <a:latin typeface="Segoe UI"/>
+              </a:rPr>
+              <a:t>+ shared
+logging/stats/diag</a:t>
+            </a:r>
+          </a:p>
+        </p:txBody>
+      </p:sp>
+      <p:cxnSp>
+        <p:nvCxnSpPr>
+          <p:cNvPr id="10" name="Connector 9"/>
+          <p:cNvCxnSpPr/>
+          <p:nvPr/>
+        </p:nvCxnSpPr>
+        <p:spPr>
+          <a:xfrm>
+            <a:off x="3931920" y="2148840"/>
+            <a:ext cx="2743200" cy="0"/>
+          </a:xfrm>
+          <a:prstGeom prst="line">
+            <a:avLst/>
+          </a:prstGeom>
+          <a:ln w="19050">
+            <a:solidFill>
+              <a:srgbClr val="A9B8D6"/>
+            </a:solidFill>
+            <a:tailEnd type="triangle" w="med" len="med"/>
+          </a:ln>
+          <a:effectLst/>
+        </p:spPr>
+        <p:style>
+          <a:lnRef idx="2">
+            <a:schemeClr val="accent1"/>
+          </a:lnRef>
+          <a:fillRef idx="0">
+            <a:schemeClr val="accent1"/>
+          </a:fillRef>
+          <a:effectRef idx="1">
+            <a:schemeClr val="accent1"/>
+          </a:effectRef>
+          <a:fontRef idx="minor">
+            <a:schemeClr val="tx1"/>
+          </a:fontRef>
+        </p:style>
+      </p:cxnSp>
+      <p:sp>
+        <p:nvSpPr>
+          <p:cNvPr id="11" name="Rounded Rectangle 10"/>
+          <p:cNvSpPr/>
+          <p:nvPr/>
+        </p:nvSpPr>
+        <p:spPr>
+          <a:xfrm>
+            <a:off x="9144000" y="1645920"/>
+            <a:ext cx="2286000" cy="1005840"/>
+          </a:xfrm>
+          <a:prstGeom prst="roundRect">
+            <a:avLst/>
+          </a:prstGeom>
+          <a:solidFill>
+            <a:srgbClr val="1B2A4A"/>
+          </a:solidFill>
+          <a:ln w="15875">
+            <a:solidFill>
+              <a:srgbClr val="2E5C9E"/>
+            </a:solidFill>
+          </a:ln>
+          <a:effectLst/>
+        </p:spPr>
+        <p:style>
+          <a:lnRef idx="1">
+            <a:schemeClr val="accent1"/>
+          </a:lnRef>
+          <a:fillRef idx="3">
+            <a:schemeClr val="accent1"/>
+          </a:fillRef>
+          <a:effectRef idx="2">
+            <a:schemeClr val="accent1"/>
+          </a:effectRef>
+          <a:fontRef idx="minor">
+            <a:schemeClr val="lt1"/>
+          </a:fontRef>
+        </p:style>
+        <p:txBody>
+          <a:bodyPr rtlCol="0" anchor="ctr" wrap="square" lIns="73152" rIns="73152" tIns="36576" bIns="36576"/>
+          <a:lstStyle/>
+          <a:p>
+            <a:pPr algn="ctr"/>
+            <a:r>
+              <a:rPr sz="1300" b="0">
+                <a:solidFill>
+                  <a:srgbClr val="F5F8FF"/>
+                </a:solidFill>
+                <a:latin typeface="Segoe UI"/>
+              </a:rPr>
+              <a:t>client</a:t>
+            </a:r>
+          </a:p>
+          <a:p>
+            <a:pPr algn="ctr"/>
+            <a:r>
+              <a:rPr sz="1300" b="0">
+                <a:solidFill>
+                  <a:srgbClr val="F5F8FF"/>
+                </a:solidFill>
+                <a:latin typeface="Segoe UI"/>
+              </a:rPr>
+              <a:t>+ shared
+logging/stats/diag</a:t>
+            </a:r>
+          </a:p>
+        </p:txBody>
+      </p:sp>
+      <p:cxnSp>
+        <p:nvCxnSpPr>
+          <p:cNvPr id="12" name="Connector 11"/>
+          <p:cNvCxnSpPr/>
+          <p:nvPr/>
+        </p:nvCxnSpPr>
+        <p:spPr>
+          <a:xfrm>
+            <a:off x="3931920" y="2148840"/>
+            <a:ext cx="5212080" cy="0"/>
+          </a:xfrm>
+          <a:prstGeom prst="line">
+            <a:avLst/>
+          </a:prstGeom>
+          <a:ln w="19050">
+            <a:solidFill>
+              <a:srgbClr val="A9B8D6"/>
+            </a:solidFill>
+            <a:tailEnd type="triangle" w="med" len="med"/>
+          </a:ln>
+          <a:effectLst/>
+        </p:spPr>
+        <p:style>
+          <a:lnRef idx="2">
+            <a:schemeClr val="accent1"/>
+          </a:lnRef>
+          <a:fillRef idx="0">
+            <a:schemeClr val="accent1"/>
+          </a:fillRef>
+          <a:effectRef idx="1">
+            <a:schemeClr val="accent1"/>
+          </a:effectRef>
+          <a:fontRef idx="minor">
+            <a:schemeClr val="tx1"/>
+          </a:fontRef>
+        </p:style>
+      </p:cxnSp>
+      <p:sp>
+        <p:nvSpPr>
+          <p:cNvPr id="13" name="TextBox 12"/>
           <p:cNvSpPr txBox="1"/>
           <p:nvPr/>
         </p:nvSpPr>
         <p:spPr>
           <a:xfrm>
-            <a:off x="640080" y="5303520"/>
-            <a:ext cx="10881360" cy="640080"/>
+            <a:off x="640080" y="3017520"/>
+            <a:ext cx="10789920" cy="4572000"/>
+          </a:xfrm>
+          <a:prstGeom prst="rect">
+            <a:avLst/>
+          </a:prstGeom>
+          <a:noFill/>
+        </p:spPr>
+        <p:txBody>
+          <a:bodyPr wrap="square">
+            <a:spAutoFit/>
+          </a:bodyPr>
+          <a:lstStyle/>
+          <a:p>
+            <a:pPr>
+              <a:spcAft>
+                <a:spcPts val="1152"/>
+              </a:spcAft>
+            </a:pPr>
+            <a:r>
+              <a:rPr sz="1800">
+                <a:solidFill>
+                  <a:srgbClr val="F5F8FF"/>
+                </a:solidFill>
+                <a:latin typeface="Segoe UI"/>
+              </a:rPr>
+              <a:t>• Resolution: --config (repeatable, deep-merge) → E2EE_CONFIG env → ./config.json.</a:t>
+            </a:r>
+          </a:p>
+          <a:p>
+            <a:pPr>
+              <a:spcAft>
+                <a:spcPts val="1152"/>
+              </a:spcAft>
+            </a:pPr>
+            <a:r>
+              <a:rPr sz="1800">
+                <a:solidFill>
+                  <a:srgbClr val="F5F8FF"/>
+                </a:solidFill>
+                <a:latin typeface="Segoe UI"/>
+              </a:rPr>
+              <a:t>• Same loader handles one combined file or per-host flat files; JSONC + trailing commas.</a:t>
+            </a:r>
+          </a:p>
+          <a:p>
+            <a:pPr>
+              <a:spcAft>
+                <a:spcPts val="1152"/>
+              </a:spcAft>
+            </a:pPr>
+            <a:r>
+              <a:rPr sz="1800">
+                <a:solidFill>
+                  <a:srgbClr val="F5F8FF"/>
+                </a:solidFill>
+                <a:latin typeface="Segoe UI"/>
+              </a:rPr>
+              <a:t>• Node apps share config-loader.js; str0m uses a matching loader in examples/util.</a:t>
+            </a:r>
+          </a:p>
+          <a:p>
+            <a:pPr>
+              <a:spcAft>
+                <a:spcPts val="1152"/>
+              </a:spcAft>
+            </a:pPr>
+            <a:r>
+              <a:rPr sz="1800">
+                <a:solidFill>
+                  <a:srgbClr val="F5F8FF"/>
+                </a:solidFill>
+                <a:latin typeface="Segoe UI"/>
+              </a:rPr>
+              <a:t>• Client pushes media params to native via env vars (width/height/fps/bitrate/codec).</a:t>
+            </a:r>
+          </a:p>
+          <a:p>
+            <a:pPr>
+              <a:spcAft>
+                <a:spcPts val="1152"/>
+              </a:spcAft>
+            </a:pPr>
+            <a:r>
+              <a:rPr sz="1800">
+                <a:solidFill>
+                  <a:srgbClr val="F5F8FF"/>
+                </a:solidFill>
+                <a:latin typeface="Segoe UI"/>
+              </a:rPr>
+              <a:t>• Toggles: log-to-file, periodic stats, wire log, per-frame E2E diagnostics.</a:t>
+            </a:r>
+          </a:p>
+          <a:p>
+            <a:pPr>
+              <a:spcAft>
+                <a:spcPts val="1152"/>
+              </a:spcAft>
+            </a:pPr>
+            <a:r>
+              <a:rPr sz="1800">
+                <a:solidFill>
+                  <a:srgbClr val="F5F8FF"/>
+                </a:solidFill>
+                <a:latin typeface="Segoe UI"/>
+              </a:rPr>
+              <a:t>• run-all.ps1 launches SFU + KD + N clients (default alice/bob/carol) against the shared config.</a:t>
+            </a:r>
+          </a:p>
+        </p:txBody>
+      </p:sp>
+      <p:sp>
+        <p:nvSpPr>
+          <p:cNvPr id="14" name="TextBox 13"/>
+          <p:cNvSpPr txBox="1"/>
+          <p:nvPr/>
+        </p:nvSpPr>
+        <p:spPr>
+          <a:xfrm>
+            <a:off x="548640" y="6446520"/>
+            <a:ext cx="7315200" cy="320040"/>
           </a:xfrm>
           <a:prstGeom prst="rect">
             <a:avLst/>
@@ -6237,49 +6426,14 @@
           </a:bodyPr>
           <a:lstStyle/>
           <a:p>
-            <a:pPr algn="ctr"/>
-            <a:r>
-              <a:rPr sz="1500" b="0">
+            <a:pPr algn="l"/>
+            <a:r>
+              <a:rPr sz="1000" b="0">
                 <a:solidFill>
                   <a:srgbClr val="A9B8D6"/>
                 </a:solidFill>
                 <a:latin typeface="Segoe UI"/>
               </a:rPr>
-              <a:t>Server compromise leaks routing metadata only — never the media content.</a:t>
-            </a:r>
-          </a:p>
-        </p:txBody>
-      </p:sp>
-      <p:sp>
-        <p:nvSpPr>
-          <p:cNvPr id="9" name="TextBox 8"/>
-          <p:cNvSpPr txBox="1"/>
-          <p:nvPr/>
-        </p:nvSpPr>
-        <p:spPr>
-          <a:xfrm>
-            <a:off x="548640" y="6446520"/>
-            <a:ext cx="7315200" cy="320040"/>
-          </a:xfrm>
-          <a:prstGeom prst="rect">
-            <a:avLst/>
-          </a:prstGeom>
-          <a:noFill/>
-        </p:spPr>
-        <p:txBody>
-          <a:bodyPr wrap="square" anchor="t">
-            <a:spAutoFit/>
-          </a:bodyPr>
-          <a:lstStyle/>
-          <a:p>
-            <a:pPr algn="l"/>
-            <a:r>
-              <a:rPr sz="1000" b="0">
-                <a:solidFill>
-                  <a:srgbClr val="A9B8D6"/>
-                </a:solidFill>
-                <a:latin typeface="Segoe UI"/>
-              </a:rPr>
               <a:t>E2EE WebRTC — Zero-Trust SFU (str0m + PERC)</a:t>
             </a:r>
           </a:p>
@@ -6287,7 +6441,7 @@
       </p:sp>
       <p:sp>
         <p:nvSpPr>
-          <p:cNvPr id="10" name="TextBox 9"/>
+          <p:cNvPr id="15" name="TextBox 14"/>
           <p:cNvSpPr txBox="1"/>
           <p:nvPr/>
         </p:nvSpPr>
@@ -6456,7 +6610,7 @@
                 </a:solidFill>
                 <a:latin typeface="Segoe UI"/>
               </a:rPr>
-              <a:t>OPERATIONS</a:t>
+              <a:t>ROADMAP</a:t>
             </a:r>
           </a:p>
         </p:txBody>
@@ -6491,7 +6645,7 @@
                 </a:solidFill>
                 <a:latin typeface="Segoe UI"/>
               </a:rPr>
-              <a:t>Unified configuration system</a:t>
+              <a:t>Done &amp; what's next</a:t>
             </a:r>
           </a:p>
         </p:txBody>
@@ -6504,8 +6658,147 @@
         </p:nvSpPr>
         <p:spPr>
           <a:xfrm>
-            <a:off x="640080" y="1645920"/>
-            <a:ext cx="3291840" cy="1005840"/>
+            <a:off x="640080" y="1737360"/>
+            <a:ext cx="5303520" cy="3108960"/>
+          </a:xfrm>
+          <a:prstGeom prst="roundRect">
+            <a:avLst/>
+          </a:prstGeom>
+          <a:solidFill>
+            <a:srgbClr val="1B2A4A"/>
+          </a:solidFill>
+          <a:ln w="15875">
+            <a:solidFill>
+              <a:srgbClr val="35D09B"/>
+            </a:solidFill>
+          </a:ln>
+          <a:effectLst/>
+        </p:spPr>
+        <p:style>
+          <a:lnRef idx="1">
+            <a:schemeClr val="accent1"/>
+          </a:lnRef>
+          <a:fillRef idx="3">
+            <a:schemeClr val="accent1"/>
+          </a:fillRef>
+          <a:effectRef idx="2">
+            <a:schemeClr val="accent1"/>
+          </a:effectRef>
+          <a:fontRef idx="minor">
+            <a:schemeClr val="lt1"/>
+          </a:fontRef>
+        </p:style>
+        <p:txBody>
+          <a:bodyPr rtlCol="0" anchor="ctr" wrap="square" lIns="73152" rIns="73152" tIns="36576" bIns="36576"/>
+          <a:lstStyle/>
+          <a:p>
+            <a:pPr algn="l"/>
+            <a:r>
+              <a:rPr sz="1500" b="0">
+                <a:solidFill>
+                  <a:srgbClr val="F5F8FF"/>
+                </a:solidFill>
+                <a:latin typeface="Segoe UI"/>
+              </a:rPr>
+              <a:t>COMPLETED ✅</a:t>
+            </a:r>
+          </a:p>
+          <a:p>
+            <a:pPr algn="l"/>
+            <a:r>
+              <a:rPr sz="1500" b="0">
+                <a:solidFill>
+                  <a:srgbClr val="F5F8FF"/>
+                </a:solidFill>
+                <a:latin typeface="Segoe UI"/>
+              </a:rPr>
+              <a:t/>
+            </a:r>
+          </a:p>
+          <a:p>
+            <a:pPr algn="l"/>
+            <a:r>
+              <a:rPr sz="1500" b="0">
+                <a:solidFill>
+                  <a:srgbClr val="F5F8FF"/>
+                </a:solidFill>
+                <a:latin typeface="Segoe UI"/>
+              </a:rPr>
+              <a:t>Key Distributor service</a:t>
+            </a:r>
+          </a:p>
+          <a:p>
+            <a:pPr algn="l"/>
+            <a:r>
+              <a:rPr sz="1500" b="0">
+                <a:solidFill>
+                  <a:srgbClr val="F5F8FF"/>
+                </a:solidFill>
+                <a:latin typeface="Segoe UI"/>
+              </a:rPr>
+              <a:t>Frame-level AES-128-GCM E2E</a:t>
+            </a:r>
+          </a:p>
+          <a:p>
+            <a:pPr algn="l"/>
+            <a:r>
+              <a:rPr sz="1500" b="0">
+                <a:solidFill>
+                  <a:srgbClr val="F5F8FF"/>
+                </a:solidFill>
+                <a:latin typeface="Segoe UI"/>
+              </a:rPr>
+              <a:t>PERC-capable native client</a:t>
+            </a:r>
+          </a:p>
+          <a:p>
+            <a:pPr algn="l"/>
+            <a:r>
+              <a:rPr sz="1500" b="0">
+                <a:solidFill>
+                  <a:srgbClr val="F5F8FF"/>
+                </a:solidFill>
+                <a:latin typeface="Segoe UI"/>
+              </a:rPr>
+              <a:t>VP8 keyframe marker · PLI/FIR relay</a:t>
+            </a:r>
+          </a:p>
+          <a:p>
+            <a:pPr algn="l"/>
+            <a:r>
+              <a:rPr sz="1500" b="0">
+                <a:solidFill>
+                  <a:srgbClr val="F5F8FF"/>
+                </a:solidFill>
+                <a:latin typeface="Segoe UI"/>
+              </a:rPr>
+              <a:t>Multi-party N:N (dynamic reneg)</a:t>
+            </a:r>
+          </a:p>
+          <a:p>
+            <a:pPr algn="l"/>
+            <a:r>
+              <a:rPr sz="1500" b="0">
+                <a:solidFill>
+                  <a:srgbClr val="F5F8FF"/>
+                </a:solidFill>
+                <a:latin typeface="Segoe UI"/>
+              </a:rPr>
+              <a:t>Unified config + launcher</a:t>
+            </a:r>
+          </a:p>
+        </p:txBody>
+      </p:sp>
+      <p:sp>
+        <p:nvSpPr>
+          <p:cNvPr id="7" name="Rounded Rectangle 6"/>
+          <p:cNvSpPr/>
+          <p:nvPr/>
+        </p:nvSpPr>
+        <p:spPr>
+          <a:xfrm>
+            <a:off x="6217920" y="1737360"/>
+            <a:ext cx="5303520" cy="3108960"/>
           </a:xfrm>
           <a:prstGeom prst="roundRect">
             <a:avLst/>
@@ -6538,468 +6831,106 @@
           <a:bodyPr rtlCol="0" anchor="ctr" wrap="square" lIns="73152" rIns="73152" tIns="36576" bIns="36576"/>
           <a:lstStyle/>
           <a:p>
-            <a:pPr algn="ctr"/>
-            <a:r>
-              <a:rPr sz="1400" b="1">
-                <a:solidFill>
-                  <a:srgbClr val="F5F8FF"/>
-                </a:solidFill>
-                <a:latin typeface="Segoe UI"/>
-              </a:rPr>
-              <a:t>config.json (JSONC)</a:t>
-            </a:r>
-          </a:p>
-          <a:p>
-            <a:pPr algn="ctr"/>
-            <a:r>
-              <a:rPr sz="1400" b="1">
-                <a:solidFill>
-                  <a:srgbClr val="F5F8FF"/>
-                </a:solidFill>
-                <a:latin typeface="Segoe UI"/>
-              </a:rPr>
-              <a:t>sectioned OR flat</a:t>
-            </a:r>
-          </a:p>
-        </p:txBody>
-      </p:sp>
-      <p:sp>
-        <p:nvSpPr>
-          <p:cNvPr id="7" name="Rounded Rectangle 6"/>
-          <p:cNvSpPr/>
-          <p:nvPr/>
-        </p:nvSpPr>
-        <p:spPr>
-          <a:xfrm>
-            <a:off x="4206240" y="1645920"/>
-            <a:ext cx="2286000" cy="1005840"/>
-          </a:xfrm>
-          <a:prstGeom prst="roundRect">
-            <a:avLst/>
-          </a:prstGeom>
-          <a:solidFill>
-            <a:srgbClr val="1B2A4A"/>
-          </a:solidFill>
-          <a:ln w="15875">
-            <a:solidFill>
-              <a:srgbClr val="4C9AFF"/>
-            </a:solidFill>
-          </a:ln>
-          <a:effectLst/>
-        </p:spPr>
-        <p:style>
-          <a:lnRef idx="1">
-            <a:schemeClr val="accent1"/>
-          </a:lnRef>
-          <a:fillRef idx="3">
-            <a:schemeClr val="accent1"/>
-          </a:fillRef>
-          <a:effectRef idx="2">
-            <a:schemeClr val="accent1"/>
-          </a:effectRef>
-          <a:fontRef idx="minor">
-            <a:schemeClr val="lt1"/>
-          </a:fontRef>
-        </p:style>
-        <p:txBody>
-          <a:bodyPr rtlCol="0" anchor="ctr" wrap="square" lIns="73152" rIns="73152" tIns="36576" bIns="36576"/>
-          <a:lstStyle/>
-          <a:p>
-            <a:pPr algn="ctr"/>
-            <a:r>
-              <a:rPr sz="1300" b="0">
-                <a:solidFill>
-                  <a:srgbClr val="F5F8FF"/>
-                </a:solidFill>
-                <a:latin typeface="Segoe UI"/>
-              </a:rPr>
-              <a:t>sfu</a:t>
-            </a:r>
-          </a:p>
-          <a:p>
-            <a:pPr algn="ctr"/>
-            <a:r>
-              <a:rPr sz="1300" b="0">
-                <a:solidFill>
-                  <a:srgbClr val="F5F8FF"/>
-                </a:solidFill>
-                <a:latin typeface="Segoe UI"/>
-              </a:rPr>
-              <a:t>+ shared
-logging/stats/diag</a:t>
-            </a:r>
-          </a:p>
-        </p:txBody>
-      </p:sp>
-      <p:cxnSp>
-        <p:nvCxnSpPr>
-          <p:cNvPr id="8" name="Connector 7"/>
-          <p:cNvCxnSpPr/>
-          <p:nvPr/>
-        </p:nvCxnSpPr>
-        <p:spPr>
-          <a:xfrm>
-            <a:off x="3931920" y="2148840"/>
-            <a:ext cx="274320" cy="0"/>
-          </a:xfrm>
-          <a:prstGeom prst="line">
-            <a:avLst/>
-          </a:prstGeom>
-          <a:ln w="19050">
-            <a:solidFill>
-              <a:srgbClr val="A9B8D6"/>
-            </a:solidFill>
-            <a:tailEnd type="triangle" w="med" len="med"/>
-          </a:ln>
-          <a:effectLst/>
-        </p:spPr>
-        <p:style>
-          <a:lnRef idx="2">
-            <a:schemeClr val="accent1"/>
-          </a:lnRef>
-          <a:fillRef idx="0">
-            <a:schemeClr val="accent1"/>
-          </a:fillRef>
-          <a:effectRef idx="1">
-            <a:schemeClr val="accent1"/>
-          </a:effectRef>
-          <a:fontRef idx="minor">
-            <a:schemeClr val="tx1"/>
-          </a:fontRef>
-        </p:style>
-      </p:cxnSp>
-      <p:sp>
-        <p:nvSpPr>
-          <p:cNvPr id="9" name="Rounded Rectangle 8"/>
-          <p:cNvSpPr/>
-          <p:nvPr/>
-        </p:nvSpPr>
-        <p:spPr>
-          <a:xfrm>
-            <a:off x="6675120" y="1645920"/>
-            <a:ext cx="2286000" cy="1005840"/>
-          </a:xfrm>
-          <a:prstGeom prst="roundRect">
-            <a:avLst/>
-          </a:prstGeom>
-          <a:solidFill>
-            <a:srgbClr val="1B2A4A"/>
-          </a:solidFill>
-          <a:ln w="15875">
-            <a:solidFill>
-              <a:srgbClr val="35D09B"/>
-            </a:solidFill>
-          </a:ln>
-          <a:effectLst/>
-        </p:spPr>
-        <p:style>
-          <a:lnRef idx="1">
-            <a:schemeClr val="accent1"/>
-          </a:lnRef>
-          <a:fillRef idx="3">
-            <a:schemeClr val="accent1"/>
-          </a:fillRef>
-          <a:effectRef idx="2">
-            <a:schemeClr val="accent1"/>
-          </a:effectRef>
-          <a:fontRef idx="minor">
-            <a:schemeClr val="lt1"/>
-          </a:fontRef>
-        </p:style>
-        <p:txBody>
-          <a:bodyPr rtlCol="0" anchor="ctr" wrap="square" lIns="73152" rIns="73152" tIns="36576" bIns="36576"/>
-          <a:lstStyle/>
-          <a:p>
-            <a:pPr algn="ctr"/>
-            <a:r>
-              <a:rPr sz="1300" b="0">
-                <a:solidFill>
-                  <a:srgbClr val="F5F8FF"/>
-                </a:solidFill>
-                <a:latin typeface="Segoe UI"/>
-              </a:rPr>
-              <a:t>keyDistributor</a:t>
-            </a:r>
-          </a:p>
-          <a:p>
-            <a:pPr algn="ctr"/>
-            <a:r>
-              <a:rPr sz="1300" b="0">
-                <a:solidFill>
-                  <a:srgbClr val="F5F8FF"/>
-                </a:solidFill>
-                <a:latin typeface="Segoe UI"/>
-              </a:rPr>
-              <a:t>+ shared
-logging/stats/diag</a:t>
-            </a:r>
-          </a:p>
-        </p:txBody>
-      </p:sp>
-      <p:cxnSp>
-        <p:nvCxnSpPr>
-          <p:cNvPr id="10" name="Connector 9"/>
-          <p:cNvCxnSpPr/>
-          <p:nvPr/>
-        </p:nvCxnSpPr>
-        <p:spPr>
-          <a:xfrm>
-            <a:off x="3931920" y="2148840"/>
-            <a:ext cx="2743200" cy="0"/>
-          </a:xfrm>
-          <a:prstGeom prst="line">
-            <a:avLst/>
-          </a:prstGeom>
-          <a:ln w="19050">
-            <a:solidFill>
-              <a:srgbClr val="A9B8D6"/>
-            </a:solidFill>
-            <a:tailEnd type="triangle" w="med" len="med"/>
-          </a:ln>
-          <a:effectLst/>
-        </p:spPr>
-        <p:style>
-          <a:lnRef idx="2">
-            <a:schemeClr val="accent1"/>
-          </a:lnRef>
-          <a:fillRef idx="0">
-            <a:schemeClr val="accent1"/>
-          </a:fillRef>
-          <a:effectRef idx="1">
-            <a:schemeClr val="accent1"/>
-          </a:effectRef>
-          <a:fontRef idx="minor">
-            <a:schemeClr val="tx1"/>
-          </a:fontRef>
-        </p:style>
-      </p:cxnSp>
-      <p:sp>
-        <p:nvSpPr>
-          <p:cNvPr id="11" name="Rounded Rectangle 10"/>
-          <p:cNvSpPr/>
-          <p:nvPr/>
-        </p:nvSpPr>
-        <p:spPr>
-          <a:xfrm>
-            <a:off x="9144000" y="1645920"/>
-            <a:ext cx="2286000" cy="1005840"/>
-          </a:xfrm>
-          <a:prstGeom prst="roundRect">
-            <a:avLst/>
-          </a:prstGeom>
-          <a:solidFill>
-            <a:srgbClr val="1B2A4A"/>
-          </a:solidFill>
-          <a:ln w="15875">
-            <a:solidFill>
-              <a:srgbClr val="2E5C9E"/>
-            </a:solidFill>
-          </a:ln>
-          <a:effectLst/>
-        </p:spPr>
-        <p:style>
-          <a:lnRef idx="1">
-            <a:schemeClr val="accent1"/>
-          </a:lnRef>
-          <a:fillRef idx="3">
-            <a:schemeClr val="accent1"/>
-          </a:fillRef>
-          <a:effectRef idx="2">
-            <a:schemeClr val="accent1"/>
-          </a:effectRef>
-          <a:fontRef idx="minor">
-            <a:schemeClr val="lt1"/>
-          </a:fontRef>
-        </p:style>
-        <p:txBody>
-          <a:bodyPr rtlCol="0" anchor="ctr" wrap="square" lIns="73152" rIns="73152" tIns="36576" bIns="36576"/>
-          <a:lstStyle/>
-          <a:p>
-            <a:pPr algn="ctr"/>
-            <a:r>
-              <a:rPr sz="1300" b="0">
-                <a:solidFill>
-                  <a:srgbClr val="F5F8FF"/>
-                </a:solidFill>
-                <a:latin typeface="Segoe UI"/>
-              </a:rPr>
-              <a:t>client</a:t>
-            </a:r>
-          </a:p>
-          <a:p>
-            <a:pPr algn="ctr"/>
-            <a:r>
-              <a:rPr sz="1300" b="0">
-                <a:solidFill>
-                  <a:srgbClr val="F5F8FF"/>
-                </a:solidFill>
-                <a:latin typeface="Segoe UI"/>
-              </a:rPr>
-              <a:t>+ shared
-logging/stats/diag</a:t>
-            </a:r>
-          </a:p>
-        </p:txBody>
-      </p:sp>
-      <p:cxnSp>
-        <p:nvCxnSpPr>
-          <p:cNvPr id="12" name="Connector 11"/>
-          <p:cNvCxnSpPr/>
-          <p:nvPr/>
-        </p:nvCxnSpPr>
-        <p:spPr>
-          <a:xfrm>
-            <a:off x="3931920" y="2148840"/>
-            <a:ext cx="5212080" cy="0"/>
-          </a:xfrm>
-          <a:prstGeom prst="line">
-            <a:avLst/>
-          </a:prstGeom>
-          <a:ln w="19050">
-            <a:solidFill>
-              <a:srgbClr val="A9B8D6"/>
-            </a:solidFill>
-            <a:tailEnd type="triangle" w="med" len="med"/>
-          </a:ln>
-          <a:effectLst/>
-        </p:spPr>
-        <p:style>
-          <a:lnRef idx="2">
-            <a:schemeClr val="accent1"/>
-          </a:lnRef>
-          <a:fillRef idx="0">
-            <a:schemeClr val="accent1"/>
-          </a:fillRef>
-          <a:effectRef idx="1">
-            <a:schemeClr val="accent1"/>
-          </a:effectRef>
-          <a:fontRef idx="minor">
-            <a:schemeClr val="tx1"/>
-          </a:fontRef>
-        </p:style>
-      </p:cxnSp>
-      <p:sp>
-        <p:nvSpPr>
-          <p:cNvPr id="13" name="TextBox 12"/>
-          <p:cNvSpPr txBox="1"/>
-          <p:nvPr/>
-        </p:nvSpPr>
-        <p:spPr>
-          <a:xfrm>
-            <a:off x="640080" y="3017520"/>
-            <a:ext cx="10789920" cy="4572000"/>
-          </a:xfrm>
-          <a:prstGeom prst="rect">
-            <a:avLst/>
-          </a:prstGeom>
-          <a:noFill/>
-        </p:spPr>
-        <p:txBody>
-          <a:bodyPr wrap="square">
-            <a:spAutoFit/>
-          </a:bodyPr>
-          <a:lstStyle/>
-          <a:p>
-            <a:pPr>
-              <a:spcAft>
-                <a:spcPts val="1152"/>
-              </a:spcAft>
-            </a:pPr>
-            <a:r>
-              <a:rPr sz="1800">
-                <a:solidFill>
-                  <a:srgbClr val="F5F8FF"/>
-                </a:solidFill>
-                <a:latin typeface="Segoe UI"/>
-              </a:rPr>
-              <a:t>• Resolution: --config (repeatable, deep-merge) → E2EE_CONFIG env → ./config.json.</a:t>
-            </a:r>
-          </a:p>
-          <a:p>
-            <a:pPr>
-              <a:spcAft>
-                <a:spcPts val="1152"/>
-              </a:spcAft>
-            </a:pPr>
-            <a:r>
-              <a:rPr sz="1800">
-                <a:solidFill>
-                  <a:srgbClr val="F5F8FF"/>
-                </a:solidFill>
-                <a:latin typeface="Segoe UI"/>
-              </a:rPr>
-              <a:t>• Same loader handles one combined file or per-host flat files; JSONC + trailing commas.</a:t>
-            </a:r>
-          </a:p>
-          <a:p>
-            <a:pPr>
-              <a:spcAft>
-                <a:spcPts val="1152"/>
-              </a:spcAft>
-            </a:pPr>
-            <a:r>
-              <a:rPr sz="1800">
-                <a:solidFill>
-                  <a:srgbClr val="F5F8FF"/>
-                </a:solidFill>
-                <a:latin typeface="Segoe UI"/>
-              </a:rPr>
-              <a:t>• Node apps share config-loader.js; str0m uses a matching loader in examples/util.</a:t>
-            </a:r>
-          </a:p>
-          <a:p>
-            <a:pPr>
-              <a:spcAft>
-                <a:spcPts val="1152"/>
-              </a:spcAft>
-            </a:pPr>
-            <a:r>
-              <a:rPr sz="1800">
-                <a:solidFill>
-                  <a:srgbClr val="F5F8FF"/>
-                </a:solidFill>
-                <a:latin typeface="Segoe UI"/>
-              </a:rPr>
-              <a:t>• Client pushes media params to native via env vars (width/height/fps/bitrate/codec).</a:t>
-            </a:r>
-          </a:p>
-          <a:p>
-            <a:pPr>
-              <a:spcAft>
-                <a:spcPts val="1152"/>
-              </a:spcAft>
-            </a:pPr>
-            <a:r>
-              <a:rPr sz="1800">
-                <a:solidFill>
-                  <a:srgbClr val="F5F8FF"/>
-                </a:solidFill>
-                <a:latin typeface="Segoe UI"/>
-              </a:rPr>
-              <a:t>• Toggles: log-to-file, periodic stats, wire log, per-frame E2E diagnostics.</a:t>
-            </a:r>
-          </a:p>
-          <a:p>
-            <a:pPr>
-              <a:spcAft>
-                <a:spcPts val="1152"/>
-              </a:spcAft>
-            </a:pPr>
-            <a:r>
-              <a:rPr sz="1800">
-                <a:solidFill>
-                  <a:srgbClr val="F5F8FF"/>
-                </a:solidFill>
-                <a:latin typeface="Segoe UI"/>
-              </a:rPr>
-              <a:t>• run-all.ps1 launches SFU + KD + N clients (default alice/bob/carol) against the shared config.</a:t>
-            </a:r>
-          </a:p>
-        </p:txBody>
-      </p:sp>
-      <p:sp>
-        <p:nvSpPr>
-          <p:cNvPr id="14" name="TextBox 13"/>
+            <a:pPr algn="l"/>
+            <a:r>
+              <a:rPr sz="1500" b="0">
+                <a:solidFill>
+                  <a:srgbClr val="F5F8FF"/>
+                </a:solidFill>
+                <a:latin typeface="Segoe UI"/>
+              </a:rPr>
+              <a:t>NEXT</a:t>
+            </a:r>
+          </a:p>
+          <a:p>
+            <a:pPr algn="l"/>
+            <a:r>
+              <a:rPr sz="1500" b="0">
+                <a:solidFill>
+                  <a:srgbClr val="F5F8FF"/>
+                </a:solidFill>
+                <a:latin typeface="Segoe UI"/>
+              </a:rPr>
+              <a:t/>
+            </a:r>
+          </a:p>
+          <a:p>
+            <a:pPr algn="l"/>
+            <a:r>
+              <a:rPr sz="1500" b="0">
+                <a:solidFill>
+                  <a:srgbClr val="F5F8FF"/>
+                </a:solidFill>
+                <a:latin typeface="Segoe UI"/>
+              </a:rPr>
+              <a:t>RFC 8723 at the SRTP layer</a:t>
+            </a:r>
+          </a:p>
+          <a:p>
+            <a:pPr algn="l"/>
+            <a:r>
+              <a:rPr sz="1500" b="0">
+                <a:solidFill>
+                  <a:srgbClr val="F5F8FF"/>
+                </a:solidFill>
+                <a:latin typeface="Segoe UI"/>
+              </a:rPr>
+              <a:t>EKT (RFC 8870) key transport</a:t>
+            </a:r>
+          </a:p>
+          <a:p>
+            <a:pPr algn="l"/>
+            <a:r>
+              <a:rPr sz="1500" b="0">
+                <a:solidFill>
+                  <a:srgbClr val="F5F8FF"/>
+                </a:solidFill>
+                <a:latin typeface="Segoe UI"/>
+              </a:rPr>
+              <a:t>Certificate pinning to identity</a:t>
+            </a:r>
+          </a:p>
+          <a:p>
+            <a:pPr algn="l"/>
+            <a:r>
+              <a:rPr sz="1500" b="0">
+                <a:solidFill>
+                  <a:srgbClr val="F5F8FF"/>
+                </a:solidFill>
+                <a:latin typeface="Segoe UI"/>
+              </a:rPr>
+              <a:t>Encrypted headers (Cryptex)</a:t>
+            </a:r>
+          </a:p>
+          <a:p>
+            <a:pPr algn="l"/>
+            <a:r>
+              <a:rPr sz="1500" b="0">
+                <a:solidFill>
+                  <a:srgbClr val="F5F8FF"/>
+                </a:solidFill>
+                <a:latin typeface="Segoe UI"/>
+              </a:rPr>
+              <a:t>MLS group key agreement</a:t>
+            </a:r>
+          </a:p>
+          <a:p>
+            <a:pPr algn="l"/>
+            <a:r>
+              <a:rPr sz="1500" b="0">
+                <a:solidFill>
+                  <a:srgbClr val="F5F8FF"/>
+                </a:solidFill>
+                <a:latin typeface="Segoe UI"/>
+              </a:rPr>
+              <a:t>Simulcast / layer selection</a:t>
+            </a:r>
+          </a:p>
+        </p:txBody>
+      </p:sp>
+      <p:sp>
+        <p:nvSpPr>
+          <p:cNvPr id="8" name="TextBox 7"/>
           <p:cNvSpPr txBox="1"/>
           <p:nvPr/>
         </p:nvSpPr>
@@ -7034,7 +6965,7 @@
       </p:sp>
       <p:sp>
         <p:nvSpPr>
-          <p:cNvPr id="15" name="TextBox 14"/>
+          <p:cNvPr id="9" name="TextBox 8"/>
           <p:cNvSpPr txBox="1"/>
           <p:nvPr/>
         </p:nvSpPr>
@@ -7063,530 +6994,6 @@
                 <a:latin typeface="Segoe UI"/>
               </a:rPr>
               <a:t>14</a:t>
-            </a:r>
-          </a:p>
-        </p:txBody>
-      </p:sp>
-    </p:spTree>
-  </p:cSld>
-  <p:clrMapOvr>
-    <a:masterClrMapping/>
-  </p:clrMapOvr>
-</p:sld>
-</file>
-
-<file path=ppt/slides/slide16.xml><?xml version="1.0" encoding="utf-8"?>
-<p:sld xmlns:a="http://schemas.openxmlformats.org/drawingml/2006/main" xmlns:p="http://schemas.openxmlformats.org/presentationml/2006/main" xmlns:r="http://schemas.openxmlformats.org/officeDocument/2006/relationships">
-  <p:cSld>
-    <p:spTree>
-      <p:nvGrpSpPr>
-        <p:cNvPr id="1" name=""/>
-        <p:cNvGrpSpPr/>
-        <p:nvPr/>
-      </p:nvGrpSpPr>
-      <p:grpSpPr/>
-      <p:sp>
-        <p:nvSpPr>
-          <p:cNvPr id="2" name="Rectangle 1"/>
-          <p:cNvSpPr/>
-          <p:nvPr/>
-        </p:nvSpPr>
-        <p:spPr>
-          <a:xfrm>
-            <a:off x="0" y="0"/>
-            <a:ext cx="12191695" cy="6858000"/>
-          </a:xfrm>
-          <a:prstGeom prst="rect">
-            <a:avLst/>
-          </a:prstGeom>
-          <a:solidFill>
-            <a:srgbClr val="0F172A"/>
-          </a:solidFill>
-          <a:ln>
-            <a:noFill/>
-          </a:ln>
-          <a:effectLst/>
-        </p:spPr>
-        <p:style>
-          <a:lnRef idx="1">
-            <a:schemeClr val="accent1"/>
-          </a:lnRef>
-          <a:fillRef idx="3">
-            <a:schemeClr val="accent1"/>
-          </a:fillRef>
-          <a:effectRef idx="2">
-            <a:schemeClr val="accent1"/>
-          </a:effectRef>
-          <a:fontRef idx="minor">
-            <a:schemeClr val="lt1"/>
-          </a:fontRef>
-        </p:style>
-        <p:txBody>
-          <a:bodyPr rtlCol="0" anchor="ctr"/>
-          <a:lstStyle/>
-          <a:p>
-            <a:pPr algn="ctr"/>
-          </a:p>
-        </p:txBody>
-      </p:sp>
-      <p:sp>
-        <p:nvSpPr>
-          <p:cNvPr id="3" name="Rectangle 2"/>
-          <p:cNvSpPr/>
-          <p:nvPr/>
-        </p:nvSpPr>
-        <p:spPr>
-          <a:xfrm>
-            <a:off x="0" y="0"/>
-            <a:ext cx="12191695" cy="146304"/>
-          </a:xfrm>
-          <a:prstGeom prst="rect">
-            <a:avLst/>
-          </a:prstGeom>
-          <a:solidFill>
-            <a:srgbClr val="4C9AFF"/>
-          </a:solidFill>
-          <a:ln>
-            <a:noFill/>
-          </a:ln>
-          <a:effectLst/>
-        </p:spPr>
-        <p:style>
-          <a:lnRef idx="1">
-            <a:schemeClr val="accent1"/>
-          </a:lnRef>
-          <a:fillRef idx="3">
-            <a:schemeClr val="accent1"/>
-          </a:fillRef>
-          <a:effectRef idx="2">
-            <a:schemeClr val="accent1"/>
-          </a:effectRef>
-          <a:fontRef idx="minor">
-            <a:schemeClr val="lt1"/>
-          </a:fontRef>
-        </p:style>
-        <p:txBody>
-          <a:bodyPr rtlCol="0" anchor="ctr"/>
-          <a:lstStyle/>
-          <a:p>
-            <a:pPr algn="ctr"/>
-          </a:p>
-        </p:txBody>
-      </p:sp>
-      <p:sp>
-        <p:nvSpPr>
-          <p:cNvPr id="4" name="TextBox 3"/>
-          <p:cNvSpPr txBox="1"/>
-          <p:nvPr/>
-        </p:nvSpPr>
-        <p:spPr>
-          <a:xfrm>
-            <a:off x="548640" y="274320"/>
-            <a:ext cx="10058400" cy="365760"/>
-          </a:xfrm>
-          <a:prstGeom prst="rect">
-            <a:avLst/>
-          </a:prstGeom>
-          <a:noFill/>
-        </p:spPr>
-        <p:txBody>
-          <a:bodyPr wrap="square" anchor="t">
-            <a:spAutoFit/>
-          </a:bodyPr>
-          <a:lstStyle/>
-          <a:p>
-            <a:pPr algn="l"/>
-            <a:r>
-              <a:rPr sz="1300" b="1">
-                <a:solidFill>
-                  <a:srgbClr val="35D09B"/>
-                </a:solidFill>
-                <a:latin typeface="Segoe UI"/>
-              </a:rPr>
-              <a:t>ROADMAP</a:t>
-            </a:r>
-          </a:p>
-        </p:txBody>
-      </p:sp>
-      <p:sp>
-        <p:nvSpPr>
-          <p:cNvPr id="5" name="TextBox 4"/>
-          <p:cNvSpPr txBox="1"/>
-          <p:nvPr/>
-        </p:nvSpPr>
-        <p:spPr>
-          <a:xfrm>
-            <a:off x="548640" y="566928"/>
-            <a:ext cx="11064240" cy="822960"/>
-          </a:xfrm>
-          <a:prstGeom prst="rect">
-            <a:avLst/>
-          </a:prstGeom>
-          <a:noFill/>
-        </p:spPr>
-        <p:txBody>
-          <a:bodyPr wrap="square" anchor="t">
-            <a:spAutoFit/>
-          </a:bodyPr>
-          <a:lstStyle/>
-          <a:p>
-            <a:pPr algn="l"/>
-            <a:r>
-              <a:rPr sz="3000" b="1">
-                <a:solidFill>
-                  <a:srgbClr val="F5F8FF"/>
-                </a:solidFill>
-                <a:latin typeface="Segoe UI"/>
-              </a:rPr>
-              <a:t>Done &amp; what's next</a:t>
-            </a:r>
-          </a:p>
-        </p:txBody>
-      </p:sp>
-      <p:sp>
-        <p:nvSpPr>
-          <p:cNvPr id="6" name="Rounded Rectangle 5"/>
-          <p:cNvSpPr/>
-          <p:nvPr/>
-        </p:nvSpPr>
-        <p:spPr>
-          <a:xfrm>
-            <a:off x="640080" y="1737360"/>
-            <a:ext cx="5303520" cy="3108960"/>
-          </a:xfrm>
-          <a:prstGeom prst="roundRect">
-            <a:avLst/>
-          </a:prstGeom>
-          <a:solidFill>
-            <a:srgbClr val="1B2A4A"/>
-          </a:solidFill>
-          <a:ln w="15875">
-            <a:solidFill>
-              <a:srgbClr val="35D09B"/>
-            </a:solidFill>
-          </a:ln>
-          <a:effectLst/>
-        </p:spPr>
-        <p:style>
-          <a:lnRef idx="1">
-            <a:schemeClr val="accent1"/>
-          </a:lnRef>
-          <a:fillRef idx="3">
-            <a:schemeClr val="accent1"/>
-          </a:fillRef>
-          <a:effectRef idx="2">
-            <a:schemeClr val="accent1"/>
-          </a:effectRef>
-          <a:fontRef idx="minor">
-            <a:schemeClr val="lt1"/>
-          </a:fontRef>
-        </p:style>
-        <p:txBody>
-          <a:bodyPr rtlCol="0" anchor="ctr" wrap="square" lIns="73152" rIns="73152" tIns="36576" bIns="36576"/>
-          <a:lstStyle/>
-          <a:p>
-            <a:pPr algn="l"/>
-            <a:r>
-              <a:rPr sz="1500" b="0">
-                <a:solidFill>
-                  <a:srgbClr val="F5F8FF"/>
-                </a:solidFill>
-                <a:latin typeface="Segoe UI"/>
-              </a:rPr>
-              <a:t>COMPLETED ✅</a:t>
-            </a:r>
-          </a:p>
-          <a:p>
-            <a:pPr algn="l"/>
-            <a:r>
-              <a:rPr sz="1500" b="0">
-                <a:solidFill>
-                  <a:srgbClr val="F5F8FF"/>
-                </a:solidFill>
-                <a:latin typeface="Segoe UI"/>
-              </a:rPr>
-              <a:t/>
-            </a:r>
-          </a:p>
-          <a:p>
-            <a:pPr algn="l"/>
-            <a:r>
-              <a:rPr sz="1500" b="0">
-                <a:solidFill>
-                  <a:srgbClr val="F5F8FF"/>
-                </a:solidFill>
-                <a:latin typeface="Segoe UI"/>
-              </a:rPr>
-              <a:t>Key Distributor service</a:t>
-            </a:r>
-          </a:p>
-          <a:p>
-            <a:pPr algn="l"/>
-            <a:r>
-              <a:rPr sz="1500" b="0">
-                <a:solidFill>
-                  <a:srgbClr val="F5F8FF"/>
-                </a:solidFill>
-                <a:latin typeface="Segoe UI"/>
-              </a:rPr>
-              <a:t>Frame-level AES-128-GCM E2E</a:t>
-            </a:r>
-          </a:p>
-          <a:p>
-            <a:pPr algn="l"/>
-            <a:r>
-              <a:rPr sz="1500" b="0">
-                <a:solidFill>
-                  <a:srgbClr val="F5F8FF"/>
-                </a:solidFill>
-                <a:latin typeface="Segoe UI"/>
-              </a:rPr>
-              <a:t>PERC-capable native client</a:t>
-            </a:r>
-          </a:p>
-          <a:p>
-            <a:pPr algn="l"/>
-            <a:r>
-              <a:rPr sz="1500" b="0">
-                <a:solidFill>
-                  <a:srgbClr val="F5F8FF"/>
-                </a:solidFill>
-                <a:latin typeface="Segoe UI"/>
-              </a:rPr>
-              <a:t>VP8 keyframe marker · PLI/FIR relay</a:t>
-            </a:r>
-          </a:p>
-          <a:p>
-            <a:pPr algn="l"/>
-            <a:r>
-              <a:rPr sz="1500" b="0">
-                <a:solidFill>
-                  <a:srgbClr val="F5F8FF"/>
-                </a:solidFill>
-                <a:latin typeface="Segoe UI"/>
-              </a:rPr>
-              <a:t>Multi-party N:N (dynamic reneg)</a:t>
-            </a:r>
-          </a:p>
-          <a:p>
-            <a:pPr algn="l"/>
-            <a:r>
-              <a:rPr sz="1500" b="0">
-                <a:solidFill>
-                  <a:srgbClr val="F5F8FF"/>
-                </a:solidFill>
-                <a:latin typeface="Segoe UI"/>
-              </a:rPr>
-              <a:t>Unified config + launcher</a:t>
-            </a:r>
-          </a:p>
-        </p:txBody>
-      </p:sp>
-      <p:sp>
-        <p:nvSpPr>
-          <p:cNvPr id="7" name="Rounded Rectangle 6"/>
-          <p:cNvSpPr/>
-          <p:nvPr/>
-        </p:nvSpPr>
-        <p:spPr>
-          <a:xfrm>
-            <a:off x="6217920" y="1737360"/>
-            <a:ext cx="5303520" cy="3108960"/>
-          </a:xfrm>
-          <a:prstGeom prst="roundRect">
-            <a:avLst/>
-          </a:prstGeom>
-          <a:solidFill>
-            <a:srgbClr val="1B2A4A"/>
-          </a:solidFill>
-          <a:ln w="15875">
-            <a:solidFill>
-              <a:srgbClr val="4C9AFF"/>
-            </a:solidFill>
-          </a:ln>
-          <a:effectLst/>
-        </p:spPr>
-        <p:style>
-          <a:lnRef idx="1">
-            <a:schemeClr val="accent1"/>
-          </a:lnRef>
-          <a:fillRef idx="3">
-            <a:schemeClr val="accent1"/>
-          </a:fillRef>
-          <a:effectRef idx="2">
-            <a:schemeClr val="accent1"/>
-          </a:effectRef>
-          <a:fontRef idx="minor">
-            <a:schemeClr val="lt1"/>
-          </a:fontRef>
-        </p:style>
-        <p:txBody>
-          <a:bodyPr rtlCol="0" anchor="ctr" wrap="square" lIns="73152" rIns="73152" tIns="36576" bIns="36576"/>
-          <a:lstStyle/>
-          <a:p>
-            <a:pPr algn="l"/>
-            <a:r>
-              <a:rPr sz="1500" b="0">
-                <a:solidFill>
-                  <a:srgbClr val="F5F8FF"/>
-                </a:solidFill>
-                <a:latin typeface="Segoe UI"/>
-              </a:rPr>
-              <a:t>NEXT</a:t>
-            </a:r>
-          </a:p>
-          <a:p>
-            <a:pPr algn="l"/>
-            <a:r>
-              <a:rPr sz="1500" b="0">
-                <a:solidFill>
-                  <a:srgbClr val="F5F8FF"/>
-                </a:solidFill>
-                <a:latin typeface="Segoe UI"/>
-              </a:rPr>
-              <a:t/>
-            </a:r>
-          </a:p>
-          <a:p>
-            <a:pPr algn="l"/>
-            <a:r>
-              <a:rPr sz="1500" b="0">
-                <a:solidFill>
-                  <a:srgbClr val="F5F8FF"/>
-                </a:solidFill>
-                <a:latin typeface="Segoe UI"/>
-              </a:rPr>
-              <a:t>RFC 8723 at the SRTP layer</a:t>
-            </a:r>
-          </a:p>
-          <a:p>
-            <a:pPr algn="l"/>
-            <a:r>
-              <a:rPr sz="1500" b="0">
-                <a:solidFill>
-                  <a:srgbClr val="F5F8FF"/>
-                </a:solidFill>
-                <a:latin typeface="Segoe UI"/>
-              </a:rPr>
-              <a:t>EKT (RFC 8870) key transport</a:t>
-            </a:r>
-          </a:p>
-          <a:p>
-            <a:pPr algn="l"/>
-            <a:r>
-              <a:rPr sz="1500" b="0">
-                <a:solidFill>
-                  <a:srgbClr val="F5F8FF"/>
-                </a:solidFill>
-                <a:latin typeface="Segoe UI"/>
-              </a:rPr>
-              <a:t>Certificate pinning to identity</a:t>
-            </a:r>
-          </a:p>
-          <a:p>
-            <a:pPr algn="l"/>
-            <a:r>
-              <a:rPr sz="1500" b="0">
-                <a:solidFill>
-                  <a:srgbClr val="F5F8FF"/>
-                </a:solidFill>
-                <a:latin typeface="Segoe UI"/>
-              </a:rPr>
-              <a:t>Encrypted headers (Cryptex)</a:t>
-            </a:r>
-          </a:p>
-          <a:p>
-            <a:pPr algn="l"/>
-            <a:r>
-              <a:rPr sz="1500" b="0">
-                <a:solidFill>
-                  <a:srgbClr val="F5F8FF"/>
-                </a:solidFill>
-                <a:latin typeface="Segoe UI"/>
-              </a:rPr>
-              <a:t>MLS group key agreement</a:t>
-            </a:r>
-          </a:p>
-          <a:p>
-            <a:pPr algn="l"/>
-            <a:r>
-              <a:rPr sz="1500" b="0">
-                <a:solidFill>
-                  <a:srgbClr val="F5F8FF"/>
-                </a:solidFill>
-                <a:latin typeface="Segoe UI"/>
-              </a:rPr>
-              <a:t>Simulcast / layer selection</a:t>
-            </a:r>
-          </a:p>
-        </p:txBody>
-      </p:sp>
-      <p:sp>
-        <p:nvSpPr>
-          <p:cNvPr id="8" name="TextBox 7"/>
-          <p:cNvSpPr txBox="1"/>
-          <p:nvPr/>
-        </p:nvSpPr>
-        <p:spPr>
-          <a:xfrm>
-            <a:off x="548640" y="6446520"/>
-            <a:ext cx="7315200" cy="320040"/>
-          </a:xfrm>
-          <a:prstGeom prst="rect">
-            <a:avLst/>
-          </a:prstGeom>
-          <a:noFill/>
-        </p:spPr>
-        <p:txBody>
-          <a:bodyPr wrap="square" anchor="t">
-            <a:spAutoFit/>
-          </a:bodyPr>
-          <a:lstStyle/>
-          <a:p>
-            <a:pPr algn="l"/>
-            <a:r>
-              <a:rPr sz="1000" b="0">
-                <a:solidFill>
-                  <a:srgbClr val="A9B8D6"/>
-                </a:solidFill>
-                <a:latin typeface="Segoe UI"/>
-              </a:rPr>
-              <a:t>E2EE WebRTC — Zero-Trust SFU (str0m + PERC)</a:t>
-            </a:r>
-          </a:p>
-        </p:txBody>
-      </p:sp>
-      <p:sp>
-        <p:nvSpPr>
-          <p:cNvPr id="9" name="TextBox 8"/>
-          <p:cNvSpPr txBox="1"/>
-          <p:nvPr/>
-        </p:nvSpPr>
-        <p:spPr>
-          <a:xfrm>
-            <a:off x="11155680" y="6446520"/>
-            <a:ext cx="822960" cy="320040"/>
-          </a:xfrm>
-          <a:prstGeom prst="rect">
-            <a:avLst/>
-          </a:prstGeom>
-          <a:noFill/>
-        </p:spPr>
-        <p:txBody>
-          <a:bodyPr wrap="square" anchor="t">
-            <a:spAutoFit/>
-          </a:bodyPr>
-          <a:lstStyle/>
-          <a:p>
-            <a:pPr algn="r"/>
-            <a:r>
-              <a:rPr sz="1000" b="0">
-                <a:solidFill>
-                  <a:srgbClr val="A9B8D6"/>
-                </a:solidFill>
-                <a:latin typeface="Segoe UI"/>
-              </a:rPr>
-              <a:t>15</a:t>
             </a:r>
           </a:p>
         </p:txBody>
@@ -8966,7 +8373,7 @@
                 </a:solidFill>
                 <a:latin typeface="Segoe UI"/>
               </a:rPr>
-              <a:t>Implementation status</a:t>
+              <a:t>What's built</a:t>
             </a:r>
           </a:p>
         </p:txBody>
@@ -8980,6 +8387,116 @@
         <p:spPr>
           <a:xfrm>
             <a:off x="640080" y="1554480"/>
+            <a:ext cx="10881360" cy="914400"/>
+          </a:xfrm>
+          <a:prstGeom prst="roundRect">
+            <a:avLst/>
+          </a:prstGeom>
+          <a:solidFill>
+            <a:srgbClr val="1B2A4A"/>
+          </a:solidFill>
+          <a:ln w="15875">
+            <a:solidFill>
+              <a:srgbClr val="35D09B"/>
+            </a:solidFill>
+          </a:ln>
+          <a:effectLst/>
+        </p:spPr>
+        <p:style>
+          <a:lnRef idx="1">
+            <a:schemeClr val="accent1"/>
+          </a:lnRef>
+          <a:fillRef idx="3">
+            <a:schemeClr val="accent1"/>
+          </a:fillRef>
+          <a:effectRef idx="2">
+            <a:schemeClr val="accent1"/>
+          </a:effectRef>
+          <a:fontRef idx="minor">
+            <a:schemeClr val="lt1"/>
+          </a:fontRef>
+        </p:style>
+        <p:txBody>
+          <a:bodyPr rtlCol="0" anchor="ctr" wrap="square" lIns="73152" rIns="73152" tIns="36576" bIns="36576"/>
+          <a:lstStyle/>
+          <a:p>
+            <a:pPr algn="l"/>
+            <a:r>
+              <a:rPr sz="1800" b="0">
+                <a:solidFill>
+                  <a:srgbClr val="F5F8FF"/>
+                </a:solidFill>
+                <a:latin typeface="Segoe UI"/>
+              </a:rPr>
+              <a:t>PERC double encryption — HBH SFU + frame-level E2E + Key Distributor      ✅ Verified</a:t>
+            </a:r>
+          </a:p>
+        </p:txBody>
+      </p:sp>
+      <p:sp>
+        <p:nvSpPr>
+          <p:cNvPr id="7" name="Rounded Rectangle 6"/>
+          <p:cNvSpPr/>
+          <p:nvPr/>
+        </p:nvSpPr>
+        <p:spPr>
+          <a:xfrm>
+            <a:off x="640080" y="2606040"/>
+            <a:ext cx="10881360" cy="914400"/>
+          </a:xfrm>
+          <a:prstGeom prst="roundRect">
+            <a:avLst/>
+          </a:prstGeom>
+          <a:solidFill>
+            <a:srgbClr val="1B2A4A"/>
+          </a:solidFill>
+          <a:ln w="15875">
+            <a:solidFill>
+              <a:srgbClr val="F2B14C"/>
+            </a:solidFill>
+          </a:ln>
+          <a:effectLst/>
+        </p:spPr>
+        <p:style>
+          <a:lnRef idx="1">
+            <a:schemeClr val="accent1"/>
+          </a:lnRef>
+          <a:fillRef idx="3">
+            <a:schemeClr val="accent1"/>
+          </a:fillRef>
+          <a:effectRef idx="2">
+            <a:schemeClr val="accent1"/>
+          </a:effectRef>
+          <a:fontRef idx="minor">
+            <a:schemeClr val="lt1"/>
+          </a:fontRef>
+        </p:style>
+        <p:txBody>
+          <a:bodyPr rtlCol="0" anchor="ctr" wrap="square" lIns="73152" rIns="73152" tIns="36576" bIns="36576"/>
+          <a:lstStyle/>
+          <a:p>
+            <a:pPr algn="l"/>
+            <a:r>
+              <a:rPr sz="1800" b="0">
+                <a:solidFill>
+                  <a:srgbClr val="F5F8FF"/>
+                </a:solidFill>
+                <a:latin typeface="Segoe UI"/>
+              </a:rPr>
+              <a:t>Multi-party (N:N) conferences with dynamic SDP renegotiation             ✅ Verified</a:t>
+            </a:r>
+          </a:p>
+        </p:txBody>
+      </p:sp>
+      <p:sp>
+        <p:nvSpPr>
+          <p:cNvPr id="8" name="Rounded Rectangle 7"/>
+          <p:cNvSpPr/>
+          <p:nvPr/>
+        </p:nvSpPr>
+        <p:spPr>
+          <a:xfrm>
+            <a:off x="640080" y="3657600"/>
             <a:ext cx="10881360" cy="914400"/>
           </a:xfrm>
           <a:prstGeom prst="roundRect">
@@ -9021,117 +8538,7 @@
                 </a:solidFill>
                 <a:latin typeface="Segoe UI"/>
               </a:rPr>
-              <a:t>Phase 1 — 1:1 DTLS-SRTP tunnel (SFU relays opaque packets)        ✅ Verified</a:t>
-            </a:r>
-          </a:p>
-        </p:txBody>
-      </p:sp>
-      <p:sp>
-        <p:nvSpPr>
-          <p:cNvPr id="7" name="Rounded Rectangle 6"/>
-          <p:cNvSpPr/>
-          <p:nvPr/>
-        </p:nvSpPr>
-        <p:spPr>
-          <a:xfrm>
-            <a:off x="640080" y="2606040"/>
-            <a:ext cx="10881360" cy="914400"/>
-          </a:xfrm>
-          <a:prstGeom prst="roundRect">
-            <a:avLst/>
-          </a:prstGeom>
-          <a:solidFill>
-            <a:srgbClr val="1B2A4A"/>
-          </a:solidFill>
-          <a:ln w="15875">
-            <a:solidFill>
-              <a:srgbClr val="35D09B"/>
-            </a:solidFill>
-          </a:ln>
-          <a:effectLst/>
-        </p:spPr>
-        <p:style>
-          <a:lnRef idx="1">
-            <a:schemeClr val="accent1"/>
-          </a:lnRef>
-          <a:fillRef idx="3">
-            <a:schemeClr val="accent1"/>
-          </a:fillRef>
-          <a:effectRef idx="2">
-            <a:schemeClr val="accent1"/>
-          </a:effectRef>
-          <a:fontRef idx="minor">
-            <a:schemeClr val="lt1"/>
-          </a:fontRef>
-        </p:style>
-        <p:txBody>
-          <a:bodyPr rtlCol="0" anchor="ctr" wrap="square" lIns="73152" rIns="73152" tIns="36576" bIns="36576"/>
-          <a:lstStyle/>
-          <a:p>
-            <a:pPr algn="l"/>
-            <a:r>
-              <a:rPr sz="1800" b="0">
-                <a:solidFill>
-                  <a:srgbClr val="F5F8FF"/>
-                </a:solidFill>
-                <a:latin typeface="Segoe UI"/>
-              </a:rPr>
-              <a:t>Phase 2 — PERC double encryption (HBH SFU + frame E2E + Key Distributor)   ✅ Verified</a:t>
-            </a:r>
-          </a:p>
-        </p:txBody>
-      </p:sp>
-      <p:sp>
-        <p:nvSpPr>
-          <p:cNvPr id="8" name="Rounded Rectangle 7"/>
-          <p:cNvSpPr/>
-          <p:nvPr/>
-        </p:nvSpPr>
-        <p:spPr>
-          <a:xfrm>
-            <a:off x="640080" y="3657600"/>
-            <a:ext cx="10881360" cy="914400"/>
-          </a:xfrm>
-          <a:prstGeom prst="roundRect">
-            <a:avLst/>
-          </a:prstGeom>
-          <a:solidFill>
-            <a:srgbClr val="1B2A4A"/>
-          </a:solidFill>
-          <a:ln w="15875">
-            <a:solidFill>
-              <a:srgbClr val="F2B14C"/>
-            </a:solidFill>
-          </a:ln>
-          <a:effectLst/>
-        </p:spPr>
-        <p:style>
-          <a:lnRef idx="1">
-            <a:schemeClr val="accent1"/>
-          </a:lnRef>
-          <a:fillRef idx="3">
-            <a:schemeClr val="accent1"/>
-          </a:fillRef>
-          <a:effectRef idx="2">
-            <a:schemeClr val="accent1"/>
-          </a:effectRef>
-          <a:fontRef idx="minor">
-            <a:schemeClr val="lt1"/>
-          </a:fontRef>
-        </p:style>
-        <p:txBody>
-          <a:bodyPr rtlCol="0" anchor="ctr" wrap="square" lIns="73152" rIns="73152" tIns="36576" bIns="36576"/>
-          <a:lstStyle/>
-          <a:p>
-            <a:pPr algn="l"/>
-            <a:r>
-              <a:rPr sz="1800" b="0">
-                <a:solidFill>
-                  <a:srgbClr val="F5F8FF"/>
-                </a:solidFill>
-                <a:latin typeface="Segoe UI"/>
-              </a:rPr>
-              <a:t>Phase 3 — Multi-party N:N with dynamic SDP renegotiation                 ✅ Verified</a:t>
+              <a:t>Per-conference shared group key · per-sender keyframe relay              ✅ Verified</a:t>
             </a:r>
           </a:p>
         </p:txBody>
@@ -10178,7 +9585,7 @@
                 </a:solidFill>
                 <a:latin typeface="Segoe UI"/>
               </a:rPr>
-              <a:t>FOUNDATION</a:t>
+              <a:t>CORE DESIGN</a:t>
             </a:r>
           </a:p>
         </p:txBody>
@@ -10213,7 +9620,7 @@
                 </a:solidFill>
                 <a:latin typeface="Segoe UI"/>
               </a:rPr>
-              <a:t>Phase 1 — DTLS tunnel mode</a:t>
+              <a:t>PERC double encryption</a:t>
             </a:r>
           </a:p>
         </p:txBody>
@@ -10226,8 +9633,8 @@
         </p:nvSpPr>
         <p:spPr>
           <a:xfrm>
-            <a:off x="640080" y="2377440"/>
-            <a:ext cx="2377440" cy="1371600"/>
+            <a:off x="640080" y="2743200"/>
+            <a:ext cx="2468880" cy="1828800"/>
           </a:xfrm>
           <a:prstGeom prst="roundRect">
             <a:avLst/>
@@ -10262,13 +9669,49 @@
           <a:p>
             <a:pPr algn="ctr"/>
             <a:r>
-              <a:rPr sz="1600" b="1">
+              <a:rPr sz="1400" b="1">
                 <a:solidFill>
                   <a:srgbClr val="F5F8FF"/>
                 </a:solidFill>
                 <a:latin typeface="Segoe UI"/>
               </a:rPr>
               <a:t>Client A</a:t>
+            </a:r>
+          </a:p>
+          <a:p>
+            <a:pPr algn="ctr"/>
+            <a:r>
+              <a:rPr sz="1400" b="1">
+                <a:solidFill>
+                  <a:srgbClr val="F5F8FF"/>
+                </a:solidFill>
+                <a:latin typeface="Segoe UI"/>
+              </a:rPr>
+              <a:t/>
+            </a:r>
+          </a:p>
+          <a:p>
+            <a:pPr algn="ctr"/>
+            <a:r>
+              <a:rPr sz="1400" b="1">
+                <a:solidFill>
+                  <a:srgbClr val="F5F8FF"/>
+                </a:solidFill>
+                <a:latin typeface="Segoe UI"/>
+              </a:rPr>
+              <a:t>1  E2E encrypt</a:t>
+            </a:r>
+          </a:p>
+          <a:p>
+            <a:pPr algn="ctr"/>
+            <a:r>
+              <a:rPr sz="1400" b="1">
+                <a:solidFill>
+                  <a:srgbClr val="F5F8FF"/>
+                </a:solidFill>
+                <a:latin typeface="Segoe UI"/>
+              </a:rPr>
+              <a:t>2  HBH encrypt</a:t>
             </a:r>
           </a:p>
         </p:txBody>
@@ -10281,8 +9724,8 @@
         </p:nvSpPr>
         <p:spPr>
           <a:xfrm>
-            <a:off x="4892040" y="2377440"/>
-            <a:ext cx="2377440" cy="1371600"/>
+            <a:off x="4846320" y="2743200"/>
+            <a:ext cx="2468880" cy="1828800"/>
           </a:xfrm>
           <a:prstGeom prst="roundRect">
             <a:avLst/>
@@ -10317,25 +9760,61 @@
           <a:p>
             <a:pPr algn="ctr"/>
             <a:r>
-              <a:rPr sz="1500" b="1">
-                <a:solidFill>
-                  <a:srgbClr val="F5F8FF"/>
-                </a:solidFill>
-                <a:latin typeface="Segoe UI"/>
-              </a:rPr>
-              <a:t>SFU</a:t>
+              <a:rPr sz="1400" b="1">
+                <a:solidFill>
+                  <a:srgbClr val="F5F8FF"/>
+                </a:solidFill>
+                <a:latin typeface="Segoe UI"/>
+              </a:rPr>
+              <a:t>SFU (PERC)</a:t>
             </a:r>
           </a:p>
           <a:p>
             <a:pPr algn="ctr"/>
             <a:r>
-              <a:rPr sz="1500" b="1">
-                <a:solidFill>
-                  <a:srgbClr val="F5F8FF"/>
-                </a:solidFill>
-                <a:latin typeface="Segoe UI"/>
-              </a:rPr>
-              <a:t>ICE relay only</a:t>
+              <a:rPr sz="1400" b="1">
+                <a:solidFill>
+                  <a:srgbClr val="F5F8FF"/>
+                </a:solidFill>
+                <a:latin typeface="Segoe UI"/>
+              </a:rPr>
+              <a:t/>
+            </a:r>
+          </a:p>
+          <a:p>
+            <a:pPr algn="ctr"/>
+            <a:r>
+              <a:rPr sz="1400" b="1">
+                <a:solidFill>
+                  <a:srgbClr val="F5F8FF"/>
+                </a:solidFill>
+                <a:latin typeface="Segoe UI"/>
+              </a:rPr>
+              <a:t>strip HBH A</a:t>
+            </a:r>
+          </a:p>
+          <a:p>
+            <a:pPr algn="ctr"/>
+            <a:r>
+              <a:rPr sz="1400" b="1">
+                <a:solidFill>
+                  <a:srgbClr val="F5F8FF"/>
+                </a:solidFill>
+                <a:latin typeface="Segoe UI"/>
+              </a:rPr>
+              <a:t>read RTP headers</a:t>
+            </a:r>
+          </a:p>
+          <a:p>
+            <a:pPr algn="ctr"/>
+            <a:r>
+              <a:rPr sz="1400" b="1">
+                <a:solidFill>
+                  <a:srgbClr val="F5F8FF"/>
+                </a:solidFill>
+                <a:latin typeface="Segoe UI"/>
+              </a:rPr>
+              <a:t>re-HBH for B</a:t>
             </a:r>
           </a:p>
         </p:txBody>
@@ -10348,8 +9827,8 @@
         </p:nvSpPr>
         <p:spPr>
           <a:xfrm>
-            <a:off x="9144000" y="2377440"/>
-            <a:ext cx="2377440" cy="1371600"/>
+            <a:off x="9052560" y="2743200"/>
+            <a:ext cx="2468880" cy="1828800"/>
           </a:xfrm>
           <a:prstGeom prst="roundRect">
             <a:avLst/>
@@ -10384,13 +9863,61 @@
           <a:p>
             <a:pPr algn="ctr"/>
             <a:r>
-              <a:rPr sz="1600" b="1">
+              <a:rPr sz="1400" b="1">
                 <a:solidFill>
                   <a:srgbClr val="F5F8FF"/>
                 </a:solidFill>
                 <a:latin typeface="Segoe UI"/>
               </a:rPr>
               <a:t>Client B</a:t>
+            </a:r>
+          </a:p>
+          <a:p>
+            <a:pPr algn="ctr"/>
+            <a:r>
+              <a:rPr sz="1400" b="1">
+                <a:solidFill>
+                  <a:srgbClr val="F5F8FF"/>
+                </a:solidFill>
+                <a:latin typeface="Segoe UI"/>
+              </a:rPr>
+              <a:t/>
+            </a:r>
+          </a:p>
+          <a:p>
+            <a:pPr algn="ctr"/>
+            <a:r>
+              <a:rPr sz="1400" b="1">
+                <a:solidFill>
+                  <a:srgbClr val="F5F8FF"/>
+                </a:solidFill>
+                <a:latin typeface="Segoe UI"/>
+              </a:rPr>
+              <a:t>strip HBH B</a:t>
+            </a:r>
+          </a:p>
+          <a:p>
+            <a:pPr algn="ctr"/>
+            <a:r>
+              <a:rPr sz="1400" b="1">
+                <a:solidFill>
+                  <a:srgbClr val="F5F8FF"/>
+                </a:solidFill>
+                <a:latin typeface="Segoe UI"/>
+              </a:rPr>
+              <a:t>strip E2E</a:t>
+            </a:r>
+          </a:p>
+          <a:p>
+            <a:pPr algn="ctr"/>
+            <a:r>
+              <a:rPr sz="1400" b="1">
+                <a:solidFill>
+                  <a:srgbClr val="F5F8FF"/>
+                </a:solidFill>
+                <a:latin typeface="Segoe UI"/>
+              </a:rPr>
+              <a:t>decode</a:t>
             </a:r>
           </a:p>
         </p:txBody>
@@ -10403,16 +9930,15 @@
         </p:nvCxnSpPr>
         <p:spPr>
           <a:xfrm>
-            <a:off x="3017520" y="3063240"/>
-            <a:ext cx="1874520" cy="0"/>
+            <a:off x="3108960" y="3657600"/>
+            <a:ext cx="1737360" cy="0"/>
           </a:xfrm>
           <a:prstGeom prst="line">
             <a:avLst/>
           </a:prstGeom>
-          <a:ln w="27940">
-            <a:prstDash val="dash"/>
+          <a:ln w="31750">
             <a:solidFill>
-              <a:srgbClr val="A9B8D6"/>
+              <a:srgbClr val="4C9AFF"/>
             </a:solidFill>
             <a:tailEnd type="triangle" w="med" len="med"/>
           </a:ln>
@@ -10441,16 +9967,15 @@
         </p:nvCxnSpPr>
         <p:spPr>
           <a:xfrm>
-            <a:off x="7269480" y="3063240"/>
-            <a:ext cx="1874520" cy="0"/>
+            <a:off x="7315200" y="3657600"/>
+            <a:ext cx="1737360" cy="0"/>
           </a:xfrm>
           <a:prstGeom prst="line">
             <a:avLst/>
           </a:prstGeom>
-          <a:ln w="27940">
-            <a:prstDash val="dash"/>
+          <a:ln w="31750">
             <a:solidFill>
-              <a:srgbClr val="A9B8D6"/>
+              <a:srgbClr val="4C9AFF"/>
             </a:solidFill>
             <a:tailEnd type="triangle" w="med" len="med"/>
           </a:ln>
@@ -10473,14 +9998,69 @@
       </p:cxnSp>
       <p:sp>
         <p:nvSpPr>
-          <p:cNvPr id="11" name="TextBox 10"/>
+          <p:cNvPr id="11" name="Rounded Rectangle 10"/>
+          <p:cNvSpPr/>
+          <p:nvPr/>
+        </p:nvSpPr>
+        <p:spPr>
+          <a:xfrm>
+            <a:off x="640080" y="1554480"/>
+            <a:ext cx="10881360" cy="914400"/>
+          </a:xfrm>
+          <a:prstGeom prst="roundRect">
+            <a:avLst/>
+          </a:prstGeom>
+          <a:solidFill>
+            <a:srgbClr val="1B2A4A"/>
+          </a:solidFill>
+          <a:ln w="15875">
+            <a:solidFill>
+              <a:srgbClr val="35D09B"/>
+            </a:solidFill>
+          </a:ln>
+          <a:effectLst/>
+        </p:spPr>
+        <p:style>
+          <a:lnRef idx="1">
+            <a:schemeClr val="accent1"/>
+          </a:lnRef>
+          <a:fillRef idx="3">
+            <a:schemeClr val="accent1"/>
+          </a:fillRef>
+          <a:effectRef idx="2">
+            <a:schemeClr val="accent1"/>
+          </a:effectRef>
+          <a:fontRef idx="minor">
+            <a:schemeClr val="lt1"/>
+          </a:fontRef>
+        </p:style>
+        <p:txBody>
+          <a:bodyPr rtlCol="0" anchor="ctr" wrap="square" lIns="73152" rIns="73152" tIns="36576" bIns="36576"/>
+          <a:lstStyle/>
+          <a:p>
+            <a:pPr algn="ctr"/>
+            <a:r>
+              <a:rPr sz="1500" b="1">
+                <a:solidFill>
+                  <a:srgbClr val="F5F8FF"/>
+                </a:solidFill>
+                <a:latin typeface="Segoe UI"/>
+              </a:rPr>
+              <a:t>Outer = hop-by-hop SRTP (per leg, SFU has keys)   ·   Inner = end-to-end AES-128-GCM (SFU never has the key)</a:t>
+            </a:r>
+          </a:p>
+        </p:txBody>
+      </p:sp>
+      <p:sp>
+        <p:nvSpPr>
+          <p:cNvPr id="12" name="TextBox 11"/>
           <p:cNvSpPr txBox="1"/>
           <p:nvPr/>
         </p:nvSpPr>
         <p:spPr>
           <a:xfrm>
-            <a:off x="2651760" y="1828800"/>
-            <a:ext cx="6858000" cy="457200"/>
+            <a:off x="640080" y="4846320"/>
+            <a:ext cx="10881360" cy="1097280"/>
           </a:xfrm>
           <a:prstGeom prst="rect">
             <a:avLst/>
@@ -10493,86 +10073,15 @@
           </a:bodyPr>
           <a:lstStyle/>
           <a:p>
-            <a:pPr algn="ctr"/>
-            <a:r>
-              <a:rPr sz="1400" b="0">
+            <a:pPr algn="l"/>
+            <a:r>
+              <a:rPr sz="1500" b="0">
                 <a:solidFill>
                   <a:srgbClr val="A9B8D6"/>
                 </a:solidFill>
                 <a:latin typeface="Segoe UI"/>
               </a:rPr>
-              <a:t>DTLS · SRTP · SRTCP forwarded as opaque bytes</a:t>
-            </a:r>
-          </a:p>
-        </p:txBody>
-      </p:sp>
-      <p:sp>
-        <p:nvSpPr>
-          <p:cNvPr id="12" name="TextBox 11"/>
-          <p:cNvSpPr txBox="1"/>
-          <p:nvPr/>
-        </p:nvSpPr>
-        <p:spPr>
-          <a:xfrm>
-            <a:off x="640080" y="4114800"/>
-            <a:ext cx="10789920" cy="4572000"/>
-          </a:xfrm>
-          <a:prstGeom prst="rect">
-            <a:avLst/>
-          </a:prstGeom>
-          <a:noFill/>
-        </p:spPr>
-        <p:txBody>
-          <a:bodyPr wrap="square">
-            <a:spAutoFit/>
-          </a:bodyPr>
-          <a:lstStyle/>
-          <a:p>
-            <a:pPr>
-              <a:spcAft>
-                <a:spcPts val="1152"/>
-              </a:spcAft>
-            </a:pPr>
-            <a:r>
-              <a:rPr sz="1800">
-                <a:solidFill>
-                  <a:srgbClr val="F5F8FF"/>
-                </a:solidFill>
-                <a:latin typeface="Segoe UI"/>
-              </a:rPr>
-              <a:t>• SFU terminates only ICE/STUN; DTLS handshake runs end-to-end between clients.</a:t>
-            </a:r>
-          </a:p>
-          <a:p>
-            <a:pPr>
-              <a:spcAft>
-                <a:spcPts val="1152"/>
-              </a:spcAft>
-            </a:pPr>
-            <a:r>
-              <a:rPr sz="1800">
-                <a:solidFill>
-                  <a:srgbClr val="F5F8FF"/>
-                </a:solidFill>
-                <a:latin typeface="Segoe UI"/>
-              </a:rPr>
-              <a:t>• Fingerprint + SSRC swapping in the SDP answer makes E2E DTLS traverse the SFU.</a:t>
-            </a:r>
-          </a:p>
-          <a:p>
-            <a:pPr>
-              <a:spcAft>
-                <a:spcPts val="1152"/>
-              </a:spcAft>
-            </a:pPr>
-            <a:r>
-              <a:rPr sz="1800">
-                <a:solidFill>
-                  <a:srgbClr val="F5F8FF"/>
-                </a:solidFill>
-                <a:latin typeface="Segoe UI"/>
-              </a:rPr>
-              <a:t>• SFU has no SRTP keys at all — but it is point-to-point (1:1).</a:t>
+              <a:t>The SFU decrypts only the outer layer to read SSRC/PT/seq for routing, then re-encrypts the outer layer per receiver. The inner E2E payload is forwarded byte-for-byte.</a:t>
             </a:r>
           </a:p>
         </p:txBody>
@@ -10783,7 +10292,7 @@
                 </a:solidFill>
                 <a:latin typeface="Segoe UI"/>
               </a:rPr>
-              <a:t>CORE DESIGN</a:t>
+              <a:t>SECURITY MODEL</a:t>
             </a:r>
           </a:p>
         </p:txBody>
@@ -10818,7 +10327,7 @@
                 </a:solidFill>
                 <a:latin typeface="Segoe UI"/>
               </a:rPr>
-              <a:t>Phase 2 — PERC double encryption</a:t>
+              <a:t>Roles &amp; trust boundaries</a:t>
             </a:r>
           </a:p>
         </p:txBody>
@@ -10831,18 +10340,18 @@
         </p:nvSpPr>
         <p:spPr>
           <a:xfrm>
-            <a:off x="640080" y="2743200"/>
-            <a:ext cx="2468880" cy="1828800"/>
+            <a:off x="640080" y="1737360"/>
+            <a:ext cx="5303520" cy="1828800"/>
           </a:xfrm>
           <a:prstGeom prst="roundRect">
             <a:avLst/>
           </a:prstGeom>
           <a:solidFill>
-            <a:srgbClr val="2E5C9E"/>
+            <a:srgbClr val="1B2A4A"/>
           </a:solidFill>
           <a:ln w="15875">
             <a:solidFill>
-              <a:srgbClr val="4C9AFF"/>
+              <a:srgbClr val="35D09B"/>
             </a:solidFill>
           </a:ln>
           <a:effectLst/>
@@ -10865,21 +10374,21 @@
           <a:bodyPr rtlCol="0" anchor="ctr" wrap="square" lIns="73152" rIns="73152" tIns="36576" bIns="36576"/>
           <a:lstStyle/>
           <a:p>
-            <a:pPr algn="ctr"/>
-            <a:r>
-              <a:rPr sz="1400" b="1">
-                <a:solidFill>
-                  <a:srgbClr val="F5F8FF"/>
-                </a:solidFill>
-                <a:latin typeface="Segoe UI"/>
-              </a:rPr>
-              <a:t>Client A</a:t>
-            </a:r>
-          </a:p>
-          <a:p>
-            <a:pPr algn="ctr"/>
-            <a:r>
-              <a:rPr sz="1400" b="1">
+            <a:pPr algn="l"/>
+            <a:r>
+              <a:rPr sz="1500" b="0">
+                <a:solidFill>
+                  <a:srgbClr val="F5F8FF"/>
+                </a:solidFill>
+                <a:latin typeface="Segoe UI"/>
+              </a:rPr>
+              <a:t>TRUSTED</a:t>
+            </a:r>
+          </a:p>
+          <a:p>
+            <a:pPr algn="l"/>
+            <a:r>
+              <a:rPr sz="1500" b="0">
                 <a:solidFill>
                   <a:srgbClr val="F5F8FF"/>
                 </a:solidFill>
@@ -10889,27 +10398,39 @@
             </a:r>
           </a:p>
           <a:p>
-            <a:pPr algn="ctr"/>
-            <a:r>
-              <a:rPr sz="1400" b="1">
-                <a:solidFill>
-                  <a:srgbClr val="F5F8FF"/>
-                </a:solidFill>
-                <a:latin typeface="Segoe UI"/>
-              </a:rPr>
-              <a:t>1  E2E encrypt</a:t>
-            </a:r>
-          </a:p>
-          <a:p>
-            <a:pPr algn="ctr"/>
-            <a:r>
-              <a:rPr sz="1400" b="1">
-                <a:solidFill>
-                  <a:srgbClr val="F5F8FF"/>
-                </a:solidFill>
-                <a:latin typeface="Segoe UI"/>
-              </a:rPr>
-              <a:t>2  HBH encrypt</a:t>
+            <a:pPr algn="l"/>
+            <a:r>
+              <a:rPr sz="1500" b="0">
+                <a:solidFill>
+                  <a:srgbClr val="F5F8FF"/>
+                </a:solidFill>
+                <a:latin typeface="Segoe UI"/>
+              </a:rPr>
+              <a:t>Client devices &amp; app code</a:t>
+            </a:r>
+          </a:p>
+          <a:p>
+            <a:pPr algn="l"/>
+            <a:r>
+              <a:rPr sz="1500" b="0">
+                <a:solidFill>
+                  <a:srgbClr val="F5F8FF"/>
+                </a:solidFill>
+                <a:latin typeface="Segoe UI"/>
+              </a:rPr>
+              <a:t>libwebrtc (DTLS, SRTP, codecs)</a:t>
+            </a:r>
+          </a:p>
+          <a:p>
+            <a:pPr algn="l"/>
+            <a:r>
+              <a:rPr sz="1500" b="0">
+                <a:solidFill>
+                  <a:srgbClr val="F5F8FF"/>
+                </a:solidFill>
+                <a:latin typeface="Segoe UI"/>
+              </a:rPr>
+              <a:t>Key Distributor (holds E2E keys)</a:t>
             </a:r>
           </a:p>
         </p:txBody>
@@ -10922,8 +10443,111 @@
         </p:nvSpPr>
         <p:spPr>
           <a:xfrm>
-            <a:off x="4846320" y="2743200"/>
-            <a:ext cx="2468880" cy="1828800"/>
+            <a:off x="6217920" y="1737360"/>
+            <a:ext cx="5303520" cy="1828800"/>
+          </a:xfrm>
+          <a:prstGeom prst="roundRect">
+            <a:avLst/>
+          </a:prstGeom>
+          <a:solidFill>
+            <a:srgbClr val="1B2A4A"/>
+          </a:solidFill>
+          <a:ln w="15875">
+            <a:solidFill>
+              <a:srgbClr val="E86A6A"/>
+            </a:solidFill>
+          </a:ln>
+          <a:effectLst/>
+        </p:spPr>
+        <p:style>
+          <a:lnRef idx="1">
+            <a:schemeClr val="accent1"/>
+          </a:lnRef>
+          <a:fillRef idx="3">
+            <a:schemeClr val="accent1"/>
+          </a:fillRef>
+          <a:effectRef idx="2">
+            <a:schemeClr val="accent1"/>
+          </a:effectRef>
+          <a:fontRef idx="minor">
+            <a:schemeClr val="lt1"/>
+          </a:fontRef>
+        </p:style>
+        <p:txBody>
+          <a:bodyPr rtlCol="0" anchor="ctr" wrap="square" lIns="73152" rIns="73152" tIns="36576" bIns="36576"/>
+          <a:lstStyle/>
+          <a:p>
+            <a:pPr algn="l"/>
+            <a:r>
+              <a:rPr sz="1500" b="0">
+                <a:solidFill>
+                  <a:srgbClr val="F5F8FF"/>
+                </a:solidFill>
+                <a:latin typeface="Segoe UI"/>
+              </a:rPr>
+              <a:t>UNTRUSTED (for secrecy)</a:t>
+            </a:r>
+          </a:p>
+          <a:p>
+            <a:pPr algn="l"/>
+            <a:r>
+              <a:rPr sz="1500" b="0">
+                <a:solidFill>
+                  <a:srgbClr val="F5F8FF"/>
+                </a:solidFill>
+                <a:latin typeface="Segoe UI"/>
+              </a:rPr>
+              <a:t/>
+            </a:r>
+          </a:p>
+          <a:p>
+            <a:pPr algn="l"/>
+            <a:r>
+              <a:rPr sz="1500" b="0">
+                <a:solidFill>
+                  <a:srgbClr val="F5F8FF"/>
+                </a:solidFill>
+                <a:latin typeface="Segoe UI"/>
+              </a:rPr>
+              <a:t>SFU server &amp; infrastructure</a:t>
+            </a:r>
+          </a:p>
+          <a:p>
+            <a:pPr algn="l"/>
+            <a:r>
+              <a:rPr sz="1500" b="0">
+                <a:solidFill>
+                  <a:srgbClr val="F5F8FF"/>
+                </a:solidFill>
+                <a:latin typeface="Segoe UI"/>
+              </a:rPr>
+              <a:t>Network between client &amp; SFU</a:t>
+            </a:r>
+          </a:p>
+          <a:p>
+            <a:pPr algn="l"/>
+            <a:r>
+              <a:rPr sz="1500" b="0">
+                <a:solidFill>
+                  <a:srgbClr val="F5F8FF"/>
+                </a:solidFill>
+                <a:latin typeface="Segoe UI"/>
+              </a:rPr>
+              <a:t>Cloud provider / logs</a:t>
+            </a:r>
+          </a:p>
+        </p:txBody>
+      </p:sp>
+      <p:sp>
+        <p:nvSpPr>
+          <p:cNvPr id="8" name="Rounded Rectangle 7"/>
+          <p:cNvSpPr/>
+          <p:nvPr/>
+        </p:nvSpPr>
+        <p:spPr>
+          <a:xfrm>
+            <a:off x="640080" y="3840480"/>
+            <a:ext cx="10881360" cy="1645920"/>
           </a:xfrm>
           <a:prstGeom prst="roundRect">
             <a:avLst/>
@@ -10958,307 +10582,51 @@
           <a:p>
             <a:pPr algn="ctr"/>
             <a:r>
-              <a:rPr sz="1400" b="1">
-                <a:solidFill>
-                  <a:srgbClr val="F5F8FF"/>
-                </a:solidFill>
-                <a:latin typeface="Segoe UI"/>
-              </a:rPr>
-              <a:t>SFU (PERC)</a:t>
+              <a:rPr sz="1600" b="1">
+                <a:solidFill>
+                  <a:srgbClr val="F5F8FF"/>
+                </a:solidFill>
+                <a:latin typeface="Segoe UI"/>
+              </a:rPr>
+              <a:t>SFU = partially trusted</a:t>
             </a:r>
           </a:p>
           <a:p>
             <a:pPr algn="ctr"/>
             <a:r>
-              <a:rPr sz="1400" b="1">
-                <a:solidFill>
-                  <a:srgbClr val="F5F8FF"/>
-                </a:solidFill>
-                <a:latin typeface="Segoe UI"/>
-              </a:rPr>
-              <a:t/>
+              <a:rPr sz="1600" b="1">
+                <a:solidFill>
+                  <a:srgbClr val="F5F8FF"/>
+                </a:solidFill>
+                <a:latin typeface="Segoe UI"/>
+              </a:rPr>
+              <a:t>Trusted to relay packets (availability), NOT trusted with keys (secrecy).</a:t>
             </a:r>
           </a:p>
           <a:p>
             <a:pPr algn="ctr"/>
             <a:r>
-              <a:rPr sz="1400" b="1">
-                <a:solidFill>
-                  <a:srgbClr val="F5F8FF"/>
-                </a:solidFill>
-                <a:latin typeface="Segoe UI"/>
-              </a:rPr>
-              <a:t>strip HBH A</a:t>
-            </a:r>
-          </a:p>
-          <a:p>
-            <a:pPr algn="ctr"/>
-            <a:r>
-              <a:rPr sz="1400" b="1">
-                <a:solidFill>
-                  <a:srgbClr val="F5F8FF"/>
-                </a:solidFill>
-                <a:latin typeface="Segoe UI"/>
-              </a:rPr>
-              <a:t>read RTP headers</a:t>
-            </a:r>
-          </a:p>
-          <a:p>
-            <a:pPr algn="ctr"/>
-            <a:r>
-              <a:rPr sz="1400" b="1">
-                <a:solidFill>
-                  <a:srgbClr val="F5F8FF"/>
-                </a:solidFill>
-                <a:latin typeface="Segoe UI"/>
-              </a:rPr>
-              <a:t>re-HBH for B</a:t>
-            </a:r>
-          </a:p>
-        </p:txBody>
-      </p:sp>
-      <p:sp>
-        <p:nvSpPr>
-          <p:cNvPr id="8" name="Rounded Rectangle 7"/>
-          <p:cNvSpPr/>
-          <p:nvPr/>
-        </p:nvSpPr>
-        <p:spPr>
-          <a:xfrm>
-            <a:off x="9052560" y="2743200"/>
-            <a:ext cx="2468880" cy="1828800"/>
-          </a:xfrm>
-          <a:prstGeom prst="roundRect">
-            <a:avLst/>
-          </a:prstGeom>
-          <a:solidFill>
-            <a:srgbClr val="2E5C9E"/>
-          </a:solidFill>
-          <a:ln w="15875">
-            <a:solidFill>
-              <a:srgbClr val="4C9AFF"/>
-            </a:solidFill>
-          </a:ln>
-          <a:effectLst/>
-        </p:spPr>
-        <p:style>
-          <a:lnRef idx="1">
-            <a:schemeClr val="accent1"/>
-          </a:lnRef>
-          <a:fillRef idx="3">
-            <a:schemeClr val="accent1"/>
-          </a:fillRef>
-          <a:effectRef idx="2">
-            <a:schemeClr val="accent1"/>
-          </a:effectRef>
-          <a:fontRef idx="minor">
-            <a:schemeClr val="lt1"/>
-          </a:fontRef>
-        </p:style>
-        <p:txBody>
-          <a:bodyPr rtlCol="0" anchor="ctr" wrap="square" lIns="73152" rIns="73152" tIns="36576" bIns="36576"/>
-          <a:lstStyle/>
-          <a:p>
-            <a:pPr algn="ctr"/>
-            <a:r>
-              <a:rPr sz="1400" b="1">
-                <a:solidFill>
-                  <a:srgbClr val="F5F8FF"/>
-                </a:solidFill>
-                <a:latin typeface="Segoe UI"/>
-              </a:rPr>
-              <a:t>Client B</a:t>
-            </a:r>
-          </a:p>
-          <a:p>
-            <a:pPr algn="ctr"/>
-            <a:r>
-              <a:rPr sz="1400" b="1">
-                <a:solidFill>
-                  <a:srgbClr val="F5F8FF"/>
-                </a:solidFill>
-                <a:latin typeface="Segoe UI"/>
-              </a:rPr>
-              <a:t/>
-            </a:r>
-          </a:p>
-          <a:p>
-            <a:pPr algn="ctr"/>
-            <a:r>
-              <a:rPr sz="1400" b="1">
-                <a:solidFill>
-                  <a:srgbClr val="F5F8FF"/>
-                </a:solidFill>
-                <a:latin typeface="Segoe UI"/>
-              </a:rPr>
-              <a:t>strip HBH B</a:t>
-            </a:r>
-          </a:p>
-          <a:p>
-            <a:pPr algn="ctr"/>
-            <a:r>
-              <a:rPr sz="1400" b="1">
-                <a:solidFill>
-                  <a:srgbClr val="F5F8FF"/>
-                </a:solidFill>
-                <a:latin typeface="Segoe UI"/>
-              </a:rPr>
-              <a:t>strip E2E</a:t>
-            </a:r>
-          </a:p>
-          <a:p>
-            <a:pPr algn="ctr"/>
-            <a:r>
-              <a:rPr sz="1400" b="1">
-                <a:solidFill>
-                  <a:srgbClr val="F5F8FF"/>
-                </a:solidFill>
-                <a:latin typeface="Segoe UI"/>
-              </a:rPr>
-              <a:t>decode</a:t>
-            </a:r>
-          </a:p>
-        </p:txBody>
-      </p:sp>
-      <p:cxnSp>
-        <p:nvCxnSpPr>
-          <p:cNvPr id="9" name="Connector 8"/>
-          <p:cNvCxnSpPr/>
-          <p:nvPr/>
-        </p:nvCxnSpPr>
-        <p:spPr>
-          <a:xfrm>
-            <a:off x="3108960" y="3657600"/>
-            <a:ext cx="1737360" cy="0"/>
-          </a:xfrm>
-          <a:prstGeom prst="line">
-            <a:avLst/>
-          </a:prstGeom>
-          <a:ln w="31750">
-            <a:solidFill>
-              <a:srgbClr val="4C9AFF"/>
-            </a:solidFill>
-            <a:tailEnd type="triangle" w="med" len="med"/>
-          </a:ln>
-          <a:effectLst/>
-        </p:spPr>
-        <p:style>
-          <a:lnRef idx="2">
-            <a:schemeClr val="accent1"/>
-          </a:lnRef>
-          <a:fillRef idx="0">
-            <a:schemeClr val="accent1"/>
-          </a:fillRef>
-          <a:effectRef idx="1">
-            <a:schemeClr val="accent1"/>
-          </a:effectRef>
-          <a:fontRef idx="minor">
-            <a:schemeClr val="tx1"/>
-          </a:fontRef>
-        </p:style>
-      </p:cxnSp>
-      <p:cxnSp>
-        <p:nvCxnSpPr>
-          <p:cNvPr id="10" name="Connector 9"/>
-          <p:cNvCxnSpPr/>
-          <p:nvPr/>
-        </p:nvCxnSpPr>
-        <p:spPr>
-          <a:xfrm>
-            <a:off x="7315200" y="3657600"/>
-            <a:ext cx="1737360" cy="0"/>
-          </a:xfrm>
-          <a:prstGeom prst="line">
-            <a:avLst/>
-          </a:prstGeom>
-          <a:ln w="31750">
-            <a:solidFill>
-              <a:srgbClr val="4C9AFF"/>
-            </a:solidFill>
-            <a:tailEnd type="triangle" w="med" len="med"/>
-          </a:ln>
-          <a:effectLst/>
-        </p:spPr>
-        <p:style>
-          <a:lnRef idx="2">
-            <a:schemeClr val="accent1"/>
-          </a:lnRef>
-          <a:fillRef idx="0">
-            <a:schemeClr val="accent1"/>
-          </a:fillRef>
-          <a:effectRef idx="1">
-            <a:schemeClr val="accent1"/>
-          </a:effectRef>
-          <a:fontRef idx="minor">
-            <a:schemeClr val="tx1"/>
-          </a:fontRef>
-        </p:style>
-      </p:cxnSp>
-      <p:sp>
-        <p:nvSpPr>
-          <p:cNvPr id="11" name="Rounded Rectangle 10"/>
-          <p:cNvSpPr/>
-          <p:nvPr/>
-        </p:nvSpPr>
-        <p:spPr>
-          <a:xfrm>
-            <a:off x="640080" y="1554480"/>
-            <a:ext cx="10881360" cy="914400"/>
-          </a:xfrm>
-          <a:prstGeom prst="roundRect">
-            <a:avLst/>
-          </a:prstGeom>
-          <a:solidFill>
-            <a:srgbClr val="1B2A4A"/>
-          </a:solidFill>
-          <a:ln w="15875">
-            <a:solidFill>
-              <a:srgbClr val="35D09B"/>
-            </a:solidFill>
-          </a:ln>
-          <a:effectLst/>
-        </p:spPr>
-        <p:style>
-          <a:lnRef idx="1">
-            <a:schemeClr val="accent1"/>
-          </a:lnRef>
-          <a:fillRef idx="3">
-            <a:schemeClr val="accent1"/>
-          </a:fillRef>
-          <a:effectRef idx="2">
-            <a:schemeClr val="accent1"/>
-          </a:effectRef>
-          <a:fontRef idx="minor">
-            <a:schemeClr val="lt1"/>
-          </a:fontRef>
-        </p:style>
-        <p:txBody>
-          <a:bodyPr rtlCol="0" anchor="ctr" wrap="square" lIns="73152" rIns="73152" tIns="36576" bIns="36576"/>
-          <a:lstStyle/>
-          <a:p>
-            <a:pPr algn="ctr"/>
-            <a:r>
-              <a:rPr sz="1500" b="1">
-                <a:solidFill>
-                  <a:srgbClr val="F5F8FF"/>
-                </a:solidFill>
-                <a:latin typeface="Segoe UI"/>
-              </a:rPr>
-              <a:t>Outer = hop-by-hop SRTP (per leg, SFU has keys)   ·   Inner = end-to-end AES-128-GCM (SFU never has the key)</a:t>
-            </a:r>
-          </a:p>
-        </p:txBody>
-      </p:sp>
-      <p:sp>
-        <p:nvSpPr>
-          <p:cNvPr id="12" name="TextBox 11"/>
+              <a:rPr sz="1600" b="1">
+                <a:solidFill>
+                  <a:srgbClr val="F5F8FF"/>
+                </a:solidFill>
+                <a:latin typeface="Segoe UI"/>
+              </a:rPr>
+              <a:t>It can drop or delay packets, but can never read the E2E media.</a:t>
+            </a:r>
+          </a:p>
+        </p:txBody>
+      </p:sp>
+      <p:sp>
+        <p:nvSpPr>
+          <p:cNvPr id="9" name="TextBox 8"/>
           <p:cNvSpPr txBox="1"/>
           <p:nvPr/>
         </p:nvSpPr>
         <p:spPr>
           <a:xfrm>
-            <a:off x="640080" y="4846320"/>
-            <a:ext cx="10881360" cy="1097280"/>
+            <a:off x="548640" y="6446520"/>
+            <a:ext cx="7315200" cy="320040"/>
           </a:xfrm>
           <a:prstGeom prst="rect">
             <a:avLst/>
@@ -11273,47 +10641,12 @@
           <a:p>
             <a:pPr algn="l"/>
             <a:r>
-              <a:rPr sz="1500" b="0">
+              <a:rPr sz="1000" b="0">
                 <a:solidFill>
                   <a:srgbClr val="A9B8D6"/>
                 </a:solidFill>
                 <a:latin typeface="Segoe UI"/>
               </a:rPr>
-              <a:t>The SFU decrypts only the outer layer to read SSRC/PT/seq for routing, then re-encrypts the outer layer per receiver. The inner E2E payload is forwarded byte-for-byte.</a:t>
-            </a:r>
-          </a:p>
-        </p:txBody>
-      </p:sp>
-      <p:sp>
-        <p:nvSpPr>
-          <p:cNvPr id="13" name="TextBox 12"/>
-          <p:cNvSpPr txBox="1"/>
-          <p:nvPr/>
-        </p:nvSpPr>
-        <p:spPr>
-          <a:xfrm>
-            <a:off x="548640" y="6446520"/>
-            <a:ext cx="7315200" cy="320040"/>
-          </a:xfrm>
-          <a:prstGeom prst="rect">
-            <a:avLst/>
-          </a:prstGeom>
-          <a:noFill/>
-        </p:spPr>
-        <p:txBody>
-          <a:bodyPr wrap="square" anchor="t">
-            <a:spAutoFit/>
-          </a:bodyPr>
-          <a:lstStyle/>
-          <a:p>
-            <a:pPr algn="l"/>
-            <a:r>
-              <a:rPr sz="1000" b="0">
-                <a:solidFill>
-                  <a:srgbClr val="A9B8D6"/>
-                </a:solidFill>
-                <a:latin typeface="Segoe UI"/>
-              </a:rPr>
               <a:t>E2EE WebRTC — Zero-Trust SFU (str0m + PERC)</a:t>
             </a:r>
           </a:p>
@@ -11321,7 +10654,7 @@
       </p:sp>
       <p:sp>
         <p:nvSpPr>
-          <p:cNvPr id="14" name="TextBox 13"/>
+          <p:cNvPr id="10" name="TextBox 9"/>
           <p:cNvSpPr txBox="1"/>
           <p:nvPr/>
         </p:nvSpPr>
@@ -11490,7 +10823,7 @@
                 </a:solidFill>
                 <a:latin typeface="Segoe UI"/>
               </a:rPr>
-              <a:t>SECURITY MODEL</a:t>
+              <a:t>KEY DISTRIBUTOR</a:t>
             </a:r>
           </a:p>
         </p:txBody>
@@ -11525,7 +10858,7 @@
                 </a:solidFill>
                 <a:latin typeface="Segoe UI"/>
               </a:rPr>
-              <a:t>Roles &amp; trust boundaries</a:t>
+              <a:t>Key distribution flow</a:t>
             </a:r>
           </a:p>
         </p:txBody>
@@ -11538,8 +10871,173 @@
         </p:nvSpPr>
         <p:spPr>
           <a:xfrm>
-            <a:off x="640080" y="1737360"/>
-            <a:ext cx="5303520" cy="1828800"/>
+            <a:off x="640080" y="1645920"/>
+            <a:ext cx="640080" cy="548640"/>
+          </a:xfrm>
+          <a:prstGeom prst="roundRect">
+            <a:avLst/>
+          </a:prstGeom>
+          <a:solidFill>
+            <a:srgbClr val="4C9AFF"/>
+          </a:solidFill>
+          <a:ln w="15875">
+            <a:solidFill>
+              <a:srgbClr val="4C9AFF"/>
+            </a:solidFill>
+          </a:ln>
+          <a:effectLst/>
+        </p:spPr>
+        <p:style>
+          <a:lnRef idx="1">
+            <a:schemeClr val="accent1"/>
+          </a:lnRef>
+          <a:fillRef idx="3">
+            <a:schemeClr val="accent1"/>
+          </a:fillRef>
+          <a:effectRef idx="2">
+            <a:schemeClr val="accent1"/>
+          </a:effectRef>
+          <a:fontRef idx="minor">
+            <a:schemeClr val="lt1"/>
+          </a:fontRef>
+        </p:style>
+        <p:txBody>
+          <a:bodyPr rtlCol="0" anchor="ctr" wrap="square" lIns="73152" rIns="73152" tIns="36576" bIns="36576"/>
+          <a:lstStyle/>
+          <a:p>
+            <a:pPr algn="ctr"/>
+            <a:r>
+              <a:rPr sz="1600" b="1">
+                <a:solidFill>
+                  <a:srgbClr val="F5F8FF"/>
+                </a:solidFill>
+                <a:latin typeface="Segoe UI"/>
+              </a:rPr>
+              <a:t>1</a:t>
+            </a:r>
+          </a:p>
+        </p:txBody>
+      </p:sp>
+      <p:sp>
+        <p:nvSpPr>
+          <p:cNvPr id="7" name="Rounded Rectangle 6"/>
+          <p:cNvSpPr/>
+          <p:nvPr/>
+        </p:nvSpPr>
+        <p:spPr>
+          <a:xfrm>
+            <a:off x="1463040" y="1645920"/>
+            <a:ext cx="9966960" cy="548640"/>
+          </a:xfrm>
+          <a:prstGeom prst="roundRect">
+            <a:avLst/>
+          </a:prstGeom>
+          <a:solidFill>
+            <a:srgbClr val="1B2A4A"/>
+          </a:solidFill>
+          <a:ln w="15875">
+            <a:solidFill>
+              <a:srgbClr val="4C9AFF"/>
+            </a:solidFill>
+          </a:ln>
+          <a:effectLst/>
+        </p:spPr>
+        <p:style>
+          <a:lnRef idx="1">
+            <a:schemeClr val="accent1"/>
+          </a:lnRef>
+          <a:fillRef idx="3">
+            <a:schemeClr val="accent1"/>
+          </a:fillRef>
+          <a:effectRef idx="2">
+            <a:schemeClr val="accent1"/>
+          </a:effectRef>
+          <a:fontRef idx="minor">
+            <a:schemeClr val="lt1"/>
+          </a:fontRef>
+        </p:style>
+        <p:txBody>
+          <a:bodyPr rtlCol="0" anchor="ctr" wrap="square" lIns="73152" rIns="73152" tIns="36576" bIns="36576"/>
+          <a:lstStyle/>
+          <a:p>
+            <a:pPr algn="l"/>
+            <a:r>
+              <a:rPr sz="1500" b="0">
+                <a:solidFill>
+                  <a:srgbClr val="F5F8FF"/>
+                </a:solidFill>
+                <a:latin typeface="Segoe UI"/>
+              </a:rPr>
+              <a:t>POST /conference — create</a:t>
+            </a:r>
+          </a:p>
+        </p:txBody>
+      </p:sp>
+      <p:sp>
+        <p:nvSpPr>
+          <p:cNvPr id="8" name="Rounded Rectangle 7"/>
+          <p:cNvSpPr/>
+          <p:nvPr/>
+        </p:nvSpPr>
+        <p:spPr>
+          <a:xfrm>
+            <a:off x="640080" y="2359152"/>
+            <a:ext cx="640080" cy="548640"/>
+          </a:xfrm>
+          <a:prstGeom prst="roundRect">
+            <a:avLst/>
+          </a:prstGeom>
+          <a:solidFill>
+            <a:srgbClr val="4C9AFF"/>
+          </a:solidFill>
+          <a:ln w="15875">
+            <a:solidFill>
+              <a:srgbClr val="4C9AFF"/>
+            </a:solidFill>
+          </a:ln>
+          <a:effectLst/>
+        </p:spPr>
+        <p:style>
+          <a:lnRef idx="1">
+            <a:schemeClr val="accent1"/>
+          </a:lnRef>
+          <a:fillRef idx="3">
+            <a:schemeClr val="accent1"/>
+          </a:fillRef>
+          <a:effectRef idx="2">
+            <a:schemeClr val="accent1"/>
+          </a:effectRef>
+          <a:fontRef idx="minor">
+            <a:schemeClr val="lt1"/>
+          </a:fontRef>
+        </p:style>
+        <p:txBody>
+          <a:bodyPr rtlCol="0" anchor="ctr" wrap="square" lIns="73152" rIns="73152" tIns="36576" bIns="36576"/>
+          <a:lstStyle/>
+          <a:p>
+            <a:pPr algn="ctr"/>
+            <a:r>
+              <a:rPr sz="1600" b="1">
+                <a:solidFill>
+                  <a:srgbClr val="F5F8FF"/>
+                </a:solidFill>
+                <a:latin typeface="Segoe UI"/>
+              </a:rPr>
+              <a:t>2</a:t>
+            </a:r>
+          </a:p>
+        </p:txBody>
+      </p:sp>
+      <p:sp>
+        <p:nvSpPr>
+          <p:cNvPr id="9" name="Rounded Rectangle 8"/>
+          <p:cNvSpPr/>
+          <p:nvPr/>
+        </p:nvSpPr>
+        <p:spPr>
+          <a:xfrm>
+            <a:off x="1463040" y="2359152"/>
+            <a:ext cx="9966960" cy="548640"/>
           </a:xfrm>
           <a:prstGeom prst="roundRect">
             <a:avLst/>
@@ -11580,178 +11078,27 @@
                 </a:solidFill>
                 <a:latin typeface="Segoe UI"/>
               </a:rPr>
-              <a:t>TRUSTED</a:t>
-            </a:r>
-          </a:p>
-          <a:p>
-            <a:pPr algn="l"/>
-            <a:r>
-              <a:rPr sz="1500" b="0">
-                <a:solidFill>
-                  <a:srgbClr val="F5F8FF"/>
-                </a:solidFill>
-                <a:latin typeface="Segoe UI"/>
-              </a:rPr>
-              <a:t/>
-            </a:r>
-          </a:p>
-          <a:p>
-            <a:pPr algn="l"/>
-            <a:r>
-              <a:rPr sz="1500" b="0">
-                <a:solidFill>
-                  <a:srgbClr val="F5F8FF"/>
-                </a:solidFill>
-                <a:latin typeface="Segoe UI"/>
-              </a:rPr>
-              <a:t>Client devices &amp; app code</a:t>
-            </a:r>
-          </a:p>
-          <a:p>
-            <a:pPr algn="l"/>
-            <a:r>
-              <a:rPr sz="1500" b="0">
-                <a:solidFill>
-                  <a:srgbClr val="F5F8FF"/>
-                </a:solidFill>
-                <a:latin typeface="Segoe UI"/>
-              </a:rPr>
-              <a:t>libwebrtc (DTLS, SRTP, codecs)</a:t>
-            </a:r>
-          </a:p>
-          <a:p>
-            <a:pPr algn="l"/>
-            <a:r>
-              <a:rPr sz="1500" b="0">
-                <a:solidFill>
-                  <a:srgbClr val="F5F8FF"/>
-                </a:solidFill>
-                <a:latin typeface="Segoe UI"/>
-              </a:rPr>
-              <a:t>Key Distributor (holds E2E keys)</a:t>
-            </a:r>
-          </a:p>
-        </p:txBody>
-      </p:sp>
-      <p:sp>
-        <p:nvSpPr>
-          <p:cNvPr id="7" name="Rounded Rectangle 6"/>
+              <a:t>POST /conference/:id/join — KD mints E2E master key</a:t>
+            </a:r>
+          </a:p>
+        </p:txBody>
+      </p:sp>
+      <p:sp>
+        <p:nvSpPr>
+          <p:cNvPr id="10" name="Rounded Rectangle 9"/>
           <p:cNvSpPr/>
           <p:nvPr/>
         </p:nvSpPr>
         <p:spPr>
           <a:xfrm>
-            <a:off x="6217920" y="1737360"/>
-            <a:ext cx="5303520" cy="1828800"/>
+            <a:off x="640080" y="3072384"/>
+            <a:ext cx="640080" cy="548640"/>
           </a:xfrm>
           <a:prstGeom prst="roundRect">
             <a:avLst/>
           </a:prstGeom>
           <a:solidFill>
-            <a:srgbClr val="1B2A4A"/>
-          </a:solidFill>
-          <a:ln w="15875">
-            <a:solidFill>
-              <a:srgbClr val="E86A6A"/>
-            </a:solidFill>
-          </a:ln>
-          <a:effectLst/>
-        </p:spPr>
-        <p:style>
-          <a:lnRef idx="1">
-            <a:schemeClr val="accent1"/>
-          </a:lnRef>
-          <a:fillRef idx="3">
-            <a:schemeClr val="accent1"/>
-          </a:fillRef>
-          <a:effectRef idx="2">
-            <a:schemeClr val="accent1"/>
-          </a:effectRef>
-          <a:fontRef idx="minor">
-            <a:schemeClr val="lt1"/>
-          </a:fontRef>
-        </p:style>
-        <p:txBody>
-          <a:bodyPr rtlCol="0" anchor="ctr" wrap="square" lIns="73152" rIns="73152" tIns="36576" bIns="36576"/>
-          <a:lstStyle/>
-          <a:p>
-            <a:pPr algn="l"/>
-            <a:r>
-              <a:rPr sz="1500" b="0">
-                <a:solidFill>
-                  <a:srgbClr val="F5F8FF"/>
-                </a:solidFill>
-                <a:latin typeface="Segoe UI"/>
-              </a:rPr>
-              <a:t>UNTRUSTED (for secrecy)</a:t>
-            </a:r>
-          </a:p>
-          <a:p>
-            <a:pPr algn="l"/>
-            <a:r>
-              <a:rPr sz="1500" b="0">
-                <a:solidFill>
-                  <a:srgbClr val="F5F8FF"/>
-                </a:solidFill>
-                <a:latin typeface="Segoe UI"/>
-              </a:rPr>
-              <a:t/>
-            </a:r>
-          </a:p>
-          <a:p>
-            <a:pPr algn="l"/>
-            <a:r>
-              <a:rPr sz="1500" b="0">
-                <a:solidFill>
-                  <a:srgbClr val="F5F8FF"/>
-                </a:solidFill>
-                <a:latin typeface="Segoe UI"/>
-              </a:rPr>
-              <a:t>SFU server &amp; infrastructure</a:t>
-            </a:r>
-          </a:p>
-          <a:p>
-            <a:pPr algn="l"/>
-            <a:r>
-              <a:rPr sz="1500" b="0">
-                <a:solidFill>
-                  <a:srgbClr val="F5F8FF"/>
-                </a:solidFill>
-                <a:latin typeface="Segoe UI"/>
-              </a:rPr>
-              <a:t>Network between client &amp; SFU</a:t>
-            </a:r>
-          </a:p>
-          <a:p>
-            <a:pPr algn="l"/>
-            <a:r>
-              <a:rPr sz="1500" b="0">
-                <a:solidFill>
-                  <a:srgbClr val="F5F8FF"/>
-                </a:solidFill>
-                <a:latin typeface="Segoe UI"/>
-              </a:rPr>
-              <a:t>Cloud provider / logs</a:t>
-            </a:r>
-          </a:p>
-        </p:txBody>
-      </p:sp>
-      <p:sp>
-        <p:nvSpPr>
-          <p:cNvPr id="8" name="Rounded Rectangle 7"/>
-          <p:cNvSpPr/>
-          <p:nvPr/>
-        </p:nvSpPr>
-        <p:spPr>
-          <a:xfrm>
-            <a:off x="640080" y="3840480"/>
-            <a:ext cx="10881360" cy="1645920"/>
-          </a:xfrm>
-          <a:prstGeom prst="roundRect">
-            <a:avLst/>
-          </a:prstGeom>
-          <a:solidFill>
-            <a:srgbClr val="6B478F"/>
+            <a:srgbClr val="4C9AFF"/>
           </a:solidFill>
           <a:ln w="15875">
             <a:solidFill>
@@ -11786,9 +11133,107 @@
                 </a:solidFill>
                 <a:latin typeface="Segoe UI"/>
               </a:rPr>
-              <a:t>SFU = partially trusted</a:t>
-            </a:r>
-          </a:p>
+              <a:t>3</a:t>
+            </a:r>
+          </a:p>
+        </p:txBody>
+      </p:sp>
+      <p:sp>
+        <p:nvSpPr>
+          <p:cNvPr id="11" name="Rounded Rectangle 10"/>
+          <p:cNvSpPr/>
+          <p:nvPr/>
+        </p:nvSpPr>
+        <p:spPr>
+          <a:xfrm>
+            <a:off x="1463040" y="3072384"/>
+            <a:ext cx="9966960" cy="548640"/>
+          </a:xfrm>
+          <a:prstGeom prst="roundRect">
+            <a:avLst/>
+          </a:prstGeom>
+          <a:solidFill>
+            <a:srgbClr val="1B2A4A"/>
+          </a:solidFill>
+          <a:ln w="15875">
+            <a:solidFill>
+              <a:srgbClr val="4C9AFF"/>
+            </a:solidFill>
+          </a:ln>
+          <a:effectLst/>
+        </p:spPr>
+        <p:style>
+          <a:lnRef idx="1">
+            <a:schemeClr val="accent1"/>
+          </a:lnRef>
+          <a:fillRef idx="3">
+            <a:schemeClr val="accent1"/>
+          </a:fillRef>
+          <a:effectRef idx="2">
+            <a:schemeClr val="accent1"/>
+          </a:effectRef>
+          <a:fontRef idx="minor">
+            <a:schemeClr val="lt1"/>
+          </a:fontRef>
+        </p:style>
+        <p:txBody>
+          <a:bodyPr rtlCol="0" anchor="ctr" wrap="square" lIns="73152" rIns="73152" tIns="36576" bIns="36576"/>
+          <a:lstStyle/>
+          <a:p>
+            <a:pPr algn="l"/>
+            <a:r>
+              <a:rPr sz="1500" b="0">
+                <a:solidFill>
+                  <a:srgbClr val="F5F8FF"/>
+                </a:solidFill>
+                <a:latin typeface="Segoe UI"/>
+              </a:rPr>
+              <a:t>Key bundle returned (KEK, e2eMasterKey, kekSpi → key_id)</a:t>
+            </a:r>
+          </a:p>
+        </p:txBody>
+      </p:sp>
+      <p:sp>
+        <p:nvSpPr>
+          <p:cNvPr id="12" name="Rounded Rectangle 11"/>
+          <p:cNvSpPr/>
+          <p:nvPr/>
+        </p:nvSpPr>
+        <p:spPr>
+          <a:xfrm>
+            <a:off x="640080" y="3785616"/>
+            <a:ext cx="640080" cy="548640"/>
+          </a:xfrm>
+          <a:prstGeom prst="roundRect">
+            <a:avLst/>
+          </a:prstGeom>
+          <a:solidFill>
+            <a:srgbClr val="4C9AFF"/>
+          </a:solidFill>
+          <a:ln w="15875">
+            <a:solidFill>
+              <a:srgbClr val="4C9AFF"/>
+            </a:solidFill>
+          </a:ln>
+          <a:effectLst/>
+        </p:spPr>
+        <p:style>
+          <a:lnRef idx="1">
+            <a:schemeClr val="accent1"/>
+          </a:lnRef>
+          <a:fillRef idx="3">
+            <a:schemeClr val="accent1"/>
+          </a:fillRef>
+          <a:effectRef idx="2">
+            <a:schemeClr val="accent1"/>
+          </a:effectRef>
+          <a:fontRef idx="minor">
+            <a:schemeClr val="lt1"/>
+          </a:fontRef>
+        </p:style>
+        <p:txBody>
+          <a:bodyPr rtlCol="0" anchor="ctr" wrap="square" lIns="73152" rIns="73152" tIns="36576" bIns="36576"/>
+          <a:lstStyle/>
           <a:p>
             <a:pPr algn="ctr"/>
             <a:r>
@@ -11798,9 +11243,107 @@
                 </a:solidFill>
                 <a:latin typeface="Segoe UI"/>
               </a:rPr>
-              <a:t>Trusted to relay packets (availability), NOT trusted with keys (secrecy).</a:t>
-            </a:r>
-          </a:p>
+              <a:t>4</a:t>
+            </a:r>
+          </a:p>
+        </p:txBody>
+      </p:sp>
+      <p:sp>
+        <p:nvSpPr>
+          <p:cNvPr id="13" name="Rounded Rectangle 12"/>
+          <p:cNvSpPr/>
+          <p:nvPr/>
+        </p:nvSpPr>
+        <p:spPr>
+          <a:xfrm>
+            <a:off x="1463040" y="3785616"/>
+            <a:ext cx="9966960" cy="548640"/>
+          </a:xfrm>
+          <a:prstGeom prst="roundRect">
+            <a:avLst/>
+          </a:prstGeom>
+          <a:solidFill>
+            <a:srgbClr val="1B2A4A"/>
+          </a:solidFill>
+          <a:ln w="15875">
+            <a:solidFill>
+              <a:srgbClr val="4C9AFF"/>
+            </a:solidFill>
+          </a:ln>
+          <a:effectLst/>
+        </p:spPr>
+        <p:style>
+          <a:lnRef idx="1">
+            <a:schemeClr val="accent1"/>
+          </a:lnRef>
+          <a:fillRef idx="3">
+            <a:schemeClr val="accent1"/>
+          </a:fillRef>
+          <a:effectRef idx="2">
+            <a:schemeClr val="accent1"/>
+          </a:effectRef>
+          <a:fontRef idx="minor">
+            <a:schemeClr val="lt1"/>
+          </a:fontRef>
+        </p:style>
+        <p:txBody>
+          <a:bodyPr rtlCol="0" anchor="ctr" wrap="square" lIns="73152" rIns="73152" tIns="36576" bIns="36576"/>
+          <a:lstStyle/>
+          <a:p>
+            <a:pPr algn="l"/>
+            <a:r>
+              <a:rPr sz="1500" b="0">
+                <a:solidFill>
+                  <a:srgbClr val="F5F8FF"/>
+                </a:solidFill>
+                <a:latin typeface="Segoe UI"/>
+              </a:rPr>
+              <a:t>WS /ws/endpoint — realtime key updates</a:t>
+            </a:r>
+          </a:p>
+        </p:txBody>
+      </p:sp>
+      <p:sp>
+        <p:nvSpPr>
+          <p:cNvPr id="14" name="Rounded Rectangle 13"/>
+          <p:cNvSpPr/>
+          <p:nvPr/>
+        </p:nvSpPr>
+        <p:spPr>
+          <a:xfrm>
+            <a:off x="640080" y="4498848"/>
+            <a:ext cx="640080" cy="548640"/>
+          </a:xfrm>
+          <a:prstGeom prst="roundRect">
+            <a:avLst/>
+          </a:prstGeom>
+          <a:solidFill>
+            <a:srgbClr val="4C9AFF"/>
+          </a:solidFill>
+          <a:ln w="15875">
+            <a:solidFill>
+              <a:srgbClr val="4C9AFF"/>
+            </a:solidFill>
+          </a:ln>
+          <a:effectLst/>
+        </p:spPr>
+        <p:style>
+          <a:lnRef idx="1">
+            <a:schemeClr val="accent1"/>
+          </a:lnRef>
+          <a:fillRef idx="3">
+            <a:schemeClr val="accent1"/>
+          </a:fillRef>
+          <a:effectRef idx="2">
+            <a:schemeClr val="accent1"/>
+          </a:effectRef>
+          <a:fontRef idx="minor">
+            <a:schemeClr val="lt1"/>
+          </a:fontRef>
+        </p:style>
+        <p:txBody>
+          <a:bodyPr rtlCol="0" anchor="ctr" wrap="square" lIns="73152" rIns="73152" tIns="36576" bIns="36576"/>
+          <a:lstStyle/>
           <a:p>
             <a:pPr algn="ctr"/>
             <a:r>
@@ -11810,14 +11353,179 @@
                 </a:solidFill>
                 <a:latin typeface="Segoe UI"/>
               </a:rPr>
-              <a:t>It can drop or delay packets, but can never read the E2E media.</a:t>
-            </a:r>
-          </a:p>
-        </p:txBody>
-      </p:sp>
-      <p:sp>
-        <p:nvSpPr>
-          <p:cNvPr id="9" name="TextBox 8"/>
+              <a:t>5</a:t>
+            </a:r>
+          </a:p>
+        </p:txBody>
+      </p:sp>
+      <p:sp>
+        <p:nvSpPr>
+          <p:cNvPr id="15" name="Rounded Rectangle 14"/>
+          <p:cNvSpPr/>
+          <p:nvPr/>
+        </p:nvSpPr>
+        <p:spPr>
+          <a:xfrm>
+            <a:off x="1463040" y="4498848"/>
+            <a:ext cx="9966960" cy="548640"/>
+          </a:xfrm>
+          <a:prstGeom prst="roundRect">
+            <a:avLst/>
+          </a:prstGeom>
+          <a:solidFill>
+            <a:srgbClr val="1B2A4A"/>
+          </a:solidFill>
+          <a:ln w="15875">
+            <a:solidFill>
+              <a:srgbClr val="35D09B"/>
+            </a:solidFill>
+          </a:ln>
+          <a:effectLst/>
+        </p:spPr>
+        <p:style>
+          <a:lnRef idx="1">
+            <a:schemeClr val="accent1"/>
+          </a:lnRef>
+          <a:fillRef idx="3">
+            <a:schemeClr val="accent1"/>
+          </a:fillRef>
+          <a:effectRef idx="2">
+            <a:schemeClr val="accent1"/>
+          </a:effectRef>
+          <a:fontRef idx="minor">
+            <a:schemeClr val="lt1"/>
+          </a:fontRef>
+        </p:style>
+        <p:txBody>
+          <a:bodyPr rtlCol="0" anchor="ctr" wrap="square" lIns="73152" rIns="73152" tIns="36576" bIns="36576"/>
+          <a:lstStyle/>
+          <a:p>
+            <a:pPr algn="l"/>
+            <a:r>
+              <a:rPr sz="1500" b="0">
+                <a:solidFill>
+                  <a:srgbClr val="F5F8FF"/>
+                </a:solidFill>
+                <a:latin typeface="Segoe UI"/>
+              </a:rPr>
+              <a:t>Member join/leave rotates KEK → 'rekey' pushed to all</a:t>
+            </a:r>
+          </a:p>
+        </p:txBody>
+      </p:sp>
+      <p:sp>
+        <p:nvSpPr>
+          <p:cNvPr id="16" name="Rounded Rectangle 15"/>
+          <p:cNvSpPr/>
+          <p:nvPr/>
+        </p:nvSpPr>
+        <p:spPr>
+          <a:xfrm>
+            <a:off x="640080" y="5212080"/>
+            <a:ext cx="640080" cy="548640"/>
+          </a:xfrm>
+          <a:prstGeom prst="roundRect">
+            <a:avLst/>
+          </a:prstGeom>
+          <a:solidFill>
+            <a:srgbClr val="4C9AFF"/>
+          </a:solidFill>
+          <a:ln w="15875">
+            <a:solidFill>
+              <a:srgbClr val="4C9AFF"/>
+            </a:solidFill>
+          </a:ln>
+          <a:effectLst/>
+        </p:spPr>
+        <p:style>
+          <a:lnRef idx="1">
+            <a:schemeClr val="accent1"/>
+          </a:lnRef>
+          <a:fillRef idx="3">
+            <a:schemeClr val="accent1"/>
+          </a:fillRef>
+          <a:effectRef idx="2">
+            <a:schemeClr val="accent1"/>
+          </a:effectRef>
+          <a:fontRef idx="minor">
+            <a:schemeClr val="lt1"/>
+          </a:fontRef>
+        </p:style>
+        <p:txBody>
+          <a:bodyPr rtlCol="0" anchor="ctr" wrap="square" lIns="73152" rIns="73152" tIns="36576" bIns="36576"/>
+          <a:lstStyle/>
+          <a:p>
+            <a:pPr algn="ctr"/>
+            <a:r>
+              <a:rPr sz="1600" b="1">
+                <a:solidFill>
+                  <a:srgbClr val="F5F8FF"/>
+                </a:solidFill>
+                <a:latin typeface="Segoe UI"/>
+              </a:rPr>
+              <a:t>6</a:t>
+            </a:r>
+          </a:p>
+        </p:txBody>
+      </p:sp>
+      <p:sp>
+        <p:nvSpPr>
+          <p:cNvPr id="17" name="Rounded Rectangle 16"/>
+          <p:cNvSpPr/>
+          <p:nvPr/>
+        </p:nvSpPr>
+        <p:spPr>
+          <a:xfrm>
+            <a:off x="1463040" y="5212080"/>
+            <a:ext cx="9966960" cy="548640"/>
+          </a:xfrm>
+          <a:prstGeom prst="roundRect">
+            <a:avLst/>
+          </a:prstGeom>
+          <a:solidFill>
+            <a:srgbClr val="1B2A4A"/>
+          </a:solidFill>
+          <a:ln w="15875">
+            <a:solidFill>
+              <a:srgbClr val="4C9AFF"/>
+            </a:solidFill>
+          </a:ln>
+          <a:effectLst/>
+        </p:spPr>
+        <p:style>
+          <a:lnRef idx="1">
+            <a:schemeClr val="accent1"/>
+          </a:lnRef>
+          <a:fillRef idx="3">
+            <a:schemeClr val="accent1"/>
+          </a:fillRef>
+          <a:effectRef idx="2">
+            <a:schemeClr val="accent1"/>
+          </a:effectRef>
+          <a:fontRef idx="minor">
+            <a:schemeClr val="lt1"/>
+          </a:fontRef>
+        </p:style>
+        <p:txBody>
+          <a:bodyPr rtlCol="0" anchor="ctr" wrap="square" lIns="73152" rIns="73152" tIns="36576" bIns="36576"/>
+          <a:lstStyle/>
+          <a:p>
+            <a:pPr algn="l"/>
+            <a:r>
+              <a:rPr sz="1500" b="0">
+                <a:solidFill>
+                  <a:srgbClr val="F5F8FF"/>
+                </a:solidFill>
+                <a:latin typeface="Segoe UI"/>
+              </a:rPr>
+              <a:t>Client installs key: pc.installE2eeKey(keyId, keyBuf)</a:t>
+            </a:r>
+          </a:p>
+        </p:txBody>
+      </p:sp>
+      <p:sp>
+        <p:nvSpPr>
+          <p:cNvPr id="18" name="TextBox 17"/>
           <p:cNvSpPr txBox="1"/>
           <p:nvPr/>
         </p:nvSpPr>
@@ -11852,7 +11560,7 @@
       </p:sp>
       <p:sp>
         <p:nvSpPr>
-          <p:cNvPr id="10" name="TextBox 9"/>
+          <p:cNvPr id="19" name="TextBox 18"/>
           <p:cNvSpPr txBox="1"/>
           <p:nvPr/>
         </p:nvSpPr>
@@ -12021,7 +11729,7 @@
                 </a:solidFill>
                 <a:latin typeface="Segoe UI"/>
               </a:rPr>
-              <a:t>KEY DISTRIBUTOR</a:t>
+              <a:t>ON THE WIRE</a:t>
             </a:r>
           </a:p>
         </p:txBody>
@@ -12056,62 +11764,42 @@
                 </a:solidFill>
                 <a:latin typeface="Segoe UI"/>
               </a:rPr>
-              <a:t>Key distribution flow</a:t>
-            </a:r>
-          </a:p>
-        </p:txBody>
-      </p:sp>
-      <p:sp>
-        <p:nvSpPr>
-          <p:cNvPr id="6" name="Rounded Rectangle 5"/>
-          <p:cNvSpPr/>
-          <p:nvPr/>
-        </p:nvSpPr>
-        <p:spPr>
-          <a:xfrm>
-            <a:off x="640080" y="1645920"/>
-            <a:ext cx="640080" cy="548640"/>
-          </a:xfrm>
-          <a:prstGeom prst="roundRect">
-            <a:avLst/>
-          </a:prstGeom>
-          <a:solidFill>
-            <a:srgbClr val="4C9AFF"/>
-          </a:solidFill>
-          <a:ln w="15875">
-            <a:solidFill>
-              <a:srgbClr val="4C9AFF"/>
-            </a:solidFill>
-          </a:ln>
-          <a:effectLst/>
-        </p:spPr>
-        <p:style>
-          <a:lnRef idx="1">
-            <a:schemeClr val="accent1"/>
-          </a:lnRef>
-          <a:fillRef idx="3">
-            <a:schemeClr val="accent1"/>
-          </a:fillRef>
-          <a:effectRef idx="2">
-            <a:schemeClr val="accent1"/>
-          </a:effectRef>
-          <a:fontRef idx="minor">
-            <a:schemeClr val="lt1"/>
-          </a:fontRef>
-        </p:style>
-        <p:txBody>
-          <a:bodyPr rtlCol="0" anchor="ctr" wrap="square" lIns="73152" rIns="73152" tIns="36576" bIns="36576"/>
-          <a:lstStyle/>
-          <a:p>
-            <a:pPr algn="ctr"/>
-            <a:r>
-              <a:rPr sz="1600" b="1">
-                <a:solidFill>
-                  <a:srgbClr val="F5F8FF"/>
-                </a:solidFill>
-                <a:latin typeface="Segoe UI"/>
-              </a:rPr>
-              <a:t>1</a:t>
+              <a:t>Inner E2E frame format</a:t>
+            </a:r>
+          </a:p>
+        </p:txBody>
+      </p:sp>
+      <p:sp>
+        <p:nvSpPr>
+          <p:cNvPr id="6" name="TextBox 5"/>
+          <p:cNvSpPr txBox="1"/>
+          <p:nvPr/>
+        </p:nvSpPr>
+        <p:spPr>
+          <a:xfrm>
+            <a:off x="640080" y="1554480"/>
+            <a:ext cx="10881360" cy="457200"/>
+          </a:xfrm>
+          <a:prstGeom prst="rect">
+            <a:avLst/>
+          </a:prstGeom>
+          <a:noFill/>
+        </p:spPr>
+        <p:txBody>
+          <a:bodyPr wrap="square" anchor="t">
+            <a:spAutoFit/>
+          </a:bodyPr>
+          <a:lstStyle/>
+          <a:p>
+            <a:pPr algn="l"/>
+            <a:r>
+              <a:rPr sz="1500" b="0">
+                <a:solidFill>
+                  <a:srgbClr val="A9B8D6"/>
+                </a:solidFill>
+                <a:latin typeface="Segoe UI"/>
+              </a:rPr>
+              <a:t>AES-128-GCM at the encoded-frame boundary (libwebrtc FrameTransformer), empty AAD:</a:t>
             </a:r>
           </a:p>
         </p:txBody>
@@ -12124,8 +11812,8 @@
         </p:nvSpPr>
         <p:spPr>
           <a:xfrm>
-            <a:off x="1463040" y="1645920"/>
-            <a:ext cx="9966960" cy="548640"/>
+            <a:off x="822960" y="2286000"/>
+            <a:ext cx="1463040" cy="1005840"/>
           </a:xfrm>
           <a:prstGeom prst="roundRect">
             <a:avLst/>
@@ -12158,15 +11846,16 @@
           <a:bodyPr rtlCol="0" anchor="ctr" wrap="square" lIns="73152" rIns="73152" tIns="36576" bIns="36576"/>
           <a:lstStyle/>
           <a:p>
-            <a:pPr algn="l"/>
-            <a:r>
-              <a:rPr sz="1500" b="0">
-                <a:solidFill>
-                  <a:srgbClr val="F5F8FF"/>
-                </a:solidFill>
-                <a:latin typeface="Segoe UI"/>
-              </a:rPr>
-              <a:t>POST /conference — create</a:t>
+            <a:pPr algn="ctr"/>
+            <a:r>
+              <a:rPr sz="1500" b="1">
+                <a:solidFill>
+                  <a:srgbClr val="F5F8FF"/>
+                </a:solidFill>
+                <a:latin typeface="Segoe UI"/>
+              </a:rPr>
+              <a:t>key_id
+1B</a:t>
             </a:r>
           </a:p>
         </p:txBody>
@@ -12179,63 +11868,8 @@
         </p:nvSpPr>
         <p:spPr>
           <a:xfrm>
-            <a:off x="640080" y="2359152"/>
-            <a:ext cx="640080" cy="548640"/>
-          </a:xfrm>
-          <a:prstGeom prst="roundRect">
-            <a:avLst/>
-          </a:prstGeom>
-          <a:solidFill>
-            <a:srgbClr val="4C9AFF"/>
-          </a:solidFill>
-          <a:ln w="15875">
-            <a:solidFill>
-              <a:srgbClr val="4C9AFF"/>
-            </a:solidFill>
-          </a:ln>
-          <a:effectLst/>
-        </p:spPr>
-        <p:style>
-          <a:lnRef idx="1">
-            <a:schemeClr val="accent1"/>
-          </a:lnRef>
-          <a:fillRef idx="3">
-            <a:schemeClr val="accent1"/>
-          </a:fillRef>
-          <a:effectRef idx="2">
-            <a:schemeClr val="accent1"/>
-          </a:effectRef>
-          <a:fontRef idx="minor">
-            <a:schemeClr val="lt1"/>
-          </a:fontRef>
-        </p:style>
-        <p:txBody>
-          <a:bodyPr rtlCol="0" anchor="ctr" wrap="square" lIns="73152" rIns="73152" tIns="36576" bIns="36576"/>
-          <a:lstStyle/>
-          <a:p>
-            <a:pPr algn="ctr"/>
-            <a:r>
-              <a:rPr sz="1600" b="1">
-                <a:solidFill>
-                  <a:srgbClr val="F5F8FF"/>
-                </a:solidFill>
-                <a:latin typeface="Segoe UI"/>
-              </a:rPr>
-              <a:t>2</a:t>
-            </a:r>
-          </a:p>
-        </p:txBody>
-      </p:sp>
-      <p:sp>
-        <p:nvSpPr>
-          <p:cNvPr id="9" name="Rounded Rectangle 8"/>
-          <p:cNvSpPr/>
-          <p:nvPr/>
-        </p:nvSpPr>
-        <p:spPr>
-          <a:xfrm>
-            <a:off x="1463040" y="2359152"/>
-            <a:ext cx="9966960" cy="548640"/>
+            <a:off x="2395728" y="2286000"/>
+            <a:ext cx="2194560" cy="1005840"/>
           </a:xfrm>
           <a:prstGeom prst="roundRect">
             <a:avLst/>
@@ -12268,39 +11902,40 @@
           <a:bodyPr rtlCol="0" anchor="ctr" wrap="square" lIns="73152" rIns="73152" tIns="36576" bIns="36576"/>
           <a:lstStyle/>
           <a:p>
-            <a:pPr algn="l"/>
-            <a:r>
-              <a:rPr sz="1500" b="0">
-                <a:solidFill>
-                  <a:srgbClr val="F5F8FF"/>
-                </a:solidFill>
-                <a:latin typeface="Segoe UI"/>
-              </a:rPr>
-              <a:t>POST /:id/join — KD mints E2E master key</a:t>
-            </a:r>
-          </a:p>
-        </p:txBody>
-      </p:sp>
-      <p:sp>
-        <p:nvSpPr>
-          <p:cNvPr id="10" name="Rounded Rectangle 9"/>
+            <a:pPr algn="ctr"/>
+            <a:r>
+              <a:rPr sz="1500" b="1">
+                <a:solidFill>
+                  <a:srgbClr val="F5F8FF"/>
+                </a:solidFill>
+                <a:latin typeface="Segoe UI"/>
+              </a:rPr>
+              <a:t>IV
+12B</a:t>
+            </a:r>
+          </a:p>
+        </p:txBody>
+      </p:sp>
+      <p:sp>
+        <p:nvSpPr>
+          <p:cNvPr id="9" name="Rounded Rectangle 8"/>
           <p:cNvSpPr/>
           <p:nvPr/>
         </p:nvSpPr>
         <p:spPr>
           <a:xfrm>
-            <a:off x="640080" y="3072384"/>
-            <a:ext cx="640080" cy="548640"/>
+            <a:off x="4700016" y="2286000"/>
+            <a:ext cx="4572000" cy="1005840"/>
           </a:xfrm>
           <a:prstGeom prst="roundRect">
             <a:avLst/>
           </a:prstGeom>
           <a:solidFill>
-            <a:srgbClr val="4C9AFF"/>
+            <a:srgbClr val="1B2A4A"/>
           </a:solidFill>
           <a:ln w="15875">
             <a:solidFill>
-              <a:srgbClr val="4C9AFF"/>
+              <a:srgbClr val="6B478F"/>
             </a:solidFill>
           </a:ln>
           <a:effectLst/>
@@ -12325,27 +11960,28 @@
           <a:p>
             <a:pPr algn="ctr"/>
             <a:r>
-              <a:rPr sz="1600" b="1">
-                <a:solidFill>
-                  <a:srgbClr val="F5F8FF"/>
-                </a:solidFill>
-                <a:latin typeface="Segoe UI"/>
-              </a:rPr>
-              <a:t>3</a:t>
-            </a:r>
-          </a:p>
-        </p:txBody>
-      </p:sp>
-      <p:sp>
-        <p:nvSpPr>
-          <p:cNvPr id="11" name="Rounded Rectangle 10"/>
+              <a:rPr sz="1500" b="1">
+                <a:solidFill>
+                  <a:srgbClr val="F5F8FF"/>
+                </a:solidFill>
+                <a:latin typeface="Segoe UI"/>
+              </a:rPr>
+              <a:t>ciphertext
+N bytes</a:t>
+            </a:r>
+          </a:p>
+        </p:txBody>
+      </p:sp>
+      <p:sp>
+        <p:nvSpPr>
+          <p:cNvPr id="10" name="Rounded Rectangle 9"/>
           <p:cNvSpPr/>
           <p:nvPr/>
         </p:nvSpPr>
         <p:spPr>
           <a:xfrm>
-            <a:off x="1463040" y="3072384"/>
-            <a:ext cx="9966960" cy="548640"/>
+            <a:off x="9381744" y="2286000"/>
+            <a:ext cx="1828800" cy="1005840"/>
           </a:xfrm>
           <a:prstGeom prst="roundRect">
             <a:avLst/>
@@ -12355,7 +11991,7 @@
           </a:solidFill>
           <a:ln w="15875">
             <a:solidFill>
-              <a:srgbClr val="4C9AFF"/>
+              <a:srgbClr val="F2B14C"/>
             </a:solidFill>
           </a:ln>
           <a:effectLst/>
@@ -12378,352 +12014,110 @@
           <a:bodyPr rtlCol="0" anchor="ctr" wrap="square" lIns="73152" rIns="73152" tIns="36576" bIns="36576"/>
           <a:lstStyle/>
           <a:p>
-            <a:pPr algn="l"/>
-            <a:r>
-              <a:rPr sz="1500" b="0">
-                <a:solidFill>
-                  <a:srgbClr val="F5F8FF"/>
-                </a:solidFill>
-                <a:latin typeface="Segoe UI"/>
-              </a:rPr>
-              <a:t>Key bundle returned (KEK, e2eMasterKey, kekSpi → key_id)</a:t>
-            </a:r>
-          </a:p>
-        </p:txBody>
-      </p:sp>
-      <p:sp>
-        <p:nvSpPr>
-          <p:cNvPr id="12" name="Rounded Rectangle 11"/>
-          <p:cNvSpPr/>
-          <p:nvPr/>
-        </p:nvSpPr>
-        <p:spPr>
-          <a:xfrm>
-            <a:off x="640080" y="3785616"/>
-            <a:ext cx="640080" cy="548640"/>
-          </a:xfrm>
-          <a:prstGeom prst="roundRect">
-            <a:avLst/>
-          </a:prstGeom>
-          <a:solidFill>
-            <a:srgbClr val="4C9AFF"/>
-          </a:solidFill>
-          <a:ln w="15875">
-            <a:solidFill>
-              <a:srgbClr val="4C9AFF"/>
-            </a:solidFill>
-          </a:ln>
-          <a:effectLst/>
-        </p:spPr>
-        <p:style>
-          <a:lnRef idx="1">
-            <a:schemeClr val="accent1"/>
-          </a:lnRef>
-          <a:fillRef idx="3">
-            <a:schemeClr val="accent1"/>
-          </a:fillRef>
-          <a:effectRef idx="2">
-            <a:schemeClr val="accent1"/>
-          </a:effectRef>
-          <a:fontRef idx="minor">
-            <a:schemeClr val="lt1"/>
-          </a:fontRef>
-        </p:style>
-        <p:txBody>
-          <a:bodyPr rtlCol="0" anchor="ctr" wrap="square" lIns="73152" rIns="73152" tIns="36576" bIns="36576"/>
-          <a:lstStyle/>
-          <a:p>
             <a:pPr algn="ctr"/>
             <a:r>
-              <a:rPr sz="1600" b="1">
-                <a:solidFill>
-                  <a:srgbClr val="F5F8FF"/>
-                </a:solidFill>
-                <a:latin typeface="Segoe UI"/>
-              </a:rPr>
-              <a:t>4</a:t>
-            </a:r>
-          </a:p>
-        </p:txBody>
-      </p:sp>
-      <p:sp>
-        <p:nvSpPr>
-          <p:cNvPr id="13" name="Rounded Rectangle 12"/>
-          <p:cNvSpPr/>
-          <p:nvPr/>
-        </p:nvSpPr>
-        <p:spPr>
-          <a:xfrm>
-            <a:off x="1463040" y="3785616"/>
-            <a:ext cx="9966960" cy="548640"/>
-          </a:xfrm>
-          <a:prstGeom prst="roundRect">
-            <a:avLst/>
-          </a:prstGeom>
-          <a:solidFill>
-            <a:srgbClr val="1B2A4A"/>
-          </a:solidFill>
-          <a:ln w="15875">
-            <a:solidFill>
-              <a:srgbClr val="4C9AFF"/>
-            </a:solidFill>
-          </a:ln>
-          <a:effectLst/>
-        </p:spPr>
-        <p:style>
-          <a:lnRef idx="1">
-            <a:schemeClr val="accent1"/>
-          </a:lnRef>
-          <a:fillRef idx="3">
-            <a:schemeClr val="accent1"/>
-          </a:fillRef>
-          <a:effectRef idx="2">
-            <a:schemeClr val="accent1"/>
-          </a:effectRef>
-          <a:fontRef idx="minor">
-            <a:schemeClr val="lt1"/>
-          </a:fontRef>
-        </p:style>
-        <p:txBody>
-          <a:bodyPr rtlCol="0" anchor="ctr" wrap="square" lIns="73152" rIns="73152" tIns="36576" bIns="36576"/>
-          <a:lstStyle/>
-          <a:p>
-            <a:pPr algn="l"/>
-            <a:r>
-              <a:rPr sz="1500" b="0">
-                <a:solidFill>
-                  <a:srgbClr val="F5F8FF"/>
-                </a:solidFill>
-                <a:latin typeface="Segoe UI"/>
-              </a:rPr>
-              <a:t>WS /ws/endpoint — realtime key updates</a:t>
-            </a:r>
-          </a:p>
-        </p:txBody>
-      </p:sp>
-      <p:sp>
-        <p:nvSpPr>
-          <p:cNvPr id="14" name="Rounded Rectangle 13"/>
-          <p:cNvSpPr/>
-          <p:nvPr/>
-        </p:nvSpPr>
-        <p:spPr>
-          <a:xfrm>
-            <a:off x="640080" y="4498848"/>
-            <a:ext cx="640080" cy="548640"/>
-          </a:xfrm>
-          <a:prstGeom prst="roundRect">
-            <a:avLst/>
-          </a:prstGeom>
-          <a:solidFill>
-            <a:srgbClr val="4C9AFF"/>
-          </a:solidFill>
-          <a:ln w="15875">
-            <a:solidFill>
-              <a:srgbClr val="4C9AFF"/>
-            </a:solidFill>
-          </a:ln>
-          <a:effectLst/>
-        </p:spPr>
-        <p:style>
-          <a:lnRef idx="1">
-            <a:schemeClr val="accent1"/>
-          </a:lnRef>
-          <a:fillRef idx="3">
-            <a:schemeClr val="accent1"/>
-          </a:fillRef>
-          <a:effectRef idx="2">
-            <a:schemeClr val="accent1"/>
-          </a:effectRef>
-          <a:fontRef idx="minor">
-            <a:schemeClr val="lt1"/>
-          </a:fontRef>
-        </p:style>
-        <p:txBody>
-          <a:bodyPr rtlCol="0" anchor="ctr" wrap="square" lIns="73152" rIns="73152" tIns="36576" bIns="36576"/>
-          <a:lstStyle/>
-          <a:p>
-            <a:pPr algn="ctr"/>
-            <a:r>
-              <a:rPr sz="1600" b="1">
-                <a:solidFill>
-                  <a:srgbClr val="F5F8FF"/>
-                </a:solidFill>
-                <a:latin typeface="Segoe UI"/>
-              </a:rPr>
-              <a:t>5</a:t>
-            </a:r>
-          </a:p>
-        </p:txBody>
-      </p:sp>
-      <p:sp>
-        <p:nvSpPr>
-          <p:cNvPr id="15" name="Rounded Rectangle 14"/>
-          <p:cNvSpPr/>
-          <p:nvPr/>
-        </p:nvSpPr>
-        <p:spPr>
-          <a:xfrm>
-            <a:off x="1463040" y="4498848"/>
-            <a:ext cx="9966960" cy="548640"/>
-          </a:xfrm>
-          <a:prstGeom prst="roundRect">
-            <a:avLst/>
-          </a:prstGeom>
-          <a:solidFill>
-            <a:srgbClr val="1B2A4A"/>
-          </a:solidFill>
-          <a:ln w="15875">
-            <a:solidFill>
-              <a:srgbClr val="35D09B"/>
-            </a:solidFill>
-          </a:ln>
-          <a:effectLst/>
-        </p:spPr>
-        <p:style>
-          <a:lnRef idx="1">
-            <a:schemeClr val="accent1"/>
-          </a:lnRef>
-          <a:fillRef idx="3">
-            <a:schemeClr val="accent1"/>
-          </a:fillRef>
-          <a:effectRef idx="2">
-            <a:schemeClr val="accent1"/>
-          </a:effectRef>
-          <a:fontRef idx="minor">
-            <a:schemeClr val="lt1"/>
-          </a:fontRef>
-        </p:style>
-        <p:txBody>
-          <a:bodyPr rtlCol="0" anchor="ctr" wrap="square" lIns="73152" rIns="73152" tIns="36576" bIns="36576"/>
-          <a:lstStyle/>
-          <a:p>
-            <a:pPr algn="l"/>
-            <a:r>
-              <a:rPr sz="1500" b="0">
-                <a:solidFill>
-                  <a:srgbClr val="F5F8FF"/>
-                </a:solidFill>
-                <a:latin typeface="Segoe UI"/>
-              </a:rPr>
-              <a:t>Member join/leave rotates KEK → 'rekey' pushed to all</a:t>
-            </a:r>
-          </a:p>
-        </p:txBody>
-      </p:sp>
-      <p:sp>
-        <p:nvSpPr>
-          <p:cNvPr id="16" name="Rounded Rectangle 15"/>
-          <p:cNvSpPr/>
-          <p:nvPr/>
-        </p:nvSpPr>
-        <p:spPr>
-          <a:xfrm>
-            <a:off x="640080" y="5212080"/>
-            <a:ext cx="640080" cy="548640"/>
-          </a:xfrm>
-          <a:prstGeom prst="roundRect">
-            <a:avLst/>
-          </a:prstGeom>
-          <a:solidFill>
-            <a:srgbClr val="4C9AFF"/>
-          </a:solidFill>
-          <a:ln w="15875">
-            <a:solidFill>
-              <a:srgbClr val="4C9AFF"/>
-            </a:solidFill>
-          </a:ln>
-          <a:effectLst/>
-        </p:spPr>
-        <p:style>
-          <a:lnRef idx="1">
-            <a:schemeClr val="accent1"/>
-          </a:lnRef>
-          <a:fillRef idx="3">
-            <a:schemeClr val="accent1"/>
-          </a:fillRef>
-          <a:effectRef idx="2">
-            <a:schemeClr val="accent1"/>
-          </a:effectRef>
-          <a:fontRef idx="minor">
-            <a:schemeClr val="lt1"/>
-          </a:fontRef>
-        </p:style>
-        <p:txBody>
-          <a:bodyPr rtlCol="0" anchor="ctr" wrap="square" lIns="73152" rIns="73152" tIns="36576" bIns="36576"/>
-          <a:lstStyle/>
-          <a:p>
-            <a:pPr algn="ctr"/>
-            <a:r>
-              <a:rPr sz="1600" b="1">
-                <a:solidFill>
-                  <a:srgbClr val="F5F8FF"/>
-                </a:solidFill>
-                <a:latin typeface="Segoe UI"/>
-              </a:rPr>
-              <a:t>6</a:t>
-            </a:r>
-          </a:p>
-        </p:txBody>
-      </p:sp>
-      <p:sp>
-        <p:nvSpPr>
-          <p:cNvPr id="17" name="Rounded Rectangle 16"/>
-          <p:cNvSpPr/>
-          <p:nvPr/>
-        </p:nvSpPr>
-        <p:spPr>
-          <a:xfrm>
-            <a:off x="1463040" y="5212080"/>
-            <a:ext cx="9966960" cy="548640"/>
-          </a:xfrm>
-          <a:prstGeom prst="roundRect">
-            <a:avLst/>
-          </a:prstGeom>
-          <a:solidFill>
-            <a:srgbClr val="1B2A4A"/>
-          </a:solidFill>
-          <a:ln w="15875">
-            <a:solidFill>
-              <a:srgbClr val="4C9AFF"/>
-            </a:solidFill>
-          </a:ln>
-          <a:effectLst/>
-        </p:spPr>
-        <p:style>
-          <a:lnRef idx="1">
-            <a:schemeClr val="accent1"/>
-          </a:lnRef>
-          <a:fillRef idx="3">
-            <a:schemeClr val="accent1"/>
-          </a:fillRef>
-          <a:effectRef idx="2">
-            <a:schemeClr val="accent1"/>
-          </a:effectRef>
-          <a:fontRef idx="minor">
-            <a:schemeClr val="lt1"/>
-          </a:fontRef>
-        </p:style>
-        <p:txBody>
-          <a:bodyPr rtlCol="0" anchor="ctr" wrap="square" lIns="73152" rIns="73152" tIns="36576" bIns="36576"/>
-          <a:lstStyle/>
-          <a:p>
-            <a:pPr algn="l"/>
-            <a:r>
-              <a:rPr sz="1500" b="0">
-                <a:solidFill>
-                  <a:srgbClr val="F5F8FF"/>
-                </a:solidFill>
-                <a:latin typeface="Segoe UI"/>
-              </a:rPr>
-              <a:t>Client installs key: pc.installE2eeKey(keyId, keyBuf)</a:t>
-            </a:r>
-          </a:p>
-        </p:txBody>
-      </p:sp>
-      <p:sp>
-        <p:nvSpPr>
-          <p:cNvPr id="18" name="TextBox 17"/>
+              <a:rPr sz="1500" b="1">
+                <a:solidFill>
+                  <a:srgbClr val="F5F8FF"/>
+                </a:solidFill>
+                <a:latin typeface="Segoe UI"/>
+              </a:rPr>
+              <a:t>GCM tag
+16B</a:t>
+            </a:r>
+          </a:p>
+        </p:txBody>
+      </p:sp>
+      <p:sp>
+        <p:nvSpPr>
+          <p:cNvPr id="11" name="TextBox 10"/>
+          <p:cNvSpPr txBox="1"/>
+          <p:nvPr/>
+        </p:nvSpPr>
+        <p:spPr>
+          <a:xfrm>
+            <a:off x="640080" y="3657600"/>
+            <a:ext cx="10789920" cy="4572000"/>
+          </a:xfrm>
+          <a:prstGeom prst="rect">
+            <a:avLst/>
+          </a:prstGeom>
+          <a:noFill/>
+        </p:spPr>
+        <p:txBody>
+          <a:bodyPr wrap="square">
+            <a:spAutoFit/>
+          </a:bodyPr>
+          <a:lstStyle/>
+          <a:p>
+            <a:pPr>
+              <a:spcAft>
+                <a:spcPts val="1152"/>
+              </a:spcAft>
+            </a:pPr>
+            <a:r>
+              <a:rPr sz="1800">
+                <a:solidFill>
+                  <a:srgbClr val="F5F8FF"/>
+                </a:solidFill>
+                <a:latin typeface="Segoe UI"/>
+              </a:rPr>
+              <a:t>• key_id — KEK SPI / epoch selector from the Key Distributor.</a:t>
+            </a:r>
+          </a:p>
+          <a:p>
+            <a:pPr>
+              <a:spcAft>
+                <a:spcPts val="1152"/>
+              </a:spcAft>
+            </a:pPr>
+            <a:r>
+              <a:rPr sz="1800">
+                <a:solidFill>
+                  <a:srgbClr val="F5F8FF"/>
+                </a:solidFill>
+                <a:latin typeface="Segoe UI"/>
+              </a:rPr>
+              <a:t>• IV — SSRC (4B, big-endian) ‖ frame counter (8B).</a:t>
+            </a:r>
+          </a:p>
+          <a:p>
+            <a:pPr>
+              <a:spcAft>
+                <a:spcPts val="1152"/>
+              </a:spcAft>
+            </a:pPr>
+            <a:r>
+              <a:rPr sz="1800">
+                <a:solidFill>
+                  <a:srgbClr val="F5F8FF"/>
+                </a:solidFill>
+                <a:latin typeface="Segoe UI"/>
+              </a:rPr>
+              <a:t>• Fixed overhead = 1 + 12 + 16 = 29 bytes per frame.</a:t>
+            </a:r>
+          </a:p>
+          <a:p>
+            <a:pPr>
+              <a:spcAft>
+                <a:spcPts val="1152"/>
+              </a:spcAft>
+            </a:pPr>
+            <a:r>
+              <a:rPr sz="1800">
+                <a:solidFill>
+                  <a:srgbClr val="F5F8FF"/>
+                </a:solidFill>
+                <a:latin typeface="Segoe UI"/>
+              </a:rPr>
+              <a:t>• SFU forwards this inner payload byte-for-byte (no per-packet rewriting).</a:t>
+            </a:r>
+          </a:p>
+        </p:txBody>
+      </p:sp>
+      <p:sp>
+        <p:nvSpPr>
+          <p:cNvPr id="12" name="TextBox 11"/>
           <p:cNvSpPr txBox="1"/>
           <p:nvPr/>
         </p:nvSpPr>
@@ -12758,7 +12152,7 @@
       </p:sp>
       <p:sp>
         <p:nvSpPr>
-          <p:cNvPr id="19" name="TextBox 18"/>
+          <p:cNvPr id="13" name="TextBox 12"/>
           <p:cNvSpPr txBox="1"/>
           <p:nvPr/>
         </p:nvSpPr>
